--- a/PRJ13797_JMUX_NextSteps_Apr24_2026.pptx
+++ b/PRJ13797_JMUX_NextSteps_Apr24_2026.pptx
@@ -3990,7 +3990,7 @@
             <a:avLst/>
           </a:prstGeom>
           <a:solidFill>
-            <a:srgbClr val="FFE0E0"/>
+            <a:srgbClr val="FFF2CC"/>
           </a:solidFill>
           <a:ln>
             <a:solidFill>
@@ -4035,7 +4035,7 @@
             <a:avLst/>
           </a:prstGeom>
           <a:solidFill>
-            <a:srgbClr val="C00000"/>
+            <a:srgbClr val="ED7D31"/>
           </a:solidFill>
           <a:ln>
             <a:noFill/>
@@ -4121,12 +4121,12 @@
           <a:p>
             <a:pPr algn="l"/>
             <a:r>
-              <a:rPr sz="950" b="1" i="0">
+              <a:rPr sz="950" b="0" i="0">
                 <a:solidFill>
                   <a:srgbClr val="1F3964"/>
                 </a:solidFill>
               </a:rPr>
-              <a:t>⚠️ Place PO — Iniven RC-30 (6 PAR sites) — 8-WEEK LEAD TIME — ORDER IMMEDIATELY</a:t>
+              <a:t>Start PAR engineering design — Chakrapani team, concurrent with RC-30 delivery</a:t>
             </a:r>
           </a:p>
         </p:txBody>
@@ -4146,7 +4146,7 @@
             <a:avLst/>
           </a:prstGeom>
           <a:solidFill>
-            <a:srgbClr val="C00000"/>
+            <a:srgbClr val="ED7D31"/>
           </a:solidFill>
           <a:ln>
             <a:noFill/>
@@ -4183,6 +4183,705 @@
         <p:spPr>
           <a:xfrm>
             <a:off x="6089904" y="3154680"/>
+            <a:ext cx="1408176" cy="274320"/>
+          </a:xfrm>
+          <a:prstGeom prst="rect">
+            <a:avLst/>
+          </a:prstGeom>
+          <a:noFill/>
+        </p:spPr>
+        <p:txBody>
+          <a:bodyPr wrap="square">
+            <a:spAutoFit/>
+          </a:bodyPr>
+          <a:lstStyle/>
+          <a:p>
+            <a:pPr algn="ctr"/>
+            <a:r>
+              <a:rPr sz="750" b="0" i="0">
+                <a:solidFill>
+                  <a:srgbClr val="FFFFFF"/>
+                </a:solidFill>
+              </a:rPr>
+              <a:t>BMcD / Jay</a:t>
+            </a:r>
+          </a:p>
+        </p:txBody>
+      </p:sp>
+      <p:sp>
+        <p:nvSpPr>
+          <p:cNvPr id="31" name="Rectangle 30"/>
+          <p:cNvSpPr/>
+          <p:nvPr/>
+        </p:nvSpPr>
+        <p:spPr>
+          <a:xfrm>
+            <a:off x="228600" y="3602736"/>
+            <a:ext cx="7315200" cy="502919"/>
+          </a:xfrm>
+          <a:prstGeom prst="rect">
+            <a:avLst/>
+          </a:prstGeom>
+          <a:solidFill>
+            <a:srgbClr val="FFF2CC"/>
+          </a:solidFill>
+          <a:ln>
+            <a:solidFill>
+              <a:srgbClr val="D0D0D0"/>
+            </a:solidFill>
+          </a:ln>
+        </p:spPr>
+        <p:style>
+          <a:lnRef idx="1">
+            <a:schemeClr val="accent1"/>
+          </a:lnRef>
+          <a:fillRef idx="3">
+            <a:schemeClr val="accent1"/>
+          </a:fillRef>
+          <a:effectRef idx="2">
+            <a:schemeClr val="accent1"/>
+          </a:effectRef>
+          <a:fontRef idx="minor">
+            <a:schemeClr val="lt1"/>
+          </a:fontRef>
+        </p:style>
+        <p:txBody>
+          <a:bodyPr rtlCol="0" anchor="ctr"/>
+          <a:lstStyle/>
+          <a:p>
+            <a:pPr algn="ctr"/>
+          </a:p>
+        </p:txBody>
+      </p:sp>
+      <p:sp>
+        <p:nvSpPr>
+          <p:cNvPr id="32" name="Rectangle 31"/>
+          <p:cNvSpPr/>
+          <p:nvPr/>
+        </p:nvSpPr>
+        <p:spPr>
+          <a:xfrm>
+            <a:off x="256032" y="3675887"/>
+            <a:ext cx="347472" cy="347472"/>
+          </a:xfrm>
+          <a:prstGeom prst="rect">
+            <a:avLst/>
+          </a:prstGeom>
+          <a:solidFill>
+            <a:srgbClr val="ED7D31"/>
+          </a:solidFill>
+          <a:ln>
+            <a:noFill/>
+          </a:ln>
+        </p:spPr>
+        <p:style>
+          <a:lnRef idx="1">
+            <a:schemeClr val="accent1"/>
+          </a:lnRef>
+          <a:fillRef idx="3">
+            <a:schemeClr val="accent1"/>
+          </a:fillRef>
+          <a:effectRef idx="2">
+            <a:schemeClr val="accent1"/>
+          </a:effectRef>
+          <a:fontRef idx="minor">
+            <a:schemeClr val="lt1"/>
+          </a:fontRef>
+        </p:style>
+        <p:txBody>
+          <a:bodyPr rtlCol="0" anchor="ctr"/>
+          <a:lstStyle/>
+          <a:p>
+            <a:pPr algn="ctr"/>
+          </a:p>
+        </p:txBody>
+      </p:sp>
+      <p:sp>
+        <p:nvSpPr>
+          <p:cNvPr id="33" name="TextBox 32"/>
+          <p:cNvSpPr txBox="1"/>
+          <p:nvPr/>
+        </p:nvSpPr>
+        <p:spPr>
+          <a:xfrm>
+            <a:off x="256032" y="3675887"/>
+            <a:ext cx="347472" cy="347472"/>
+          </a:xfrm>
+          <a:prstGeom prst="rect">
+            <a:avLst/>
+          </a:prstGeom>
+          <a:noFill/>
+        </p:spPr>
+        <p:txBody>
+          <a:bodyPr wrap="square">
+            <a:spAutoFit/>
+          </a:bodyPr>
+          <a:lstStyle/>
+          <a:p>
+            <a:pPr algn="ctr"/>
+            <a:r>
+              <a:rPr sz="900" b="1" i="0">
+                <a:solidFill>
+                  <a:srgbClr val="FFFFFF"/>
+                </a:solidFill>
+              </a:rPr>
+              <a:t>5️⃣</a:t>
+            </a:r>
+          </a:p>
+        </p:txBody>
+      </p:sp>
+      <p:sp>
+        <p:nvSpPr>
+          <p:cNvPr id="34" name="TextBox 33"/>
+          <p:cNvSpPr txBox="1"/>
+          <p:nvPr/>
+        </p:nvSpPr>
+        <p:spPr>
+          <a:xfrm>
+            <a:off x="658368" y="3639312"/>
+            <a:ext cx="5394960" cy="310896"/>
+          </a:xfrm>
+          <a:prstGeom prst="rect">
+            <a:avLst/>
+          </a:prstGeom>
+          <a:noFill/>
+        </p:spPr>
+        <p:txBody>
+          <a:bodyPr wrap="square">
+            <a:spAutoFit/>
+          </a:bodyPr>
+          <a:lstStyle/>
+          <a:p>
+            <a:pPr algn="l"/>
+            <a:r>
+              <a:rPr sz="950" b="0" i="0">
+                <a:solidFill>
+                  <a:srgbClr val="1F3964"/>
+                </a:solidFill>
+              </a:rPr>
+              <a:t>Northport C37.94 card — bundle order with Phase 2 equipment PO</a:t>
+            </a:r>
+          </a:p>
+        </p:txBody>
+      </p:sp>
+      <p:sp>
+        <p:nvSpPr>
+          <p:cNvPr id="35" name="Rectangle 34"/>
+          <p:cNvSpPr/>
+          <p:nvPr/>
+        </p:nvSpPr>
+        <p:spPr>
+          <a:xfrm>
+            <a:off x="6080760" y="3694176"/>
+            <a:ext cx="1417320" cy="274320"/>
+          </a:xfrm>
+          <a:prstGeom prst="rect">
+            <a:avLst/>
+          </a:prstGeom>
+          <a:solidFill>
+            <a:srgbClr val="ED7D31"/>
+          </a:solidFill>
+          <a:ln>
+            <a:noFill/>
+          </a:ln>
+        </p:spPr>
+        <p:style>
+          <a:lnRef idx="1">
+            <a:schemeClr val="accent1"/>
+          </a:lnRef>
+          <a:fillRef idx="3">
+            <a:schemeClr val="accent1"/>
+          </a:fillRef>
+          <a:effectRef idx="2">
+            <a:schemeClr val="accent1"/>
+          </a:effectRef>
+          <a:fontRef idx="minor">
+            <a:schemeClr val="lt1"/>
+          </a:fontRef>
+        </p:style>
+        <p:txBody>
+          <a:bodyPr rtlCol="0" anchor="ctr"/>
+          <a:lstStyle/>
+          <a:p>
+            <a:pPr algn="ctr"/>
+          </a:p>
+        </p:txBody>
+      </p:sp>
+      <p:sp>
+        <p:nvSpPr>
+          <p:cNvPr id="36" name="TextBox 35"/>
+          <p:cNvSpPr txBox="1"/>
+          <p:nvPr/>
+        </p:nvSpPr>
+        <p:spPr>
+          <a:xfrm>
+            <a:off x="6089904" y="3694176"/>
+            <a:ext cx="1408176" cy="274320"/>
+          </a:xfrm>
+          <a:prstGeom prst="rect">
+            <a:avLst/>
+          </a:prstGeom>
+          <a:noFill/>
+        </p:spPr>
+        <p:txBody>
+          <a:bodyPr wrap="square">
+            <a:spAutoFit/>
+          </a:bodyPr>
+          <a:lstStyle/>
+          <a:p>
+            <a:pPr algn="ctr"/>
+            <a:r>
+              <a:rPr sz="750" b="0" i="0">
+                <a:solidFill>
+                  <a:srgbClr val="FFFFFF"/>
+                </a:solidFill>
+              </a:rPr>
+              <a:t>Jay / BMcD</a:t>
+            </a:r>
+          </a:p>
+        </p:txBody>
+      </p:sp>
+      <p:sp>
+        <p:nvSpPr>
+          <p:cNvPr id="37" name="Rectangle 36"/>
+          <p:cNvSpPr/>
+          <p:nvPr/>
+        </p:nvSpPr>
+        <p:spPr>
+          <a:xfrm>
+            <a:off x="228600" y="4142231"/>
+            <a:ext cx="7315200" cy="502919"/>
+          </a:xfrm>
+          <a:prstGeom prst="rect">
+            <a:avLst/>
+          </a:prstGeom>
+          <a:solidFill>
+            <a:srgbClr val="FFF2CC"/>
+          </a:solidFill>
+          <a:ln>
+            <a:solidFill>
+              <a:srgbClr val="D0D0D0"/>
+            </a:solidFill>
+          </a:ln>
+        </p:spPr>
+        <p:style>
+          <a:lnRef idx="1">
+            <a:schemeClr val="accent1"/>
+          </a:lnRef>
+          <a:fillRef idx="3">
+            <a:schemeClr val="accent1"/>
+          </a:fillRef>
+          <a:effectRef idx="2">
+            <a:schemeClr val="accent1"/>
+          </a:effectRef>
+          <a:fontRef idx="minor">
+            <a:schemeClr val="lt1"/>
+          </a:fontRef>
+        </p:style>
+        <p:txBody>
+          <a:bodyPr rtlCol="0" anchor="ctr"/>
+          <a:lstStyle/>
+          <a:p>
+            <a:pPr algn="ctr"/>
+          </a:p>
+        </p:txBody>
+      </p:sp>
+      <p:sp>
+        <p:nvSpPr>
+          <p:cNvPr id="38" name="Rectangle 37"/>
+          <p:cNvSpPr/>
+          <p:nvPr/>
+        </p:nvSpPr>
+        <p:spPr>
+          <a:xfrm>
+            <a:off x="256032" y="4215383"/>
+            <a:ext cx="347472" cy="347472"/>
+          </a:xfrm>
+          <a:prstGeom prst="rect">
+            <a:avLst/>
+          </a:prstGeom>
+          <a:solidFill>
+            <a:srgbClr val="ED7D31"/>
+          </a:solidFill>
+          <a:ln>
+            <a:noFill/>
+          </a:ln>
+        </p:spPr>
+        <p:style>
+          <a:lnRef idx="1">
+            <a:schemeClr val="accent1"/>
+          </a:lnRef>
+          <a:fillRef idx="3">
+            <a:schemeClr val="accent1"/>
+          </a:fillRef>
+          <a:effectRef idx="2">
+            <a:schemeClr val="accent1"/>
+          </a:effectRef>
+          <a:fontRef idx="minor">
+            <a:schemeClr val="lt1"/>
+          </a:fontRef>
+        </p:style>
+        <p:txBody>
+          <a:bodyPr rtlCol="0" anchor="ctr"/>
+          <a:lstStyle/>
+          <a:p>
+            <a:pPr algn="ctr"/>
+          </a:p>
+        </p:txBody>
+      </p:sp>
+      <p:sp>
+        <p:nvSpPr>
+          <p:cNvPr id="39" name="TextBox 38"/>
+          <p:cNvSpPr txBox="1"/>
+          <p:nvPr/>
+        </p:nvSpPr>
+        <p:spPr>
+          <a:xfrm>
+            <a:off x="256032" y="4215383"/>
+            <a:ext cx="347472" cy="347472"/>
+          </a:xfrm>
+          <a:prstGeom prst="rect">
+            <a:avLst/>
+          </a:prstGeom>
+          <a:noFill/>
+        </p:spPr>
+        <p:txBody>
+          <a:bodyPr wrap="square">
+            <a:spAutoFit/>
+          </a:bodyPr>
+          <a:lstStyle/>
+          <a:p>
+            <a:pPr algn="ctr"/>
+            <a:r>
+              <a:rPr sz="900" b="1" i="0">
+                <a:solidFill>
+                  <a:srgbClr val="FFFFFF"/>
+                </a:solidFill>
+              </a:rPr>
+              <a:t>6️⃣</a:t>
+            </a:r>
+          </a:p>
+        </p:txBody>
+      </p:sp>
+      <p:sp>
+        <p:nvSpPr>
+          <p:cNvPr id="40" name="TextBox 39"/>
+          <p:cNvSpPr txBox="1"/>
+          <p:nvPr/>
+        </p:nvSpPr>
+        <p:spPr>
+          <a:xfrm>
+            <a:off x="658368" y="4178807"/>
+            <a:ext cx="5394960" cy="310896"/>
+          </a:xfrm>
+          <a:prstGeom prst="rect">
+            <a:avLst/>
+          </a:prstGeom>
+          <a:noFill/>
+        </p:spPr>
+        <p:txBody>
+          <a:bodyPr wrap="square">
+            <a:spAutoFit/>
+          </a:bodyPr>
+          <a:lstStyle/>
+          <a:p>
+            <a:pPr algn="l"/>
+            <a:r>
+              <a:rPr sz="950" b="0" i="0">
+                <a:solidFill>
+                  <a:srgbClr val="1F3964"/>
+                </a:solidFill>
+              </a:rPr>
+              <a:t>Hawkeye site surveys — cable &amp; SFP inventory across all Phase 2 sites</a:t>
+            </a:r>
+          </a:p>
+        </p:txBody>
+      </p:sp>
+      <p:sp>
+        <p:nvSpPr>
+          <p:cNvPr id="41" name="Rectangle 40"/>
+          <p:cNvSpPr/>
+          <p:nvPr/>
+        </p:nvSpPr>
+        <p:spPr>
+          <a:xfrm>
+            <a:off x="6080760" y="4233671"/>
+            <a:ext cx="1417320" cy="274320"/>
+          </a:xfrm>
+          <a:prstGeom prst="rect">
+            <a:avLst/>
+          </a:prstGeom>
+          <a:solidFill>
+            <a:srgbClr val="ED7D31"/>
+          </a:solidFill>
+          <a:ln>
+            <a:noFill/>
+          </a:ln>
+        </p:spPr>
+        <p:style>
+          <a:lnRef idx="1">
+            <a:schemeClr val="accent1"/>
+          </a:lnRef>
+          <a:fillRef idx="3">
+            <a:schemeClr val="accent1"/>
+          </a:fillRef>
+          <a:effectRef idx="2">
+            <a:schemeClr val="accent1"/>
+          </a:effectRef>
+          <a:fontRef idx="minor">
+            <a:schemeClr val="lt1"/>
+          </a:fontRef>
+        </p:style>
+        <p:txBody>
+          <a:bodyPr rtlCol="0" anchor="ctr"/>
+          <a:lstStyle/>
+          <a:p>
+            <a:pPr algn="ctr"/>
+          </a:p>
+        </p:txBody>
+      </p:sp>
+      <p:sp>
+        <p:nvSpPr>
+          <p:cNvPr id="42" name="TextBox 41"/>
+          <p:cNvSpPr txBox="1"/>
+          <p:nvPr/>
+        </p:nvSpPr>
+        <p:spPr>
+          <a:xfrm>
+            <a:off x="6089904" y="4233671"/>
+            <a:ext cx="1408176" cy="274320"/>
+          </a:xfrm>
+          <a:prstGeom prst="rect">
+            <a:avLst/>
+          </a:prstGeom>
+          <a:noFill/>
+        </p:spPr>
+        <p:txBody>
+          <a:bodyPr wrap="square">
+            <a:spAutoFit/>
+          </a:bodyPr>
+          <a:lstStyle/>
+          <a:p>
+            <a:pPr algn="ctr"/>
+            <a:r>
+              <a:rPr sz="750" b="0" i="0">
+                <a:solidFill>
+                  <a:srgbClr val="FFFFFF"/>
+                </a:solidFill>
+              </a:rPr>
+              <a:t>Vinny / Hawkeye</a:t>
+            </a:r>
+          </a:p>
+        </p:txBody>
+      </p:sp>
+      <p:sp>
+        <p:nvSpPr>
+          <p:cNvPr id="43" name="Rectangle 42"/>
+          <p:cNvSpPr/>
+          <p:nvPr/>
+        </p:nvSpPr>
+        <p:spPr>
+          <a:xfrm>
+            <a:off x="228600" y="4681728"/>
+            <a:ext cx="7315200" cy="502919"/>
+          </a:xfrm>
+          <a:prstGeom prst="rect">
+            <a:avLst/>
+          </a:prstGeom>
+          <a:solidFill>
+            <a:srgbClr val="F2F2F2"/>
+          </a:solidFill>
+          <a:ln>
+            <a:solidFill>
+              <a:srgbClr val="D0D0D0"/>
+            </a:solidFill>
+          </a:ln>
+        </p:spPr>
+        <p:style>
+          <a:lnRef idx="1">
+            <a:schemeClr val="accent1"/>
+          </a:lnRef>
+          <a:fillRef idx="3">
+            <a:schemeClr val="accent1"/>
+          </a:fillRef>
+          <a:effectRef idx="2">
+            <a:schemeClr val="accent1"/>
+          </a:effectRef>
+          <a:fontRef idx="minor">
+            <a:schemeClr val="lt1"/>
+          </a:fontRef>
+        </p:style>
+        <p:txBody>
+          <a:bodyPr rtlCol="0" anchor="ctr"/>
+          <a:lstStyle/>
+          <a:p>
+            <a:pPr algn="ctr"/>
+          </a:p>
+        </p:txBody>
+      </p:sp>
+      <p:sp>
+        <p:nvSpPr>
+          <p:cNvPr id="44" name="Rectangle 43"/>
+          <p:cNvSpPr/>
+          <p:nvPr/>
+        </p:nvSpPr>
+        <p:spPr>
+          <a:xfrm>
+            <a:off x="256032" y="4754880"/>
+            <a:ext cx="347472" cy="347472"/>
+          </a:xfrm>
+          <a:prstGeom prst="rect">
+            <a:avLst/>
+          </a:prstGeom>
+          <a:solidFill>
+            <a:srgbClr val="2E74B5"/>
+          </a:solidFill>
+          <a:ln>
+            <a:noFill/>
+          </a:ln>
+        </p:spPr>
+        <p:style>
+          <a:lnRef idx="1">
+            <a:schemeClr val="accent1"/>
+          </a:lnRef>
+          <a:fillRef idx="3">
+            <a:schemeClr val="accent1"/>
+          </a:fillRef>
+          <a:effectRef idx="2">
+            <a:schemeClr val="accent1"/>
+          </a:effectRef>
+          <a:fontRef idx="minor">
+            <a:schemeClr val="lt1"/>
+          </a:fontRef>
+        </p:style>
+        <p:txBody>
+          <a:bodyPr rtlCol="0" anchor="ctr"/>
+          <a:lstStyle/>
+          <a:p>
+            <a:pPr algn="ctr"/>
+          </a:p>
+        </p:txBody>
+      </p:sp>
+      <p:sp>
+        <p:nvSpPr>
+          <p:cNvPr id="45" name="TextBox 44"/>
+          <p:cNvSpPr txBox="1"/>
+          <p:nvPr/>
+        </p:nvSpPr>
+        <p:spPr>
+          <a:xfrm>
+            <a:off x="256032" y="4754880"/>
+            <a:ext cx="347472" cy="347472"/>
+          </a:xfrm>
+          <a:prstGeom prst="rect">
+            <a:avLst/>
+          </a:prstGeom>
+          <a:noFill/>
+        </p:spPr>
+        <p:txBody>
+          <a:bodyPr wrap="square">
+            <a:spAutoFit/>
+          </a:bodyPr>
+          <a:lstStyle/>
+          <a:p>
+            <a:pPr algn="ctr"/>
+            <a:r>
+              <a:rPr sz="900" b="1" i="0">
+                <a:solidFill>
+                  <a:srgbClr val="FFFFFF"/>
+                </a:solidFill>
+              </a:rPr>
+              <a:t>7️⃣</a:t>
+            </a:r>
+          </a:p>
+        </p:txBody>
+      </p:sp>
+      <p:sp>
+        <p:nvSpPr>
+          <p:cNvPr id="46" name="TextBox 45"/>
+          <p:cNvSpPr txBox="1"/>
+          <p:nvPr/>
+        </p:nvSpPr>
+        <p:spPr>
+          <a:xfrm>
+            <a:off x="658368" y="4718304"/>
+            <a:ext cx="5394960" cy="310896"/>
+          </a:xfrm>
+          <a:prstGeom prst="rect">
+            <a:avLst/>
+          </a:prstGeom>
+          <a:noFill/>
+        </p:spPr>
+        <p:txBody>
+          <a:bodyPr wrap="square">
+            <a:spAutoFit/>
+          </a:bodyPr>
+          <a:lstStyle/>
+          <a:p>
+            <a:pPr algn="l"/>
+            <a:r>
+              <a:rPr sz="950" b="0" i="0">
+                <a:solidFill>
+                  <a:srgbClr val="1F3964"/>
+                </a:solidFill>
+              </a:rPr>
+              <a:t>Confirm Nokia training dates with Glenn — identify attendees &amp; syllabus</a:t>
+            </a:r>
+          </a:p>
+        </p:txBody>
+      </p:sp>
+      <p:sp>
+        <p:nvSpPr>
+          <p:cNvPr id="47" name="Rectangle 46"/>
+          <p:cNvSpPr/>
+          <p:nvPr/>
+        </p:nvSpPr>
+        <p:spPr>
+          <a:xfrm>
+            <a:off x="6080760" y="4773168"/>
+            <a:ext cx="1417320" cy="274320"/>
+          </a:xfrm>
+          <a:prstGeom prst="rect">
+            <a:avLst/>
+          </a:prstGeom>
+          <a:solidFill>
+            <a:srgbClr val="2E74B5"/>
+          </a:solidFill>
+          <a:ln>
+            <a:noFill/>
+          </a:ln>
+        </p:spPr>
+        <p:style>
+          <a:lnRef idx="1">
+            <a:schemeClr val="accent1"/>
+          </a:lnRef>
+          <a:fillRef idx="3">
+            <a:schemeClr val="accent1"/>
+          </a:fillRef>
+          <a:effectRef idx="2">
+            <a:schemeClr val="accent1"/>
+          </a:effectRef>
+          <a:fontRef idx="minor">
+            <a:schemeClr val="lt1"/>
+          </a:fontRef>
+        </p:style>
+        <p:txBody>
+          <a:bodyPr rtlCol="0" anchor="ctr"/>
+          <a:lstStyle/>
+          <a:p>
+            <a:pPr algn="ctr"/>
+          </a:p>
+        </p:txBody>
+      </p:sp>
+      <p:sp>
+        <p:nvSpPr>
+          <p:cNvPr id="48" name="TextBox 47"/>
+          <p:cNvSpPr txBox="1"/>
+          <p:nvPr/>
+        </p:nvSpPr>
+        <p:spPr>
+          <a:xfrm>
+            <a:off x="6089904" y="4773168"/>
             <a:ext cx="1408176" cy="274320"/>
           </a:xfrm>
           <a:prstGeom prst="rect">
@@ -4210,13 +4909,13 @@
       </p:sp>
       <p:sp>
         <p:nvSpPr>
-          <p:cNvPr id="31" name="Rectangle 30"/>
+          <p:cNvPr id="49" name="Rectangle 48"/>
           <p:cNvSpPr/>
           <p:nvPr/>
         </p:nvSpPr>
         <p:spPr>
           <a:xfrm>
-            <a:off x="228600" y="3602736"/>
+            <a:off x="228600" y="5221224"/>
             <a:ext cx="7315200" cy="502919"/>
           </a:xfrm>
           <a:prstGeom prst="rect">
@@ -4255,13 +4954,13 @@
       </p:sp>
       <p:sp>
         <p:nvSpPr>
-          <p:cNvPr id="32" name="Rectangle 31"/>
+          <p:cNvPr id="50" name="Rectangle 49"/>
           <p:cNvSpPr/>
           <p:nvPr/>
         </p:nvSpPr>
         <p:spPr>
           <a:xfrm>
-            <a:off x="256032" y="3675887"/>
+            <a:off x="256032" y="5294376"/>
             <a:ext cx="347472" cy="347472"/>
           </a:xfrm>
           <a:prstGeom prst="rect">
@@ -4298,13 +4997,13 @@
       </p:sp>
       <p:sp>
         <p:nvSpPr>
-          <p:cNvPr id="33" name="TextBox 32"/>
+          <p:cNvPr id="51" name="TextBox 50"/>
           <p:cNvSpPr txBox="1"/>
           <p:nvPr/>
         </p:nvSpPr>
         <p:spPr>
           <a:xfrm>
-            <a:off x="256032" y="3675887"/>
+            <a:off x="256032" y="5294376"/>
             <a:ext cx="347472" cy="347472"/>
           </a:xfrm>
           <a:prstGeom prst="rect">
@@ -4325,20 +5024,20 @@
                   <a:srgbClr val="FFFFFF"/>
                 </a:solidFill>
               </a:rPr>
-              <a:t>5️⃣</a:t>
-            </a:r>
-          </a:p>
-        </p:txBody>
-      </p:sp>
-      <p:sp>
-        <p:nvSpPr>
-          <p:cNvPr id="34" name="TextBox 33"/>
+              <a:t>8️⃣</a:t>
+            </a:r>
+          </a:p>
+        </p:txBody>
+      </p:sp>
+      <p:sp>
+        <p:nvSpPr>
+          <p:cNvPr id="52" name="TextBox 51"/>
           <p:cNvSpPr txBox="1"/>
           <p:nvPr/>
         </p:nvSpPr>
         <p:spPr>
           <a:xfrm>
-            <a:off x="658368" y="3639312"/>
+            <a:off x="658368" y="5257800"/>
             <a:ext cx="5394960" cy="310896"/>
           </a:xfrm>
           <a:prstGeom prst="rect">
@@ -4359,20 +5058,20 @@
                   <a:srgbClr val="1F3964"/>
                 </a:solidFill>
               </a:rPr>
-              <a:t>⚠️ Start PAR engineering design concurrently with PO placement</a:t>
-            </a:r>
-          </a:p>
-        </p:txBody>
-      </p:sp>
-      <p:sp>
-        <p:nvSpPr>
-          <p:cNvPr id="35" name="Rectangle 34"/>
+              <a:t>Lindenhurst IFR submission — due Monday April 27  ⚠️ IMMINENT</a:t>
+            </a:r>
+          </a:p>
+        </p:txBody>
+      </p:sp>
+      <p:sp>
+        <p:nvSpPr>
+          <p:cNvPr id="53" name="Rectangle 52"/>
           <p:cNvSpPr/>
           <p:nvPr/>
         </p:nvSpPr>
         <p:spPr>
           <a:xfrm>
-            <a:off x="6080760" y="3694176"/>
+            <a:off x="6080760" y="5312664"/>
             <a:ext cx="1417320" cy="274320"/>
           </a:xfrm>
           <a:prstGeom prst="rect">
@@ -4409,13 +5108,13 @@
       </p:sp>
       <p:sp>
         <p:nvSpPr>
-          <p:cNvPr id="36" name="TextBox 35"/>
+          <p:cNvPr id="54" name="TextBox 53"/>
           <p:cNvSpPr txBox="1"/>
           <p:nvPr/>
         </p:nvSpPr>
         <p:spPr>
           <a:xfrm>
-            <a:off x="6089904" y="3694176"/>
+            <a:off x="6089904" y="5312664"/>
             <a:ext cx="1408176" cy="274320"/>
           </a:xfrm>
           <a:prstGeom prst="rect">
@@ -4436,21 +5135,521 @@
                   <a:srgbClr val="FFFFFF"/>
                 </a:solidFill>
               </a:rPr>
-              <a:t>BMcD / Jay</a:t>
-            </a:r>
-          </a:p>
-        </p:txBody>
-      </p:sp>
-      <p:sp>
-        <p:nvSpPr>
-          <p:cNvPr id="37" name="Rectangle 36"/>
+              <a:t>Burns &amp; McDonnell</a:t>
+            </a:r>
+          </a:p>
+        </p:txBody>
+      </p:sp>
+      <p:sp>
+        <p:nvSpPr>
+          <p:cNvPr id="55" name="Rectangle 54"/>
           <p:cNvSpPr/>
           <p:nvPr/>
         </p:nvSpPr>
         <p:spPr>
           <a:xfrm>
-            <a:off x="228600" y="4142231"/>
+            <a:off x="228600" y="5760720"/>
             <a:ext cx="7315200" cy="502919"/>
+          </a:xfrm>
+          <a:prstGeom prst="rect">
+            <a:avLst/>
+          </a:prstGeom>
+          <a:solidFill>
+            <a:srgbClr val="FFE0E0"/>
+          </a:solidFill>
+          <a:ln>
+            <a:solidFill>
+              <a:srgbClr val="D0D0D0"/>
+            </a:solidFill>
+          </a:ln>
+        </p:spPr>
+        <p:style>
+          <a:lnRef idx="1">
+            <a:schemeClr val="accent1"/>
+          </a:lnRef>
+          <a:fillRef idx="3">
+            <a:schemeClr val="accent1"/>
+          </a:fillRef>
+          <a:effectRef idx="2">
+            <a:schemeClr val="accent1"/>
+          </a:effectRef>
+          <a:fontRef idx="minor">
+            <a:schemeClr val="lt1"/>
+          </a:fontRef>
+        </p:style>
+        <p:txBody>
+          <a:bodyPr rtlCol="0" anchor="ctr"/>
+          <a:lstStyle/>
+          <a:p>
+            <a:pPr algn="ctr"/>
+          </a:p>
+        </p:txBody>
+      </p:sp>
+      <p:sp>
+        <p:nvSpPr>
+          <p:cNvPr id="56" name="Rectangle 55"/>
+          <p:cNvSpPr/>
+          <p:nvPr/>
+        </p:nvSpPr>
+        <p:spPr>
+          <a:xfrm>
+            <a:off x="256032" y="5833872"/>
+            <a:ext cx="347472" cy="347472"/>
+          </a:xfrm>
+          <a:prstGeom prst="rect">
+            <a:avLst/>
+          </a:prstGeom>
+          <a:solidFill>
+            <a:srgbClr val="C00000"/>
+          </a:solidFill>
+          <a:ln>
+            <a:noFill/>
+          </a:ln>
+        </p:spPr>
+        <p:style>
+          <a:lnRef idx="1">
+            <a:schemeClr val="accent1"/>
+          </a:lnRef>
+          <a:fillRef idx="3">
+            <a:schemeClr val="accent1"/>
+          </a:fillRef>
+          <a:effectRef idx="2">
+            <a:schemeClr val="accent1"/>
+          </a:effectRef>
+          <a:fontRef idx="minor">
+            <a:schemeClr val="lt1"/>
+          </a:fontRef>
+        </p:style>
+        <p:txBody>
+          <a:bodyPr rtlCol="0" anchor="ctr"/>
+          <a:lstStyle/>
+          <a:p>
+            <a:pPr algn="ctr"/>
+          </a:p>
+        </p:txBody>
+      </p:sp>
+      <p:sp>
+        <p:nvSpPr>
+          <p:cNvPr id="57" name="TextBox 56"/>
+          <p:cNvSpPr txBox="1"/>
+          <p:nvPr/>
+        </p:nvSpPr>
+        <p:spPr>
+          <a:xfrm>
+            <a:off x="256032" y="5833872"/>
+            <a:ext cx="347472" cy="347472"/>
+          </a:xfrm>
+          <a:prstGeom prst="rect">
+            <a:avLst/>
+          </a:prstGeom>
+          <a:noFill/>
+        </p:spPr>
+        <p:txBody>
+          <a:bodyPr wrap="square">
+            <a:spAutoFit/>
+          </a:bodyPr>
+          <a:lstStyle/>
+          <a:p>
+            <a:pPr algn="ctr"/>
+            <a:r>
+              <a:rPr sz="900" b="1" i="0">
+                <a:solidFill>
+                  <a:srgbClr val="FFFFFF"/>
+                </a:solidFill>
+              </a:rPr>
+              <a:t>9️⃣</a:t>
+            </a:r>
+          </a:p>
+        </p:txBody>
+      </p:sp>
+      <p:sp>
+        <p:nvSpPr>
+          <p:cNvPr id="58" name="TextBox 57"/>
+          <p:cNvSpPr txBox="1"/>
+          <p:nvPr/>
+        </p:nvSpPr>
+        <p:spPr>
+          <a:xfrm>
+            <a:off x="658368" y="5797296"/>
+            <a:ext cx="5394960" cy="310896"/>
+          </a:xfrm>
+          <a:prstGeom prst="rect">
+            <a:avLst/>
+          </a:prstGeom>
+          <a:noFill/>
+        </p:spPr>
+        <p:txBody>
+          <a:bodyPr wrap="square">
+            <a:spAutoFit/>
+          </a:bodyPr>
+          <a:lstStyle/>
+          <a:p>
+            <a:pPr algn="l"/>
+            <a:r>
+              <a:rPr sz="950" b="0" i="0">
+                <a:solidFill>
+                  <a:srgbClr val="1F3964"/>
+                </a:solidFill>
+              </a:rPr>
+              <a:t>Reconcile PAR relay labor ($495K) forecast with Chad — spread across months</a:t>
+            </a:r>
+          </a:p>
+        </p:txBody>
+      </p:sp>
+      <p:sp>
+        <p:nvSpPr>
+          <p:cNvPr id="59" name="Rectangle 58"/>
+          <p:cNvSpPr/>
+          <p:nvPr/>
+        </p:nvSpPr>
+        <p:spPr>
+          <a:xfrm>
+            <a:off x="6080760" y="5852159"/>
+            <a:ext cx="1417320" cy="274320"/>
+          </a:xfrm>
+          <a:prstGeom prst="rect">
+            <a:avLst/>
+          </a:prstGeom>
+          <a:solidFill>
+            <a:srgbClr val="C00000"/>
+          </a:solidFill>
+          <a:ln>
+            <a:noFill/>
+          </a:ln>
+        </p:spPr>
+        <p:style>
+          <a:lnRef idx="1">
+            <a:schemeClr val="accent1"/>
+          </a:lnRef>
+          <a:fillRef idx="3">
+            <a:schemeClr val="accent1"/>
+          </a:fillRef>
+          <a:effectRef idx="2">
+            <a:schemeClr val="accent1"/>
+          </a:effectRef>
+          <a:fontRef idx="minor">
+            <a:schemeClr val="lt1"/>
+          </a:fontRef>
+        </p:style>
+        <p:txBody>
+          <a:bodyPr rtlCol="0" anchor="ctr"/>
+          <a:lstStyle/>
+          <a:p>
+            <a:pPr algn="ctr"/>
+          </a:p>
+        </p:txBody>
+      </p:sp>
+      <p:sp>
+        <p:nvSpPr>
+          <p:cNvPr id="60" name="TextBox 59"/>
+          <p:cNvSpPr txBox="1"/>
+          <p:nvPr/>
+        </p:nvSpPr>
+        <p:spPr>
+          <a:xfrm>
+            <a:off x="6089904" y="5852159"/>
+            <a:ext cx="1408176" cy="274320"/>
+          </a:xfrm>
+          <a:prstGeom prst="rect">
+            <a:avLst/>
+          </a:prstGeom>
+          <a:noFill/>
+        </p:spPr>
+        <p:txBody>
+          <a:bodyPr wrap="square">
+            <a:spAutoFit/>
+          </a:bodyPr>
+          <a:lstStyle/>
+          <a:p>
+            <a:pPr algn="ctr"/>
+            <a:r>
+              <a:rPr sz="750" b="0" i="0">
+                <a:solidFill>
+                  <a:srgbClr val="FFFFFF"/>
+                </a:solidFill>
+              </a:rPr>
+              <a:t>Jay / Chad</a:t>
+            </a:r>
+          </a:p>
+        </p:txBody>
+      </p:sp>
+      <p:sp>
+        <p:nvSpPr>
+          <p:cNvPr id="61" name="Rectangle 60"/>
+          <p:cNvSpPr/>
+          <p:nvPr/>
+        </p:nvSpPr>
+        <p:spPr>
+          <a:xfrm>
+            <a:off x="7726679" y="1097280"/>
+            <a:ext cx="4233672" cy="329184"/>
+          </a:xfrm>
+          <a:prstGeom prst="rect">
+            <a:avLst/>
+          </a:prstGeom>
+          <a:solidFill>
+            <a:srgbClr val="ED7D31"/>
+          </a:solidFill>
+          <a:ln>
+            <a:noFill/>
+          </a:ln>
+        </p:spPr>
+        <p:style>
+          <a:lnRef idx="1">
+            <a:schemeClr val="accent1"/>
+          </a:lnRef>
+          <a:fillRef idx="3">
+            <a:schemeClr val="accent1"/>
+          </a:fillRef>
+          <a:effectRef idx="2">
+            <a:schemeClr val="accent1"/>
+          </a:effectRef>
+          <a:fontRef idx="minor">
+            <a:schemeClr val="lt1"/>
+          </a:fontRef>
+        </p:style>
+        <p:txBody>
+          <a:bodyPr rtlCol="0" anchor="ctr"/>
+          <a:lstStyle/>
+          <a:p>
+            <a:pPr algn="ctr"/>
+          </a:p>
+        </p:txBody>
+      </p:sp>
+      <p:sp>
+        <p:nvSpPr>
+          <p:cNvPr id="62" name="TextBox 61"/>
+          <p:cNvSpPr txBox="1"/>
+          <p:nvPr/>
+        </p:nvSpPr>
+        <p:spPr>
+          <a:xfrm>
+            <a:off x="7726679" y="1097280"/>
+            <a:ext cx="4233672" cy="329184"/>
+          </a:xfrm>
+          <a:prstGeom prst="rect">
+            <a:avLst/>
+          </a:prstGeom>
+          <a:noFill/>
+        </p:spPr>
+        <p:txBody>
+          <a:bodyPr wrap="square">
+            <a:spAutoFit/>
+          </a:bodyPr>
+          <a:lstStyle/>
+          <a:p>
+            <a:pPr algn="l"/>
+            <a:r>
+              <a:rPr sz="1050" b="1" i="0">
+                <a:solidFill>
+                  <a:srgbClr val="FFFFFF"/>
+                </a:solidFill>
+              </a:rPr>
+              <a:t>  ⚠️  CURRENT RISKS</a:t>
+            </a:r>
+          </a:p>
+        </p:txBody>
+      </p:sp>
+      <p:sp>
+        <p:nvSpPr>
+          <p:cNvPr id="63" name="Rectangle 62"/>
+          <p:cNvSpPr/>
+          <p:nvPr/>
+        </p:nvSpPr>
+        <p:spPr>
+          <a:xfrm>
+            <a:off x="7726679" y="1444752"/>
+            <a:ext cx="4233672" cy="932688"/>
+          </a:xfrm>
+          <a:prstGeom prst="rect">
+            <a:avLst/>
+          </a:prstGeom>
+          <a:solidFill>
+            <a:srgbClr val="E2EFDA"/>
+          </a:solidFill>
+          <a:ln>
+            <a:solidFill>
+              <a:srgbClr val="D0D0D0"/>
+            </a:solidFill>
+          </a:ln>
+        </p:spPr>
+        <p:style>
+          <a:lnRef idx="1">
+            <a:schemeClr val="accent1"/>
+          </a:lnRef>
+          <a:fillRef idx="3">
+            <a:schemeClr val="accent1"/>
+          </a:fillRef>
+          <a:effectRef idx="2">
+            <a:schemeClr val="accent1"/>
+          </a:effectRef>
+          <a:fontRef idx="minor">
+            <a:schemeClr val="lt1"/>
+          </a:fontRef>
+        </p:style>
+        <p:txBody>
+          <a:bodyPr rtlCol="0" anchor="ctr"/>
+          <a:lstStyle/>
+          <a:p>
+            <a:pPr algn="ctr"/>
+          </a:p>
+        </p:txBody>
+      </p:sp>
+      <p:sp>
+        <p:nvSpPr>
+          <p:cNvPr id="64" name="Rectangle 63"/>
+          <p:cNvSpPr/>
+          <p:nvPr/>
+        </p:nvSpPr>
+        <p:spPr>
+          <a:xfrm>
+            <a:off x="7754112" y="1536192"/>
+            <a:ext cx="320040" cy="320040"/>
+          </a:xfrm>
+          <a:prstGeom prst="rect">
+            <a:avLst/>
+          </a:prstGeom>
+          <a:solidFill>
+            <a:srgbClr val="378644"/>
+          </a:solidFill>
+          <a:ln>
+            <a:noFill/>
+          </a:ln>
+        </p:spPr>
+        <p:style>
+          <a:lnRef idx="1">
+            <a:schemeClr val="accent1"/>
+          </a:lnRef>
+          <a:fillRef idx="3">
+            <a:schemeClr val="accent1"/>
+          </a:fillRef>
+          <a:effectRef idx="2">
+            <a:schemeClr val="accent1"/>
+          </a:effectRef>
+          <a:fontRef idx="minor">
+            <a:schemeClr val="lt1"/>
+          </a:fontRef>
+        </p:style>
+        <p:txBody>
+          <a:bodyPr rtlCol="0" anchor="ctr"/>
+          <a:lstStyle/>
+          <a:p>
+            <a:pPr algn="ctr"/>
+          </a:p>
+        </p:txBody>
+      </p:sp>
+      <p:sp>
+        <p:nvSpPr>
+          <p:cNvPr id="65" name="TextBox 64"/>
+          <p:cNvSpPr txBox="1"/>
+          <p:nvPr/>
+        </p:nvSpPr>
+        <p:spPr>
+          <a:xfrm>
+            <a:off x="7754112" y="1536192"/>
+            <a:ext cx="320040" cy="320040"/>
+          </a:xfrm>
+          <a:prstGeom prst="rect">
+            <a:avLst/>
+          </a:prstGeom>
+          <a:noFill/>
+        </p:spPr>
+        <p:txBody>
+          <a:bodyPr wrap="square">
+            <a:spAutoFit/>
+          </a:bodyPr>
+          <a:lstStyle/>
+          <a:p>
+            <a:pPr algn="ctr"/>
+            <a:r>
+              <a:rPr sz="1000" b="1" i="0">
+                <a:solidFill>
+                  <a:srgbClr val="FFFFFF"/>
+                </a:solidFill>
+              </a:rPr>
+              <a:t>🟢</a:t>
+            </a:r>
+          </a:p>
+        </p:txBody>
+      </p:sp>
+      <p:sp>
+        <p:nvSpPr>
+          <p:cNvPr id="66" name="TextBox 65"/>
+          <p:cNvSpPr txBox="1"/>
+          <p:nvPr/>
+        </p:nvSpPr>
+        <p:spPr>
+          <a:xfrm>
+            <a:off x="8119872" y="1499616"/>
+            <a:ext cx="3749039" cy="274320"/>
+          </a:xfrm>
+          <a:prstGeom prst="rect">
+            <a:avLst/>
+          </a:prstGeom>
+          <a:noFill/>
+        </p:spPr>
+        <p:txBody>
+          <a:bodyPr wrap="square">
+            <a:spAutoFit/>
+          </a:bodyPr>
+          <a:lstStyle/>
+          <a:p>
+            <a:pPr algn="l"/>
+            <a:r>
+              <a:rPr sz="950" b="1" i="0">
+                <a:solidFill>
+                  <a:srgbClr val="1F3964"/>
+                </a:solidFill>
+              </a:rPr>
+              <a:t>PAR Iniven RC-30 Equipment</a:t>
+            </a:r>
+          </a:p>
+        </p:txBody>
+      </p:sp>
+      <p:sp>
+        <p:nvSpPr>
+          <p:cNvPr id="67" name="TextBox 66"/>
+          <p:cNvSpPr txBox="1"/>
+          <p:nvPr/>
+        </p:nvSpPr>
+        <p:spPr>
+          <a:xfrm>
+            <a:off x="8119872" y="1773936"/>
+            <a:ext cx="3749039" cy="566928"/>
+          </a:xfrm>
+          <a:prstGeom prst="rect">
+            <a:avLst/>
+          </a:prstGeom>
+          <a:noFill/>
+        </p:spPr>
+        <p:txBody>
+          <a:bodyPr wrap="square">
+            <a:spAutoFit/>
+          </a:bodyPr>
+          <a:lstStyle/>
+          <a:p>
+            <a:pPr algn="l"/>
+            <a:r>
+              <a:rPr sz="900" b="0" i="0">
+                <a:solidFill>
+                  <a:srgbClr val="404040"/>
+                </a:solidFill>
+              </a:rPr>
+              <a:t>PO placed ✅ — equipment on order. 8-week lead time. Monitor delivery.</a:t>
+            </a:r>
+          </a:p>
+        </p:txBody>
+      </p:sp>
+      <p:sp>
+        <p:nvSpPr>
+          <p:cNvPr id="68" name="Rectangle 67"/>
+          <p:cNvSpPr/>
+          <p:nvPr/>
+        </p:nvSpPr>
+        <p:spPr>
+          <a:xfrm>
+            <a:off x="7726679" y="2414016"/>
+            <a:ext cx="4233672" cy="932688"/>
           </a:xfrm>
           <a:prstGeom prst="rect">
             <a:avLst/>
@@ -4488,20 +5687,20 @@
       </p:sp>
       <p:sp>
         <p:nvSpPr>
-          <p:cNvPr id="38" name="Rectangle 37"/>
+          <p:cNvPr id="69" name="Rectangle 68"/>
           <p:cNvSpPr/>
           <p:nvPr/>
         </p:nvSpPr>
         <p:spPr>
           <a:xfrm>
-            <a:off x="256032" y="4215383"/>
-            <a:ext cx="347472" cy="347472"/>
+            <a:off x="7754112" y="2505456"/>
+            <a:ext cx="320040" cy="320040"/>
           </a:xfrm>
           <a:prstGeom prst="rect">
             <a:avLst/>
           </a:prstGeom>
           <a:solidFill>
-            <a:srgbClr val="ED7D31"/>
+            <a:srgbClr val="FFC000"/>
           </a:solidFill>
           <a:ln>
             <a:noFill/>
@@ -4531,14 +5730,14 @@
       </p:sp>
       <p:sp>
         <p:nvSpPr>
-          <p:cNvPr id="39" name="TextBox 38"/>
+          <p:cNvPr id="70" name="TextBox 69"/>
           <p:cNvSpPr txBox="1"/>
           <p:nvPr/>
         </p:nvSpPr>
         <p:spPr>
           <a:xfrm>
-            <a:off x="256032" y="4215383"/>
-            <a:ext cx="347472" cy="347472"/>
+            <a:off x="7754112" y="2505456"/>
+            <a:ext cx="320040" cy="320040"/>
           </a:xfrm>
           <a:prstGeom prst="rect">
             <a:avLst/>
@@ -4553,26 +5752,26 @@
           <a:p>
             <a:pPr algn="ctr"/>
             <a:r>
-              <a:rPr sz="900" b="1" i="0">
+              <a:rPr sz="1000" b="1" i="0">
                 <a:solidFill>
                   <a:srgbClr val="FFFFFF"/>
                 </a:solidFill>
               </a:rPr>
-              <a:t>6️⃣</a:t>
-            </a:r>
-          </a:p>
-        </p:txBody>
-      </p:sp>
-      <p:sp>
-        <p:nvSpPr>
-          <p:cNvPr id="40" name="TextBox 39"/>
+              <a:t>🟡</a:t>
+            </a:r>
+          </a:p>
+        </p:txBody>
+      </p:sp>
+      <p:sp>
+        <p:nvSpPr>
+          <p:cNvPr id="71" name="TextBox 70"/>
           <p:cNvSpPr txBox="1"/>
           <p:nvPr/>
         </p:nvSpPr>
         <p:spPr>
           <a:xfrm>
-            <a:off x="658368" y="4178807"/>
-            <a:ext cx="5394960" cy="310896"/>
+            <a:off x="8119872" y="2468880"/>
+            <a:ext cx="3749039" cy="274320"/>
           </a:xfrm>
           <a:prstGeom prst="rect">
             <a:avLst/>
@@ -4587,69 +5786,26 @@
           <a:p>
             <a:pPr algn="l"/>
             <a:r>
-              <a:rPr sz="950" b="0" i="0">
+              <a:rPr sz="950" b="1" i="0">
                 <a:solidFill>
                   <a:srgbClr val="1F3964"/>
                 </a:solidFill>
               </a:rPr>
-              <a:t>Northport C37.94 card — bundle order with Phase 2 equipment PO</a:t>
-            </a:r>
-          </a:p>
-        </p:txBody>
-      </p:sp>
-      <p:sp>
-        <p:nvSpPr>
-          <p:cNvPr id="41" name="Rectangle 40"/>
-          <p:cNvSpPr/>
-          <p:nvPr/>
-        </p:nvSpPr>
-        <p:spPr>
-          <a:xfrm>
-            <a:off x="6080760" y="4233671"/>
-            <a:ext cx="1417320" cy="274320"/>
-          </a:xfrm>
-          <a:prstGeom prst="rect">
-            <a:avLst/>
-          </a:prstGeom>
-          <a:solidFill>
-            <a:srgbClr val="ED7D31"/>
-          </a:solidFill>
-          <a:ln>
-            <a:noFill/>
-          </a:ln>
-        </p:spPr>
-        <p:style>
-          <a:lnRef idx="1">
-            <a:schemeClr val="accent1"/>
-          </a:lnRef>
-          <a:fillRef idx="3">
-            <a:schemeClr val="accent1"/>
-          </a:fillRef>
-          <a:effectRef idx="2">
-            <a:schemeClr val="accent1"/>
-          </a:effectRef>
-          <a:fontRef idx="minor">
-            <a:schemeClr val="lt1"/>
-          </a:fontRef>
-        </p:style>
-        <p:txBody>
-          <a:bodyPr rtlCol="0" anchor="ctr"/>
-          <a:lstStyle/>
-          <a:p>
-            <a:pPr algn="ctr"/>
-          </a:p>
-        </p:txBody>
-      </p:sp>
-      <p:sp>
-        <p:nvSpPr>
-          <p:cNvPr id="42" name="TextBox 41"/>
+              <a:t>DNS / NSP Access</a:t>
+            </a:r>
+          </a:p>
+        </p:txBody>
+      </p:sp>
+      <p:sp>
+        <p:nvSpPr>
+          <p:cNvPr id="72" name="TextBox 71"/>
           <p:cNvSpPr txBox="1"/>
           <p:nvPr/>
         </p:nvSpPr>
         <p:spPr>
           <a:xfrm>
-            <a:off x="6089904" y="4233671"/>
-            <a:ext cx="1408176" cy="274320"/>
+            <a:off x="8119872" y="2743200"/>
+            <a:ext cx="3749039" cy="566928"/>
           </a:xfrm>
           <a:prstGeom prst="rect">
             <a:avLst/>
@@ -4662,28 +5818,28 @@
           </a:bodyPr>
           <a:lstStyle/>
           <a:p>
-            <a:pPr algn="ctr"/>
-            <a:r>
-              <a:rPr sz="750" b="0" i="0">
+            <a:pPr algn="l"/>
+            <a:r>
+              <a:rPr sz="900" b="0" i="0">
                 <a:solidFill>
-                  <a:srgbClr val="FFFFFF"/>
+                  <a:srgbClr val="404040"/>
                 </a:solidFill>
               </a:rPr>
-              <a:t>Jay / BMcD</a:t>
-            </a:r>
-          </a:p>
-        </p:txBody>
-      </p:sp>
-      <p:sp>
-        <p:nvSpPr>
-          <p:cNvPr id="43" name="Rectangle 42"/>
+              <a:t>NSP installed 4/21. DNS fix escalated to Vic. Confirm full router access.</a:t>
+            </a:r>
+          </a:p>
+        </p:txBody>
+      </p:sp>
+      <p:sp>
+        <p:nvSpPr>
+          <p:cNvPr id="73" name="Rectangle 72"/>
           <p:cNvSpPr/>
           <p:nvPr/>
         </p:nvSpPr>
         <p:spPr>
           <a:xfrm>
-            <a:off x="228600" y="4681728"/>
-            <a:ext cx="7315200" cy="502919"/>
+            <a:off x="7726679" y="3383280"/>
+            <a:ext cx="4233672" cy="932688"/>
           </a:xfrm>
           <a:prstGeom prst="rect">
             <a:avLst/>
@@ -4721,979 +5877,13 @@
       </p:sp>
       <p:sp>
         <p:nvSpPr>
-          <p:cNvPr id="44" name="Rectangle 43"/>
+          <p:cNvPr id="74" name="Rectangle 73"/>
           <p:cNvSpPr/>
           <p:nvPr/>
         </p:nvSpPr>
         <p:spPr>
           <a:xfrm>
-            <a:off x="256032" y="4754880"/>
-            <a:ext cx="347472" cy="347472"/>
-          </a:xfrm>
-          <a:prstGeom prst="rect">
-            <a:avLst/>
-          </a:prstGeom>
-          <a:solidFill>
-            <a:srgbClr val="ED7D31"/>
-          </a:solidFill>
-          <a:ln>
-            <a:noFill/>
-          </a:ln>
-        </p:spPr>
-        <p:style>
-          <a:lnRef idx="1">
-            <a:schemeClr val="accent1"/>
-          </a:lnRef>
-          <a:fillRef idx="3">
-            <a:schemeClr val="accent1"/>
-          </a:fillRef>
-          <a:effectRef idx="2">
-            <a:schemeClr val="accent1"/>
-          </a:effectRef>
-          <a:fontRef idx="minor">
-            <a:schemeClr val="lt1"/>
-          </a:fontRef>
-        </p:style>
-        <p:txBody>
-          <a:bodyPr rtlCol="0" anchor="ctr"/>
-          <a:lstStyle/>
-          <a:p>
-            <a:pPr algn="ctr"/>
-          </a:p>
-        </p:txBody>
-      </p:sp>
-      <p:sp>
-        <p:nvSpPr>
-          <p:cNvPr id="45" name="TextBox 44"/>
-          <p:cNvSpPr txBox="1"/>
-          <p:nvPr/>
-        </p:nvSpPr>
-        <p:spPr>
-          <a:xfrm>
-            <a:off x="256032" y="4754880"/>
-            <a:ext cx="347472" cy="347472"/>
-          </a:xfrm>
-          <a:prstGeom prst="rect">
-            <a:avLst/>
-          </a:prstGeom>
-          <a:noFill/>
-        </p:spPr>
-        <p:txBody>
-          <a:bodyPr wrap="square">
-            <a:spAutoFit/>
-          </a:bodyPr>
-          <a:lstStyle/>
-          <a:p>
-            <a:pPr algn="ctr"/>
-            <a:r>
-              <a:rPr sz="900" b="1" i="0">
-                <a:solidFill>
-                  <a:srgbClr val="FFFFFF"/>
-                </a:solidFill>
-              </a:rPr>
-              <a:t>7️⃣</a:t>
-            </a:r>
-          </a:p>
-        </p:txBody>
-      </p:sp>
-      <p:sp>
-        <p:nvSpPr>
-          <p:cNvPr id="46" name="TextBox 45"/>
-          <p:cNvSpPr txBox="1"/>
-          <p:nvPr/>
-        </p:nvSpPr>
-        <p:spPr>
-          <a:xfrm>
-            <a:off x="658368" y="4718304"/>
-            <a:ext cx="5394960" cy="310896"/>
-          </a:xfrm>
-          <a:prstGeom prst="rect">
-            <a:avLst/>
-          </a:prstGeom>
-          <a:noFill/>
-        </p:spPr>
-        <p:txBody>
-          <a:bodyPr wrap="square">
-            <a:spAutoFit/>
-          </a:bodyPr>
-          <a:lstStyle/>
-          <a:p>
-            <a:pPr algn="l"/>
-            <a:r>
-              <a:rPr sz="950" b="0" i="0">
-                <a:solidFill>
-                  <a:srgbClr val="1F3964"/>
-                </a:solidFill>
-              </a:rPr>
-              <a:t>Hawkeye site surveys — cable &amp; SFP inventory across all Phase 2 sites</a:t>
-            </a:r>
-          </a:p>
-        </p:txBody>
-      </p:sp>
-      <p:sp>
-        <p:nvSpPr>
-          <p:cNvPr id="47" name="Rectangle 46"/>
-          <p:cNvSpPr/>
-          <p:nvPr/>
-        </p:nvSpPr>
-        <p:spPr>
-          <a:xfrm>
-            <a:off x="6080760" y="4773168"/>
-            <a:ext cx="1417320" cy="274320"/>
-          </a:xfrm>
-          <a:prstGeom prst="rect">
-            <a:avLst/>
-          </a:prstGeom>
-          <a:solidFill>
-            <a:srgbClr val="ED7D31"/>
-          </a:solidFill>
-          <a:ln>
-            <a:noFill/>
-          </a:ln>
-        </p:spPr>
-        <p:style>
-          <a:lnRef idx="1">
-            <a:schemeClr val="accent1"/>
-          </a:lnRef>
-          <a:fillRef idx="3">
-            <a:schemeClr val="accent1"/>
-          </a:fillRef>
-          <a:effectRef idx="2">
-            <a:schemeClr val="accent1"/>
-          </a:effectRef>
-          <a:fontRef idx="minor">
-            <a:schemeClr val="lt1"/>
-          </a:fontRef>
-        </p:style>
-        <p:txBody>
-          <a:bodyPr rtlCol="0" anchor="ctr"/>
-          <a:lstStyle/>
-          <a:p>
-            <a:pPr algn="ctr"/>
-          </a:p>
-        </p:txBody>
-      </p:sp>
-      <p:sp>
-        <p:nvSpPr>
-          <p:cNvPr id="48" name="TextBox 47"/>
-          <p:cNvSpPr txBox="1"/>
-          <p:nvPr/>
-        </p:nvSpPr>
-        <p:spPr>
-          <a:xfrm>
-            <a:off x="6089904" y="4773168"/>
-            <a:ext cx="1408176" cy="274320"/>
-          </a:xfrm>
-          <a:prstGeom prst="rect">
-            <a:avLst/>
-          </a:prstGeom>
-          <a:noFill/>
-        </p:spPr>
-        <p:txBody>
-          <a:bodyPr wrap="square">
-            <a:spAutoFit/>
-          </a:bodyPr>
-          <a:lstStyle/>
-          <a:p>
-            <a:pPr algn="ctr"/>
-            <a:r>
-              <a:rPr sz="750" b="0" i="0">
-                <a:solidFill>
-                  <a:srgbClr val="FFFFFF"/>
-                </a:solidFill>
-              </a:rPr>
-              <a:t>Vinny / Hawkeye</a:t>
-            </a:r>
-          </a:p>
-        </p:txBody>
-      </p:sp>
-      <p:sp>
-        <p:nvSpPr>
-          <p:cNvPr id="49" name="Rectangle 48"/>
-          <p:cNvSpPr/>
-          <p:nvPr/>
-        </p:nvSpPr>
-        <p:spPr>
-          <a:xfrm>
-            <a:off x="228600" y="5221224"/>
-            <a:ext cx="7315200" cy="502919"/>
-          </a:xfrm>
-          <a:prstGeom prst="rect">
-            <a:avLst/>
-          </a:prstGeom>
-          <a:solidFill>
-            <a:srgbClr val="F2F2F2"/>
-          </a:solidFill>
-          <a:ln>
-            <a:solidFill>
-              <a:srgbClr val="D0D0D0"/>
-            </a:solidFill>
-          </a:ln>
-        </p:spPr>
-        <p:style>
-          <a:lnRef idx="1">
-            <a:schemeClr val="accent1"/>
-          </a:lnRef>
-          <a:fillRef idx="3">
-            <a:schemeClr val="accent1"/>
-          </a:fillRef>
-          <a:effectRef idx="2">
-            <a:schemeClr val="accent1"/>
-          </a:effectRef>
-          <a:fontRef idx="minor">
-            <a:schemeClr val="lt1"/>
-          </a:fontRef>
-        </p:style>
-        <p:txBody>
-          <a:bodyPr rtlCol="0" anchor="ctr"/>
-          <a:lstStyle/>
-          <a:p>
-            <a:pPr algn="ctr"/>
-          </a:p>
-        </p:txBody>
-      </p:sp>
-      <p:sp>
-        <p:nvSpPr>
-          <p:cNvPr id="50" name="Rectangle 49"/>
-          <p:cNvSpPr/>
-          <p:nvPr/>
-        </p:nvSpPr>
-        <p:spPr>
-          <a:xfrm>
-            <a:off x="256032" y="5294376"/>
-            <a:ext cx="347472" cy="347472"/>
-          </a:xfrm>
-          <a:prstGeom prst="rect">
-            <a:avLst/>
-          </a:prstGeom>
-          <a:solidFill>
-            <a:srgbClr val="2E74B5"/>
-          </a:solidFill>
-          <a:ln>
-            <a:noFill/>
-          </a:ln>
-        </p:spPr>
-        <p:style>
-          <a:lnRef idx="1">
-            <a:schemeClr val="accent1"/>
-          </a:lnRef>
-          <a:fillRef idx="3">
-            <a:schemeClr val="accent1"/>
-          </a:fillRef>
-          <a:effectRef idx="2">
-            <a:schemeClr val="accent1"/>
-          </a:effectRef>
-          <a:fontRef idx="minor">
-            <a:schemeClr val="lt1"/>
-          </a:fontRef>
-        </p:style>
-        <p:txBody>
-          <a:bodyPr rtlCol="0" anchor="ctr"/>
-          <a:lstStyle/>
-          <a:p>
-            <a:pPr algn="ctr"/>
-          </a:p>
-        </p:txBody>
-      </p:sp>
-      <p:sp>
-        <p:nvSpPr>
-          <p:cNvPr id="51" name="TextBox 50"/>
-          <p:cNvSpPr txBox="1"/>
-          <p:nvPr/>
-        </p:nvSpPr>
-        <p:spPr>
-          <a:xfrm>
-            <a:off x="256032" y="5294376"/>
-            <a:ext cx="347472" cy="347472"/>
-          </a:xfrm>
-          <a:prstGeom prst="rect">
-            <a:avLst/>
-          </a:prstGeom>
-          <a:noFill/>
-        </p:spPr>
-        <p:txBody>
-          <a:bodyPr wrap="square">
-            <a:spAutoFit/>
-          </a:bodyPr>
-          <a:lstStyle/>
-          <a:p>
-            <a:pPr algn="ctr"/>
-            <a:r>
-              <a:rPr sz="900" b="1" i="0">
-                <a:solidFill>
-                  <a:srgbClr val="FFFFFF"/>
-                </a:solidFill>
-              </a:rPr>
-              <a:t>8️⃣</a:t>
-            </a:r>
-          </a:p>
-        </p:txBody>
-      </p:sp>
-      <p:sp>
-        <p:nvSpPr>
-          <p:cNvPr id="52" name="TextBox 51"/>
-          <p:cNvSpPr txBox="1"/>
-          <p:nvPr/>
-        </p:nvSpPr>
-        <p:spPr>
-          <a:xfrm>
-            <a:off x="658368" y="5257800"/>
-            <a:ext cx="5394960" cy="310896"/>
-          </a:xfrm>
-          <a:prstGeom prst="rect">
-            <a:avLst/>
-          </a:prstGeom>
-          <a:noFill/>
-        </p:spPr>
-        <p:txBody>
-          <a:bodyPr wrap="square">
-            <a:spAutoFit/>
-          </a:bodyPr>
-          <a:lstStyle/>
-          <a:p>
-            <a:pPr algn="l"/>
-            <a:r>
-              <a:rPr sz="950" b="0" i="0">
-                <a:solidFill>
-                  <a:srgbClr val="1F3964"/>
-                </a:solidFill>
-              </a:rPr>
-              <a:t>Confirm Nokia training dates with Glenn — identify attendees &amp; syllabus</a:t>
-            </a:r>
-          </a:p>
-        </p:txBody>
-      </p:sp>
-      <p:sp>
-        <p:nvSpPr>
-          <p:cNvPr id="53" name="Rectangle 52"/>
-          <p:cNvSpPr/>
-          <p:nvPr/>
-        </p:nvSpPr>
-        <p:spPr>
-          <a:xfrm>
-            <a:off x="6080760" y="5312664"/>
-            <a:ext cx="1417320" cy="274320"/>
-          </a:xfrm>
-          <a:prstGeom prst="rect">
-            <a:avLst/>
-          </a:prstGeom>
-          <a:solidFill>
-            <a:srgbClr val="2E74B5"/>
-          </a:solidFill>
-          <a:ln>
-            <a:noFill/>
-          </a:ln>
-        </p:spPr>
-        <p:style>
-          <a:lnRef idx="1">
-            <a:schemeClr val="accent1"/>
-          </a:lnRef>
-          <a:fillRef idx="3">
-            <a:schemeClr val="accent1"/>
-          </a:fillRef>
-          <a:effectRef idx="2">
-            <a:schemeClr val="accent1"/>
-          </a:effectRef>
-          <a:fontRef idx="minor">
-            <a:schemeClr val="lt1"/>
-          </a:fontRef>
-        </p:style>
-        <p:txBody>
-          <a:bodyPr rtlCol="0" anchor="ctr"/>
-          <a:lstStyle/>
-          <a:p>
-            <a:pPr algn="ctr"/>
-          </a:p>
-        </p:txBody>
-      </p:sp>
-      <p:sp>
-        <p:nvSpPr>
-          <p:cNvPr id="54" name="TextBox 53"/>
-          <p:cNvSpPr txBox="1"/>
-          <p:nvPr/>
-        </p:nvSpPr>
-        <p:spPr>
-          <a:xfrm>
-            <a:off x="6089904" y="5312664"/>
-            <a:ext cx="1408176" cy="274320"/>
-          </a:xfrm>
-          <a:prstGeom prst="rect">
-            <a:avLst/>
-          </a:prstGeom>
-          <a:noFill/>
-        </p:spPr>
-        <p:txBody>
-          <a:bodyPr wrap="square">
-            <a:spAutoFit/>
-          </a:bodyPr>
-          <a:lstStyle/>
-          <a:p>
-            <a:pPr algn="ctr"/>
-            <a:r>
-              <a:rPr sz="750" b="0" i="0">
-                <a:solidFill>
-                  <a:srgbClr val="FFFFFF"/>
-                </a:solidFill>
-              </a:rPr>
-              <a:t>Jay</a:t>
-            </a:r>
-          </a:p>
-        </p:txBody>
-      </p:sp>
-      <p:sp>
-        <p:nvSpPr>
-          <p:cNvPr id="55" name="Rectangle 54"/>
-          <p:cNvSpPr/>
-          <p:nvPr/>
-        </p:nvSpPr>
-        <p:spPr>
-          <a:xfrm>
-            <a:off x="228600" y="5760720"/>
-            <a:ext cx="7315200" cy="502919"/>
-          </a:xfrm>
-          <a:prstGeom prst="rect">
-            <a:avLst/>
-          </a:prstGeom>
-          <a:solidFill>
-            <a:srgbClr val="FFE0E0"/>
-          </a:solidFill>
-          <a:ln>
-            <a:solidFill>
-              <a:srgbClr val="D0D0D0"/>
-            </a:solidFill>
-          </a:ln>
-        </p:spPr>
-        <p:style>
-          <a:lnRef idx="1">
-            <a:schemeClr val="accent1"/>
-          </a:lnRef>
-          <a:fillRef idx="3">
-            <a:schemeClr val="accent1"/>
-          </a:fillRef>
-          <a:effectRef idx="2">
-            <a:schemeClr val="accent1"/>
-          </a:effectRef>
-          <a:fontRef idx="minor">
-            <a:schemeClr val="lt1"/>
-          </a:fontRef>
-        </p:style>
-        <p:txBody>
-          <a:bodyPr rtlCol="0" anchor="ctr"/>
-          <a:lstStyle/>
-          <a:p>
-            <a:pPr algn="ctr"/>
-          </a:p>
-        </p:txBody>
-      </p:sp>
-      <p:sp>
-        <p:nvSpPr>
-          <p:cNvPr id="56" name="Rectangle 55"/>
-          <p:cNvSpPr/>
-          <p:nvPr/>
-        </p:nvSpPr>
-        <p:spPr>
-          <a:xfrm>
-            <a:off x="256032" y="5833872"/>
-            <a:ext cx="347472" cy="347472"/>
-          </a:xfrm>
-          <a:prstGeom prst="rect">
-            <a:avLst/>
-          </a:prstGeom>
-          <a:solidFill>
-            <a:srgbClr val="C00000"/>
-          </a:solidFill>
-          <a:ln>
-            <a:noFill/>
-          </a:ln>
-        </p:spPr>
-        <p:style>
-          <a:lnRef idx="1">
-            <a:schemeClr val="accent1"/>
-          </a:lnRef>
-          <a:fillRef idx="3">
-            <a:schemeClr val="accent1"/>
-          </a:fillRef>
-          <a:effectRef idx="2">
-            <a:schemeClr val="accent1"/>
-          </a:effectRef>
-          <a:fontRef idx="minor">
-            <a:schemeClr val="lt1"/>
-          </a:fontRef>
-        </p:style>
-        <p:txBody>
-          <a:bodyPr rtlCol="0" anchor="ctr"/>
-          <a:lstStyle/>
-          <a:p>
-            <a:pPr algn="ctr"/>
-          </a:p>
-        </p:txBody>
-      </p:sp>
-      <p:sp>
-        <p:nvSpPr>
-          <p:cNvPr id="57" name="TextBox 56"/>
-          <p:cNvSpPr txBox="1"/>
-          <p:nvPr/>
-        </p:nvSpPr>
-        <p:spPr>
-          <a:xfrm>
-            <a:off x="256032" y="5833872"/>
-            <a:ext cx="347472" cy="347472"/>
-          </a:xfrm>
-          <a:prstGeom prst="rect">
-            <a:avLst/>
-          </a:prstGeom>
-          <a:noFill/>
-        </p:spPr>
-        <p:txBody>
-          <a:bodyPr wrap="square">
-            <a:spAutoFit/>
-          </a:bodyPr>
-          <a:lstStyle/>
-          <a:p>
-            <a:pPr algn="ctr"/>
-            <a:r>
-              <a:rPr sz="900" b="1" i="0">
-                <a:solidFill>
-                  <a:srgbClr val="FFFFFF"/>
-                </a:solidFill>
-              </a:rPr>
-              <a:t>9️⃣</a:t>
-            </a:r>
-          </a:p>
-        </p:txBody>
-      </p:sp>
-      <p:sp>
-        <p:nvSpPr>
-          <p:cNvPr id="58" name="TextBox 57"/>
-          <p:cNvSpPr txBox="1"/>
-          <p:nvPr/>
-        </p:nvSpPr>
-        <p:spPr>
-          <a:xfrm>
-            <a:off x="658368" y="5797296"/>
-            <a:ext cx="5394960" cy="310896"/>
-          </a:xfrm>
-          <a:prstGeom prst="rect">
-            <a:avLst/>
-          </a:prstGeom>
-          <a:noFill/>
-        </p:spPr>
-        <p:txBody>
-          <a:bodyPr wrap="square">
-            <a:spAutoFit/>
-          </a:bodyPr>
-          <a:lstStyle/>
-          <a:p>
-            <a:pPr algn="l"/>
-            <a:r>
-              <a:rPr sz="950" b="1" i="0">
-                <a:solidFill>
-                  <a:srgbClr val="1F3964"/>
-                </a:solidFill>
-              </a:rPr>
-              <a:t>Lindenhurst IFR submission — due Monday April 27  ⚠️ IMMINENT</a:t>
-            </a:r>
-          </a:p>
-        </p:txBody>
-      </p:sp>
-      <p:sp>
-        <p:nvSpPr>
-          <p:cNvPr id="59" name="Rectangle 58"/>
-          <p:cNvSpPr/>
-          <p:nvPr/>
-        </p:nvSpPr>
-        <p:spPr>
-          <a:xfrm>
-            <a:off x="6080760" y="5852159"/>
-            <a:ext cx="1417320" cy="274320"/>
-          </a:xfrm>
-          <a:prstGeom prst="rect">
-            <a:avLst/>
-          </a:prstGeom>
-          <a:solidFill>
-            <a:srgbClr val="C00000"/>
-          </a:solidFill>
-          <a:ln>
-            <a:noFill/>
-          </a:ln>
-        </p:spPr>
-        <p:style>
-          <a:lnRef idx="1">
-            <a:schemeClr val="accent1"/>
-          </a:lnRef>
-          <a:fillRef idx="3">
-            <a:schemeClr val="accent1"/>
-          </a:fillRef>
-          <a:effectRef idx="2">
-            <a:schemeClr val="accent1"/>
-          </a:effectRef>
-          <a:fontRef idx="minor">
-            <a:schemeClr val="lt1"/>
-          </a:fontRef>
-        </p:style>
-        <p:txBody>
-          <a:bodyPr rtlCol="0" anchor="ctr"/>
-          <a:lstStyle/>
-          <a:p>
-            <a:pPr algn="ctr"/>
-          </a:p>
-        </p:txBody>
-      </p:sp>
-      <p:sp>
-        <p:nvSpPr>
-          <p:cNvPr id="60" name="TextBox 59"/>
-          <p:cNvSpPr txBox="1"/>
-          <p:nvPr/>
-        </p:nvSpPr>
-        <p:spPr>
-          <a:xfrm>
-            <a:off x="6089904" y="5852159"/>
-            <a:ext cx="1408176" cy="274320"/>
-          </a:xfrm>
-          <a:prstGeom prst="rect">
-            <a:avLst/>
-          </a:prstGeom>
-          <a:noFill/>
-        </p:spPr>
-        <p:txBody>
-          <a:bodyPr wrap="square">
-            <a:spAutoFit/>
-          </a:bodyPr>
-          <a:lstStyle/>
-          <a:p>
-            <a:pPr algn="ctr"/>
-            <a:r>
-              <a:rPr sz="750" b="0" i="0">
-                <a:solidFill>
-                  <a:srgbClr val="FFFFFF"/>
-                </a:solidFill>
-              </a:rPr>
-              <a:t>Burns &amp; McDonnell</a:t>
-            </a:r>
-          </a:p>
-        </p:txBody>
-      </p:sp>
-      <p:sp>
-        <p:nvSpPr>
-          <p:cNvPr id="61" name="Rectangle 60"/>
-          <p:cNvSpPr/>
-          <p:nvPr/>
-        </p:nvSpPr>
-        <p:spPr>
-          <a:xfrm>
-            <a:off x="7726679" y="1097280"/>
-            <a:ext cx="4233672" cy="329184"/>
-          </a:xfrm>
-          <a:prstGeom prst="rect">
-            <a:avLst/>
-          </a:prstGeom>
-          <a:solidFill>
-            <a:srgbClr val="ED7D31"/>
-          </a:solidFill>
-          <a:ln>
-            <a:noFill/>
-          </a:ln>
-        </p:spPr>
-        <p:style>
-          <a:lnRef idx="1">
-            <a:schemeClr val="accent1"/>
-          </a:lnRef>
-          <a:fillRef idx="3">
-            <a:schemeClr val="accent1"/>
-          </a:fillRef>
-          <a:effectRef idx="2">
-            <a:schemeClr val="accent1"/>
-          </a:effectRef>
-          <a:fontRef idx="minor">
-            <a:schemeClr val="lt1"/>
-          </a:fontRef>
-        </p:style>
-        <p:txBody>
-          <a:bodyPr rtlCol="0" anchor="ctr"/>
-          <a:lstStyle/>
-          <a:p>
-            <a:pPr algn="ctr"/>
-          </a:p>
-        </p:txBody>
-      </p:sp>
-      <p:sp>
-        <p:nvSpPr>
-          <p:cNvPr id="62" name="TextBox 61"/>
-          <p:cNvSpPr txBox="1"/>
-          <p:nvPr/>
-        </p:nvSpPr>
-        <p:spPr>
-          <a:xfrm>
-            <a:off x="7726679" y="1097280"/>
-            <a:ext cx="4233672" cy="329184"/>
-          </a:xfrm>
-          <a:prstGeom prst="rect">
-            <a:avLst/>
-          </a:prstGeom>
-          <a:noFill/>
-        </p:spPr>
-        <p:txBody>
-          <a:bodyPr wrap="square">
-            <a:spAutoFit/>
-          </a:bodyPr>
-          <a:lstStyle/>
-          <a:p>
-            <a:pPr algn="l"/>
-            <a:r>
-              <a:rPr sz="1050" b="1" i="0">
-                <a:solidFill>
-                  <a:srgbClr val="FFFFFF"/>
-                </a:solidFill>
-              </a:rPr>
-              <a:t>  ⚠️  CURRENT RISKS</a:t>
-            </a:r>
-          </a:p>
-        </p:txBody>
-      </p:sp>
-      <p:sp>
-        <p:nvSpPr>
-          <p:cNvPr id="63" name="Rectangle 62"/>
-          <p:cNvSpPr/>
-          <p:nvPr/>
-        </p:nvSpPr>
-        <p:spPr>
-          <a:xfrm>
-            <a:off x="7726679" y="1444752"/>
-            <a:ext cx="4233672" cy="932688"/>
-          </a:xfrm>
-          <a:prstGeom prst="rect">
-            <a:avLst/>
-          </a:prstGeom>
-          <a:solidFill>
-            <a:srgbClr val="FFE0E0"/>
-          </a:solidFill>
-          <a:ln>
-            <a:solidFill>
-              <a:srgbClr val="D0D0D0"/>
-            </a:solidFill>
-          </a:ln>
-        </p:spPr>
-        <p:style>
-          <a:lnRef idx="1">
-            <a:schemeClr val="accent1"/>
-          </a:lnRef>
-          <a:fillRef idx="3">
-            <a:schemeClr val="accent1"/>
-          </a:fillRef>
-          <a:effectRef idx="2">
-            <a:schemeClr val="accent1"/>
-          </a:effectRef>
-          <a:fontRef idx="minor">
-            <a:schemeClr val="lt1"/>
-          </a:fontRef>
-        </p:style>
-        <p:txBody>
-          <a:bodyPr rtlCol="0" anchor="ctr"/>
-          <a:lstStyle/>
-          <a:p>
-            <a:pPr algn="ctr"/>
-          </a:p>
-        </p:txBody>
-      </p:sp>
-      <p:sp>
-        <p:nvSpPr>
-          <p:cNvPr id="64" name="Rectangle 63"/>
-          <p:cNvSpPr/>
-          <p:nvPr/>
-        </p:nvSpPr>
-        <p:spPr>
-          <a:xfrm>
-            <a:off x="7754112" y="1536192"/>
-            <a:ext cx="320040" cy="320040"/>
-          </a:xfrm>
-          <a:prstGeom prst="rect">
-            <a:avLst/>
-          </a:prstGeom>
-          <a:solidFill>
-            <a:srgbClr val="C00000"/>
-          </a:solidFill>
-          <a:ln>
-            <a:noFill/>
-          </a:ln>
-        </p:spPr>
-        <p:style>
-          <a:lnRef idx="1">
-            <a:schemeClr val="accent1"/>
-          </a:lnRef>
-          <a:fillRef idx="3">
-            <a:schemeClr val="accent1"/>
-          </a:fillRef>
-          <a:effectRef idx="2">
-            <a:schemeClr val="accent1"/>
-          </a:effectRef>
-          <a:fontRef idx="minor">
-            <a:schemeClr val="lt1"/>
-          </a:fontRef>
-        </p:style>
-        <p:txBody>
-          <a:bodyPr rtlCol="0" anchor="ctr"/>
-          <a:lstStyle/>
-          <a:p>
-            <a:pPr algn="ctr"/>
-          </a:p>
-        </p:txBody>
-      </p:sp>
-      <p:sp>
-        <p:nvSpPr>
-          <p:cNvPr id="65" name="TextBox 64"/>
-          <p:cNvSpPr txBox="1"/>
-          <p:nvPr/>
-        </p:nvSpPr>
-        <p:spPr>
-          <a:xfrm>
-            <a:off x="7754112" y="1536192"/>
-            <a:ext cx="320040" cy="320040"/>
-          </a:xfrm>
-          <a:prstGeom prst="rect">
-            <a:avLst/>
-          </a:prstGeom>
-          <a:noFill/>
-        </p:spPr>
-        <p:txBody>
-          <a:bodyPr wrap="square">
-            <a:spAutoFit/>
-          </a:bodyPr>
-          <a:lstStyle/>
-          <a:p>
-            <a:pPr algn="ctr"/>
-            <a:r>
-              <a:rPr sz="1000" b="1" i="0">
-                <a:solidFill>
-                  <a:srgbClr val="FFFFFF"/>
-                </a:solidFill>
-              </a:rPr>
-              <a:t>🔴</a:t>
-            </a:r>
-          </a:p>
-        </p:txBody>
-      </p:sp>
-      <p:sp>
-        <p:nvSpPr>
-          <p:cNvPr id="66" name="TextBox 65"/>
-          <p:cNvSpPr txBox="1"/>
-          <p:nvPr/>
-        </p:nvSpPr>
-        <p:spPr>
-          <a:xfrm>
-            <a:off x="8119872" y="1499616"/>
-            <a:ext cx="3749039" cy="274320"/>
-          </a:xfrm>
-          <a:prstGeom prst="rect">
-            <a:avLst/>
-          </a:prstGeom>
-          <a:noFill/>
-        </p:spPr>
-        <p:txBody>
-          <a:bodyPr wrap="square">
-            <a:spAutoFit/>
-          </a:bodyPr>
-          <a:lstStyle/>
-          <a:p>
-            <a:pPr algn="l"/>
-            <a:r>
-              <a:rPr sz="950" b="1" i="0">
-                <a:solidFill>
-                  <a:srgbClr val="1F3964"/>
-                </a:solidFill>
-              </a:rPr>
-              <a:t>PAR Iniven RC-30</a:t>
-            </a:r>
-          </a:p>
-        </p:txBody>
-      </p:sp>
-      <p:sp>
-        <p:nvSpPr>
-          <p:cNvPr id="67" name="TextBox 66"/>
-          <p:cNvSpPr txBox="1"/>
-          <p:nvPr/>
-        </p:nvSpPr>
-        <p:spPr>
-          <a:xfrm>
-            <a:off x="8119872" y="1773936"/>
-            <a:ext cx="3749039" cy="566928"/>
-          </a:xfrm>
-          <a:prstGeom prst="rect">
-            <a:avLst/>
-          </a:prstGeom>
-          <a:noFill/>
-        </p:spPr>
-        <p:txBody>
-          <a:bodyPr wrap="square">
-            <a:spAutoFit/>
-          </a:bodyPr>
-          <a:lstStyle/>
-          <a:p>
-            <a:pPr algn="l"/>
-            <a:r>
-              <a:rPr sz="900" b="0" i="0">
-                <a:solidFill>
-                  <a:srgbClr val="404040"/>
-                </a:solidFill>
-              </a:rPr>
-              <a:t>PO not yet placed — 8-week lead time. CRITICAL PATH.</a:t>
-            </a:r>
-          </a:p>
-        </p:txBody>
-      </p:sp>
-      <p:sp>
-        <p:nvSpPr>
-          <p:cNvPr id="68" name="Rectangle 67"/>
-          <p:cNvSpPr/>
-          <p:nvPr/>
-        </p:nvSpPr>
-        <p:spPr>
-          <a:xfrm>
-            <a:off x="7726679" y="2414016"/>
-            <a:ext cx="4233672" cy="932688"/>
-          </a:xfrm>
-          <a:prstGeom prst="rect">
-            <a:avLst/>
-          </a:prstGeom>
-          <a:solidFill>
-            <a:srgbClr val="FFF2CC"/>
-          </a:solidFill>
-          <a:ln>
-            <a:solidFill>
-              <a:srgbClr val="D0D0D0"/>
-            </a:solidFill>
-          </a:ln>
-        </p:spPr>
-        <p:style>
-          <a:lnRef idx="1">
-            <a:schemeClr val="accent1"/>
-          </a:lnRef>
-          <a:fillRef idx="3">
-            <a:schemeClr val="accent1"/>
-          </a:fillRef>
-          <a:effectRef idx="2">
-            <a:schemeClr val="accent1"/>
-          </a:effectRef>
-          <a:fontRef idx="minor">
-            <a:schemeClr val="lt1"/>
-          </a:fontRef>
-        </p:style>
-        <p:txBody>
-          <a:bodyPr rtlCol="0" anchor="ctr"/>
-          <a:lstStyle/>
-          <a:p>
-            <a:pPr algn="ctr"/>
-          </a:p>
-        </p:txBody>
-      </p:sp>
-      <p:sp>
-        <p:nvSpPr>
-          <p:cNvPr id="69" name="Rectangle 68"/>
-          <p:cNvSpPr/>
-          <p:nvPr/>
-        </p:nvSpPr>
-        <p:spPr>
-          <a:xfrm>
-            <a:off x="7754112" y="2505456"/>
+            <a:off x="7754112" y="3474720"/>
             <a:ext cx="320040" cy="320040"/>
           </a:xfrm>
           <a:prstGeom prst="rect">
@@ -5730,13 +5920,13 @@
       </p:sp>
       <p:sp>
         <p:nvSpPr>
-          <p:cNvPr id="70" name="TextBox 69"/>
+          <p:cNvPr id="75" name="TextBox 74"/>
           <p:cNvSpPr txBox="1"/>
           <p:nvPr/>
         </p:nvSpPr>
         <p:spPr>
           <a:xfrm>
-            <a:off x="7754112" y="2505456"/>
+            <a:off x="7754112" y="3474720"/>
             <a:ext cx="320040" cy="320040"/>
           </a:xfrm>
           <a:prstGeom prst="rect">
@@ -5764,196 +5954,6 @@
       </p:sp>
       <p:sp>
         <p:nvSpPr>
-          <p:cNvPr id="71" name="TextBox 70"/>
-          <p:cNvSpPr txBox="1"/>
-          <p:nvPr/>
-        </p:nvSpPr>
-        <p:spPr>
-          <a:xfrm>
-            <a:off x="8119872" y="2468880"/>
-            <a:ext cx="3749039" cy="274320"/>
-          </a:xfrm>
-          <a:prstGeom prst="rect">
-            <a:avLst/>
-          </a:prstGeom>
-          <a:noFill/>
-        </p:spPr>
-        <p:txBody>
-          <a:bodyPr wrap="square">
-            <a:spAutoFit/>
-          </a:bodyPr>
-          <a:lstStyle/>
-          <a:p>
-            <a:pPr algn="l"/>
-            <a:r>
-              <a:rPr sz="950" b="1" i="0">
-                <a:solidFill>
-                  <a:srgbClr val="1F3964"/>
-                </a:solidFill>
-              </a:rPr>
-              <a:t>DNS / NSP Access</a:t>
-            </a:r>
-          </a:p>
-        </p:txBody>
-      </p:sp>
-      <p:sp>
-        <p:nvSpPr>
-          <p:cNvPr id="72" name="TextBox 71"/>
-          <p:cNvSpPr txBox="1"/>
-          <p:nvPr/>
-        </p:nvSpPr>
-        <p:spPr>
-          <a:xfrm>
-            <a:off x="8119872" y="2743200"/>
-            <a:ext cx="3749039" cy="566928"/>
-          </a:xfrm>
-          <a:prstGeom prst="rect">
-            <a:avLst/>
-          </a:prstGeom>
-          <a:noFill/>
-        </p:spPr>
-        <p:txBody>
-          <a:bodyPr wrap="square">
-            <a:spAutoFit/>
-          </a:bodyPr>
-          <a:lstStyle/>
-          <a:p>
-            <a:pPr algn="l"/>
-            <a:r>
-              <a:rPr sz="900" b="0" i="0">
-                <a:solidFill>
-                  <a:srgbClr val="404040"/>
-                </a:solidFill>
-              </a:rPr>
-              <a:t>NSP installed 4/21. DNS fix escalated to Vic. Confirm full access.</a:t>
-            </a:r>
-          </a:p>
-        </p:txBody>
-      </p:sp>
-      <p:sp>
-        <p:nvSpPr>
-          <p:cNvPr id="73" name="Rectangle 72"/>
-          <p:cNvSpPr/>
-          <p:nvPr/>
-        </p:nvSpPr>
-        <p:spPr>
-          <a:xfrm>
-            <a:off x="7726679" y="3383280"/>
-            <a:ext cx="4233672" cy="932688"/>
-          </a:xfrm>
-          <a:prstGeom prst="rect">
-            <a:avLst/>
-          </a:prstGeom>
-          <a:solidFill>
-            <a:srgbClr val="FFF2CC"/>
-          </a:solidFill>
-          <a:ln>
-            <a:solidFill>
-              <a:srgbClr val="D0D0D0"/>
-            </a:solidFill>
-          </a:ln>
-        </p:spPr>
-        <p:style>
-          <a:lnRef idx="1">
-            <a:schemeClr val="accent1"/>
-          </a:lnRef>
-          <a:fillRef idx="3">
-            <a:schemeClr val="accent1"/>
-          </a:fillRef>
-          <a:effectRef idx="2">
-            <a:schemeClr val="accent1"/>
-          </a:effectRef>
-          <a:fontRef idx="minor">
-            <a:schemeClr val="lt1"/>
-          </a:fontRef>
-        </p:style>
-        <p:txBody>
-          <a:bodyPr rtlCol="0" anchor="ctr"/>
-          <a:lstStyle/>
-          <a:p>
-            <a:pPr algn="ctr"/>
-          </a:p>
-        </p:txBody>
-      </p:sp>
-      <p:sp>
-        <p:nvSpPr>
-          <p:cNvPr id="74" name="Rectangle 73"/>
-          <p:cNvSpPr/>
-          <p:nvPr/>
-        </p:nvSpPr>
-        <p:spPr>
-          <a:xfrm>
-            <a:off x="7754112" y="3474720"/>
-            <a:ext cx="320040" cy="320040"/>
-          </a:xfrm>
-          <a:prstGeom prst="rect">
-            <a:avLst/>
-          </a:prstGeom>
-          <a:solidFill>
-            <a:srgbClr val="FFC000"/>
-          </a:solidFill>
-          <a:ln>
-            <a:noFill/>
-          </a:ln>
-        </p:spPr>
-        <p:style>
-          <a:lnRef idx="1">
-            <a:schemeClr val="accent1"/>
-          </a:lnRef>
-          <a:fillRef idx="3">
-            <a:schemeClr val="accent1"/>
-          </a:fillRef>
-          <a:effectRef idx="2">
-            <a:schemeClr val="accent1"/>
-          </a:effectRef>
-          <a:fontRef idx="minor">
-            <a:schemeClr val="lt1"/>
-          </a:fontRef>
-        </p:style>
-        <p:txBody>
-          <a:bodyPr rtlCol="0" anchor="ctr"/>
-          <a:lstStyle/>
-          <a:p>
-            <a:pPr algn="ctr"/>
-          </a:p>
-        </p:txBody>
-      </p:sp>
-      <p:sp>
-        <p:nvSpPr>
-          <p:cNvPr id="75" name="TextBox 74"/>
-          <p:cNvSpPr txBox="1"/>
-          <p:nvPr/>
-        </p:nvSpPr>
-        <p:spPr>
-          <a:xfrm>
-            <a:off x="7754112" y="3474720"/>
-            <a:ext cx="320040" cy="320040"/>
-          </a:xfrm>
-          <a:prstGeom prst="rect">
-            <a:avLst/>
-          </a:prstGeom>
-          <a:noFill/>
-        </p:spPr>
-        <p:txBody>
-          <a:bodyPr wrap="square">
-            <a:spAutoFit/>
-          </a:bodyPr>
-          <a:lstStyle/>
-          <a:p>
-            <a:pPr algn="ctr"/>
-            <a:r>
-              <a:rPr sz="1000" b="1" i="0">
-                <a:solidFill>
-                  <a:srgbClr val="FFFFFF"/>
-                </a:solidFill>
-              </a:rPr>
-              <a:t>🟡</a:t>
-            </a:r>
-          </a:p>
-        </p:txBody>
-      </p:sp>
-      <p:sp>
-        <p:nvSpPr>
           <p:cNvPr id="76" name="TextBox 75"/>
           <p:cNvSpPr txBox="1"/>
           <p:nvPr/>
@@ -6015,7 +6015,7 @@
                   <a:srgbClr val="404040"/>
                 </a:solidFill>
               </a:rPr>
-              <a:t>DB9 cables delivered to John Ng ✅. Awaiting test date from relay team.</a:t>
+              <a:t>DB9 cables delivered to John Ng ✅. Awaiting test date — target week of Apr 27.</a:t>
             </a:r>
           </a:p>
         </p:txBody>

--- a/PRJ13797_JMUX_NextSteps_Apr24_2026.pptx
+++ b/PRJ13797_JMUX_NextSteps_Apr24_2026.pptx
@@ -5459,197 +5459,7 @@
         <p:spPr>
           <a:xfrm>
             <a:off x="7726679" y="1444752"/>
-            <a:ext cx="4233672" cy="932688"/>
-          </a:xfrm>
-          <a:prstGeom prst="rect">
-            <a:avLst/>
-          </a:prstGeom>
-          <a:solidFill>
-            <a:srgbClr val="E2EFDA"/>
-          </a:solidFill>
-          <a:ln>
-            <a:solidFill>
-              <a:srgbClr val="D0D0D0"/>
-            </a:solidFill>
-          </a:ln>
-        </p:spPr>
-        <p:style>
-          <a:lnRef idx="1">
-            <a:schemeClr val="accent1"/>
-          </a:lnRef>
-          <a:fillRef idx="3">
-            <a:schemeClr val="accent1"/>
-          </a:fillRef>
-          <a:effectRef idx="2">
-            <a:schemeClr val="accent1"/>
-          </a:effectRef>
-          <a:fontRef idx="minor">
-            <a:schemeClr val="lt1"/>
-          </a:fontRef>
-        </p:style>
-        <p:txBody>
-          <a:bodyPr rtlCol="0" anchor="ctr"/>
-          <a:lstStyle/>
-          <a:p>
-            <a:pPr algn="ctr"/>
-          </a:p>
-        </p:txBody>
-      </p:sp>
-      <p:sp>
-        <p:nvSpPr>
-          <p:cNvPr id="64" name="Rectangle 63"/>
-          <p:cNvSpPr/>
-          <p:nvPr/>
-        </p:nvSpPr>
-        <p:spPr>
-          <a:xfrm>
-            <a:off x="7754112" y="1536192"/>
-            <a:ext cx="320040" cy="320040"/>
-          </a:xfrm>
-          <a:prstGeom prst="rect">
-            <a:avLst/>
-          </a:prstGeom>
-          <a:solidFill>
-            <a:srgbClr val="378644"/>
-          </a:solidFill>
-          <a:ln>
-            <a:noFill/>
-          </a:ln>
-        </p:spPr>
-        <p:style>
-          <a:lnRef idx="1">
-            <a:schemeClr val="accent1"/>
-          </a:lnRef>
-          <a:fillRef idx="3">
-            <a:schemeClr val="accent1"/>
-          </a:fillRef>
-          <a:effectRef idx="2">
-            <a:schemeClr val="accent1"/>
-          </a:effectRef>
-          <a:fontRef idx="minor">
-            <a:schemeClr val="lt1"/>
-          </a:fontRef>
-        </p:style>
-        <p:txBody>
-          <a:bodyPr rtlCol="0" anchor="ctr"/>
-          <a:lstStyle/>
-          <a:p>
-            <a:pPr algn="ctr"/>
-          </a:p>
-        </p:txBody>
-      </p:sp>
-      <p:sp>
-        <p:nvSpPr>
-          <p:cNvPr id="65" name="TextBox 64"/>
-          <p:cNvSpPr txBox="1"/>
-          <p:nvPr/>
-        </p:nvSpPr>
-        <p:spPr>
-          <a:xfrm>
-            <a:off x="7754112" y="1536192"/>
-            <a:ext cx="320040" cy="320040"/>
-          </a:xfrm>
-          <a:prstGeom prst="rect">
-            <a:avLst/>
-          </a:prstGeom>
-          <a:noFill/>
-        </p:spPr>
-        <p:txBody>
-          <a:bodyPr wrap="square">
-            <a:spAutoFit/>
-          </a:bodyPr>
-          <a:lstStyle/>
-          <a:p>
-            <a:pPr algn="ctr"/>
-            <a:r>
-              <a:rPr sz="1000" b="1" i="0">
-                <a:solidFill>
-                  <a:srgbClr val="FFFFFF"/>
-                </a:solidFill>
-              </a:rPr>
-              <a:t>🟢</a:t>
-            </a:r>
-          </a:p>
-        </p:txBody>
-      </p:sp>
-      <p:sp>
-        <p:nvSpPr>
-          <p:cNvPr id="66" name="TextBox 65"/>
-          <p:cNvSpPr txBox="1"/>
-          <p:nvPr/>
-        </p:nvSpPr>
-        <p:spPr>
-          <a:xfrm>
-            <a:off x="8119872" y="1499616"/>
-            <a:ext cx="3749039" cy="274320"/>
-          </a:xfrm>
-          <a:prstGeom prst="rect">
-            <a:avLst/>
-          </a:prstGeom>
-          <a:noFill/>
-        </p:spPr>
-        <p:txBody>
-          <a:bodyPr wrap="square">
-            <a:spAutoFit/>
-          </a:bodyPr>
-          <a:lstStyle/>
-          <a:p>
-            <a:pPr algn="l"/>
-            <a:r>
-              <a:rPr sz="950" b="1" i="0">
-                <a:solidFill>
-                  <a:srgbClr val="1F3964"/>
-                </a:solidFill>
-              </a:rPr>
-              <a:t>PAR Iniven RC-30 Equipment</a:t>
-            </a:r>
-          </a:p>
-        </p:txBody>
-      </p:sp>
-      <p:sp>
-        <p:nvSpPr>
-          <p:cNvPr id="67" name="TextBox 66"/>
-          <p:cNvSpPr txBox="1"/>
-          <p:nvPr/>
-        </p:nvSpPr>
-        <p:spPr>
-          <a:xfrm>
-            <a:off x="8119872" y="1773936"/>
-            <a:ext cx="3749039" cy="566928"/>
-          </a:xfrm>
-          <a:prstGeom prst="rect">
-            <a:avLst/>
-          </a:prstGeom>
-          <a:noFill/>
-        </p:spPr>
-        <p:txBody>
-          <a:bodyPr wrap="square">
-            <a:spAutoFit/>
-          </a:bodyPr>
-          <a:lstStyle/>
-          <a:p>
-            <a:pPr algn="l"/>
-            <a:r>
-              <a:rPr sz="900" b="0" i="0">
-                <a:solidFill>
-                  <a:srgbClr val="404040"/>
-                </a:solidFill>
-              </a:rPr>
-              <a:t>PO placed ✅ — equipment on order. 8-week lead time. Monitor delivery.</a:t>
-            </a:r>
-          </a:p>
-        </p:txBody>
-      </p:sp>
-      <p:sp>
-        <p:nvSpPr>
-          <p:cNvPr id="68" name="Rectangle 67"/>
-          <p:cNvSpPr/>
-          <p:nvPr/>
-        </p:nvSpPr>
-        <p:spPr>
-          <a:xfrm>
-            <a:off x="7726679" y="2414016"/>
-            <a:ext cx="4233672" cy="932688"/>
+            <a:ext cx="4233672" cy="1499616"/>
           </a:xfrm>
           <a:prstGeom prst="rect">
             <a:avLst/>
@@ -5687,13 +5497,13 @@
       </p:sp>
       <p:sp>
         <p:nvSpPr>
-          <p:cNvPr id="69" name="Rectangle 68"/>
+          <p:cNvPr id="64" name="Rectangle 63"/>
           <p:cNvSpPr/>
           <p:nvPr/>
         </p:nvSpPr>
         <p:spPr>
           <a:xfrm>
-            <a:off x="7754112" y="2505456"/>
+            <a:off x="7754112" y="1554480"/>
             <a:ext cx="320040" cy="320040"/>
           </a:xfrm>
           <a:prstGeom prst="rect">
@@ -5730,13 +5540,13 @@
       </p:sp>
       <p:sp>
         <p:nvSpPr>
-          <p:cNvPr id="70" name="TextBox 69"/>
+          <p:cNvPr id="65" name="TextBox 64"/>
           <p:cNvSpPr txBox="1"/>
           <p:nvPr/>
         </p:nvSpPr>
         <p:spPr>
           <a:xfrm>
-            <a:off x="7754112" y="2505456"/>
+            <a:off x="7754112" y="1554480"/>
             <a:ext cx="320040" cy="320040"/>
           </a:xfrm>
           <a:prstGeom prst="rect">
@@ -5764,14 +5574,14 @@
       </p:sp>
       <p:sp>
         <p:nvSpPr>
-          <p:cNvPr id="71" name="TextBox 70"/>
+          <p:cNvPr id="66" name="TextBox 65"/>
           <p:cNvSpPr txBox="1"/>
           <p:nvPr/>
         </p:nvSpPr>
         <p:spPr>
           <a:xfrm>
-            <a:off x="8119872" y="2468880"/>
-            <a:ext cx="3749039" cy="274320"/>
+            <a:off x="8119872" y="1517904"/>
+            <a:ext cx="3749039" cy="292608"/>
           </a:xfrm>
           <a:prstGeom prst="rect">
             <a:avLst/>
@@ -5786,26 +5596,26 @@
           <a:p>
             <a:pPr algn="l"/>
             <a:r>
-              <a:rPr sz="950" b="1" i="0">
+              <a:rPr sz="1000" b="1" i="0">
                 <a:solidFill>
                   <a:srgbClr val="1F3964"/>
                 </a:solidFill>
               </a:rPr>
-              <a:t>DNS / NSP Access</a:t>
-            </a:r>
-          </a:p>
-        </p:txBody>
-      </p:sp>
-      <p:sp>
-        <p:nvSpPr>
-          <p:cNvPr id="72" name="TextBox 71"/>
+              <a:t>DNS Update</a:t>
+            </a:r>
+          </a:p>
+        </p:txBody>
+      </p:sp>
+      <p:sp>
+        <p:nvSpPr>
+          <p:cNvPr id="67" name="TextBox 66"/>
           <p:cNvSpPr txBox="1"/>
           <p:nvPr/>
         </p:nvSpPr>
         <p:spPr>
           <a:xfrm>
-            <a:off x="8119872" y="2743200"/>
-            <a:ext cx="3749039" cy="566928"/>
+            <a:off x="8119872" y="1792224"/>
+            <a:ext cx="3749039" cy="1005840"/>
           </a:xfrm>
           <a:prstGeom prst="rect">
             <a:avLst/>
@@ -5825,21 +5635,21 @@
                   <a:srgbClr val="404040"/>
                 </a:solidFill>
               </a:rPr>
-              <a:t>NSP installed 4/21. DNS fix escalated to Vic. Confirm full router access.</a:t>
-            </a:r>
-          </a:p>
-        </p:txBody>
-      </p:sp>
-      <p:sp>
-        <p:nvSpPr>
-          <p:cNvPr id="73" name="Rectangle 72"/>
+              <a:t>NSP installed 4/21, status being confirmed. DNS fix escalated to Vic.</a:t>
+            </a:r>
+          </a:p>
+        </p:txBody>
+      </p:sp>
+      <p:sp>
+        <p:nvSpPr>
+          <p:cNvPr id="68" name="Rectangle 67"/>
           <p:cNvSpPr/>
           <p:nvPr/>
         </p:nvSpPr>
         <p:spPr>
           <a:xfrm>
-            <a:off x="7726679" y="3383280"/>
-            <a:ext cx="4233672" cy="932688"/>
+            <a:off x="7726679" y="2999232"/>
+            <a:ext cx="4233672" cy="1499616"/>
           </a:xfrm>
           <a:prstGeom prst="rect">
             <a:avLst/>
@@ -5877,13 +5687,13 @@
       </p:sp>
       <p:sp>
         <p:nvSpPr>
-          <p:cNvPr id="74" name="Rectangle 73"/>
+          <p:cNvPr id="69" name="Rectangle 68"/>
           <p:cNvSpPr/>
           <p:nvPr/>
         </p:nvSpPr>
         <p:spPr>
           <a:xfrm>
-            <a:off x="7754112" y="3474720"/>
+            <a:off x="7754112" y="3108960"/>
             <a:ext cx="320040" cy="320040"/>
           </a:xfrm>
           <a:prstGeom prst="rect">
@@ -5920,13 +5730,13 @@
       </p:sp>
       <p:sp>
         <p:nvSpPr>
-          <p:cNvPr id="75" name="TextBox 74"/>
+          <p:cNvPr id="70" name="TextBox 69"/>
           <p:cNvSpPr txBox="1"/>
           <p:nvPr/>
         </p:nvSpPr>
         <p:spPr>
           <a:xfrm>
-            <a:off x="7754112" y="3474720"/>
+            <a:off x="7754112" y="3108960"/>
             <a:ext cx="320040" cy="320040"/>
           </a:xfrm>
           <a:prstGeom prst="rect">
@@ -5954,14 +5764,14 @@
       </p:sp>
       <p:sp>
         <p:nvSpPr>
-          <p:cNvPr id="76" name="TextBox 75"/>
+          <p:cNvPr id="71" name="TextBox 70"/>
           <p:cNvSpPr txBox="1"/>
           <p:nvPr/>
         </p:nvSpPr>
         <p:spPr>
           <a:xfrm>
-            <a:off x="8119872" y="3438144"/>
-            <a:ext cx="3749039" cy="274320"/>
+            <a:off x="8119872" y="3072384"/>
+            <a:ext cx="3749039" cy="292608"/>
           </a:xfrm>
           <a:prstGeom prst="rect">
             <a:avLst/>
@@ -5976,26 +5786,26 @@
           <a:p>
             <a:pPr algn="l"/>
             <a:r>
-              <a:rPr sz="950" b="1" i="0">
+              <a:rPr sz="1000" b="1" i="0">
                 <a:solidFill>
                   <a:srgbClr val="1F3964"/>
                 </a:solidFill>
               </a:rPr>
-              <a:t>RTU Serial Test</a:t>
-            </a:r>
-          </a:p>
-        </p:txBody>
-      </p:sp>
-      <p:sp>
-        <p:nvSpPr>
-          <p:cNvPr id="77" name="TextBox 76"/>
+              <a:t>Weather Delays</a:t>
+            </a:r>
+          </a:p>
+        </p:txBody>
+      </p:sp>
+      <p:sp>
+        <p:nvSpPr>
+          <p:cNvPr id="72" name="TextBox 71"/>
           <p:cNvSpPr txBox="1"/>
           <p:nvPr/>
         </p:nvSpPr>
         <p:spPr>
           <a:xfrm>
-            <a:off x="8119872" y="3712464"/>
-            <a:ext cx="3749039" cy="566928"/>
+            <a:off x="8119872" y="3346704"/>
+            <a:ext cx="3749039" cy="1005840"/>
           </a:xfrm>
           <a:prstGeom prst="rect">
             <a:avLst/>
@@ -6015,21 +5825,21 @@
                   <a:srgbClr val="404040"/>
                 </a:solidFill>
               </a:rPr>
-              <a:t>DB9 cables delivered to John Ng ✅. Awaiting test date — target week of Apr 27.</a:t>
-            </a:r>
-          </a:p>
-        </p:txBody>
-      </p:sp>
-      <p:sp>
-        <p:nvSpPr>
-          <p:cNvPr id="78" name="Rectangle 77"/>
+              <a:t>Substation closures possible at temps &gt;90°F. Potential 2-week delay per event. Risk — not yet an issue. Monitor summer forecast. Schedule critical work in cooler windows.</a:t>
+            </a:r>
+          </a:p>
+        </p:txBody>
+      </p:sp>
+      <p:sp>
+        <p:nvSpPr>
+          <p:cNvPr id="73" name="Rectangle 72"/>
           <p:cNvSpPr/>
           <p:nvPr/>
         </p:nvSpPr>
         <p:spPr>
           <a:xfrm>
-            <a:off x="7726679" y="4352544"/>
-            <a:ext cx="4233672" cy="932688"/>
+            <a:off x="7726679" y="4553712"/>
+            <a:ext cx="4233672" cy="1499616"/>
           </a:xfrm>
           <a:prstGeom prst="rect">
             <a:avLst/>
@@ -6067,13 +5877,13 @@
       </p:sp>
       <p:sp>
         <p:nvSpPr>
-          <p:cNvPr id="79" name="Rectangle 78"/>
+          <p:cNvPr id="74" name="Rectangle 73"/>
           <p:cNvSpPr/>
           <p:nvPr/>
         </p:nvSpPr>
         <p:spPr>
           <a:xfrm>
-            <a:off x="7754112" y="4443983"/>
+            <a:off x="7754112" y="4663440"/>
             <a:ext cx="320040" cy="320040"/>
           </a:xfrm>
           <a:prstGeom prst="rect">
@@ -6110,13 +5920,13 @@
       </p:sp>
       <p:sp>
         <p:nvSpPr>
-          <p:cNvPr id="80" name="TextBox 79"/>
+          <p:cNvPr id="75" name="TextBox 74"/>
           <p:cNvSpPr txBox="1"/>
           <p:nvPr/>
         </p:nvSpPr>
         <p:spPr>
           <a:xfrm>
-            <a:off x="7754112" y="4443983"/>
+            <a:off x="7754112" y="4663440"/>
             <a:ext cx="320040" cy="320040"/>
           </a:xfrm>
           <a:prstGeom prst="rect">
@@ -6144,14 +5954,14 @@
       </p:sp>
       <p:sp>
         <p:nvSpPr>
-          <p:cNvPr id="81" name="TextBox 80"/>
+          <p:cNvPr id="76" name="TextBox 75"/>
           <p:cNvSpPr txBox="1"/>
           <p:nvPr/>
         </p:nvSpPr>
         <p:spPr>
           <a:xfrm>
-            <a:off x="8119872" y="4407407"/>
-            <a:ext cx="3749039" cy="274320"/>
+            <a:off x="8119872" y="4626864"/>
+            <a:ext cx="3749039" cy="292608"/>
           </a:xfrm>
           <a:prstGeom prst="rect">
             <a:avLst/>
@@ -6166,26 +5976,26 @@
           <a:p>
             <a:pPr algn="l"/>
             <a:r>
-              <a:rPr sz="950" b="1" i="0">
+              <a:rPr sz="1000" b="1" i="0">
                 <a:solidFill>
                   <a:srgbClr val="1F3964"/>
                 </a:solidFill>
               </a:rPr>
-              <a:t>Melville &amp; 6DL Pilgrim</a:t>
-            </a:r>
-          </a:p>
-        </p:txBody>
-      </p:sp>
-      <p:sp>
-        <p:nvSpPr>
-          <p:cNvPr id="82" name="TextBox 81"/>
+              <a:t>RTU Serial Test Scheduling</a:t>
+            </a:r>
+          </a:p>
+        </p:txBody>
+      </p:sp>
+      <p:sp>
+        <p:nvSpPr>
+          <p:cNvPr id="77" name="TextBox 76"/>
           <p:cNvSpPr txBox="1"/>
           <p:nvPr/>
         </p:nvSpPr>
         <p:spPr>
           <a:xfrm>
-            <a:off x="8119872" y="4681728"/>
-            <a:ext cx="3749039" cy="566928"/>
+            <a:off x="8119872" y="4901184"/>
+            <a:ext cx="3749039" cy="1005840"/>
           </a:xfrm>
           <a:prstGeom prst="rect">
             <a:avLst/>
@@ -6205,204 +6015,14 @@
                   <a:srgbClr val="404040"/>
                 </a:solidFill>
               </a:rPr>
-              <a:t>IFR/IFC dates still TBD. Monitoring for schedule impact.</a:t>
-            </a:r>
-          </a:p>
-        </p:txBody>
-      </p:sp>
-      <p:sp>
-        <p:nvSpPr>
-          <p:cNvPr id="83" name="Rectangle 82"/>
-          <p:cNvSpPr/>
-          <p:nvPr/>
-        </p:nvSpPr>
-        <p:spPr>
-          <a:xfrm>
-            <a:off x="7726679" y="5321808"/>
-            <a:ext cx="4233672" cy="932688"/>
-          </a:xfrm>
-          <a:prstGeom prst="rect">
-            <a:avLst/>
-          </a:prstGeom>
-          <a:solidFill>
-            <a:srgbClr val="FFF2CC"/>
-          </a:solidFill>
-          <a:ln>
-            <a:solidFill>
-              <a:srgbClr val="D0D0D0"/>
-            </a:solidFill>
-          </a:ln>
-        </p:spPr>
-        <p:style>
-          <a:lnRef idx="1">
-            <a:schemeClr val="accent1"/>
-          </a:lnRef>
-          <a:fillRef idx="3">
-            <a:schemeClr val="accent1"/>
-          </a:fillRef>
-          <a:effectRef idx="2">
-            <a:schemeClr val="accent1"/>
-          </a:effectRef>
-          <a:fontRef idx="minor">
-            <a:schemeClr val="lt1"/>
-          </a:fontRef>
-        </p:style>
-        <p:txBody>
-          <a:bodyPr rtlCol="0" anchor="ctr"/>
-          <a:lstStyle/>
-          <a:p>
-            <a:pPr algn="ctr"/>
-          </a:p>
-        </p:txBody>
-      </p:sp>
-      <p:sp>
-        <p:nvSpPr>
-          <p:cNvPr id="84" name="Rectangle 83"/>
-          <p:cNvSpPr/>
-          <p:nvPr/>
-        </p:nvSpPr>
-        <p:spPr>
-          <a:xfrm>
-            <a:off x="7754112" y="5413248"/>
-            <a:ext cx="320040" cy="320040"/>
-          </a:xfrm>
-          <a:prstGeom prst="rect">
-            <a:avLst/>
-          </a:prstGeom>
-          <a:solidFill>
-            <a:srgbClr val="FFC000"/>
-          </a:solidFill>
-          <a:ln>
-            <a:noFill/>
-          </a:ln>
-        </p:spPr>
-        <p:style>
-          <a:lnRef idx="1">
-            <a:schemeClr val="accent1"/>
-          </a:lnRef>
-          <a:fillRef idx="3">
-            <a:schemeClr val="accent1"/>
-          </a:fillRef>
-          <a:effectRef idx="2">
-            <a:schemeClr val="accent1"/>
-          </a:effectRef>
-          <a:fontRef idx="minor">
-            <a:schemeClr val="lt1"/>
-          </a:fontRef>
-        </p:style>
-        <p:txBody>
-          <a:bodyPr rtlCol="0" anchor="ctr"/>
-          <a:lstStyle/>
-          <a:p>
-            <a:pPr algn="ctr"/>
-          </a:p>
-        </p:txBody>
-      </p:sp>
-      <p:sp>
-        <p:nvSpPr>
-          <p:cNvPr id="85" name="TextBox 84"/>
-          <p:cNvSpPr txBox="1"/>
-          <p:nvPr/>
-        </p:nvSpPr>
-        <p:spPr>
-          <a:xfrm>
-            <a:off x="7754112" y="5413248"/>
-            <a:ext cx="320040" cy="320040"/>
-          </a:xfrm>
-          <a:prstGeom prst="rect">
-            <a:avLst/>
-          </a:prstGeom>
-          <a:noFill/>
-        </p:spPr>
-        <p:txBody>
-          <a:bodyPr wrap="square">
-            <a:spAutoFit/>
-          </a:bodyPr>
-          <a:lstStyle/>
-          <a:p>
-            <a:pPr algn="ctr"/>
-            <a:r>
-              <a:rPr sz="1000" b="1" i="0">
-                <a:solidFill>
-                  <a:srgbClr val="FFFFFF"/>
-                </a:solidFill>
-              </a:rPr>
-              <a:t>🟡</a:t>
-            </a:r>
-          </a:p>
-        </p:txBody>
-      </p:sp>
-      <p:sp>
-        <p:nvSpPr>
-          <p:cNvPr id="86" name="TextBox 85"/>
-          <p:cNvSpPr txBox="1"/>
-          <p:nvPr/>
-        </p:nvSpPr>
-        <p:spPr>
-          <a:xfrm>
-            <a:off x="8119872" y="5376672"/>
-            <a:ext cx="3749039" cy="274320"/>
-          </a:xfrm>
-          <a:prstGeom prst="rect">
-            <a:avLst/>
-          </a:prstGeom>
-          <a:noFill/>
-        </p:spPr>
-        <p:txBody>
-          <a:bodyPr wrap="square">
-            <a:spAutoFit/>
-          </a:bodyPr>
-          <a:lstStyle/>
-          <a:p>
-            <a:pPr algn="l"/>
-            <a:r>
-              <a:rPr sz="950" b="1" i="0">
-                <a:solidFill>
-                  <a:srgbClr val="1F3964"/>
-                </a:solidFill>
-              </a:rPr>
-              <a:t>Weather Delays</a:t>
-            </a:r>
-          </a:p>
-        </p:txBody>
-      </p:sp>
-      <p:sp>
-        <p:nvSpPr>
-          <p:cNvPr id="87" name="TextBox 86"/>
-          <p:cNvSpPr txBox="1"/>
-          <p:nvPr/>
-        </p:nvSpPr>
-        <p:spPr>
-          <a:xfrm>
-            <a:off x="8119872" y="5650992"/>
-            <a:ext cx="3749039" cy="566928"/>
-          </a:xfrm>
-          <a:prstGeom prst="rect">
-            <a:avLst/>
-          </a:prstGeom>
-          <a:noFill/>
-        </p:spPr>
-        <p:txBody>
-          <a:bodyPr wrap="square">
-            <a:spAutoFit/>
-          </a:bodyPr>
-          <a:lstStyle/>
-          <a:p>
-            <a:pPr algn="l"/>
-            <a:r>
-              <a:rPr sz="900" b="0" i="0">
-                <a:solidFill>
-                  <a:srgbClr val="404040"/>
-                </a:solidFill>
-              </a:rPr>
-              <a:t>Substation closures possible at temps &gt;90°F. Schedule critical work in cooler windows.</a:t>
-            </a:r>
-          </a:p>
-        </p:txBody>
-      </p:sp>
-      <p:sp>
-        <p:nvSpPr>
-          <p:cNvPr id="88" name="Rectangle 87"/>
+              <a:t>DB9 cables delivered to John Ng ✅. Awaiting test date from relay team.</a:t>
+            </a:r>
+          </a:p>
+        </p:txBody>
+      </p:sp>
+      <p:sp>
+        <p:nvSpPr>
+          <p:cNvPr id="78" name="Rectangle 77"/>
           <p:cNvSpPr/>
           <p:nvPr/>
         </p:nvSpPr>
@@ -6445,7 +6065,7 @@
       </p:sp>
       <p:sp>
         <p:nvSpPr>
-          <p:cNvPr id="89" name="TextBox 88"/>
+          <p:cNvPr id="79" name="TextBox 78"/>
           <p:cNvSpPr txBox="1"/>
           <p:nvPr/>
         </p:nvSpPr>

--- a/PRJ13797_JMUX_NextSteps_Apr24_2026.pptx
+++ b/PRJ13797_JMUX_NextSteps_Apr24_2026.pptx
@@ -3097,7 +3097,7 @@
         <p:spPr>
           <a:xfrm>
             <a:off x="0" y="0"/>
-            <a:ext cx="12188952" cy="1005840"/>
+            <a:ext cx="12188952" cy="914400"/>
           </a:xfrm>
           <a:prstGeom prst="rect">
             <a:avLst/>
@@ -3140,7 +3140,7 @@
         <p:spPr>
           <a:xfrm>
             <a:off x="228600" y="91440"/>
-            <a:ext cx="11430000" cy="594360"/>
+            <a:ext cx="11430000" cy="548640"/>
           </a:xfrm>
           <a:prstGeom prst="rect">
             <a:avLst/>
@@ -3173,8 +3173,8 @@
         </p:nvSpPr>
         <p:spPr>
           <a:xfrm>
-            <a:off x="228600" y="658368"/>
-            <a:ext cx="11430000" cy="301752"/>
+            <a:off x="228600" y="621792"/>
+            <a:ext cx="11430000" cy="256032"/>
           </a:xfrm>
           <a:prstGeom prst="rect">
             <a:avLst/>
@@ -3207,8 +3207,8 @@
         </p:nvSpPr>
         <p:spPr>
           <a:xfrm>
-            <a:off x="228600" y="1097280"/>
-            <a:ext cx="7315200" cy="329184"/>
+            <a:off x="228600" y="1005840"/>
+            <a:ext cx="11731752" cy="329184"/>
           </a:xfrm>
           <a:prstGeom prst="rect">
             <a:avLst/>
@@ -3250,8 +3250,8 @@
         </p:nvSpPr>
         <p:spPr>
           <a:xfrm>
-            <a:off x="228600" y="1097280"/>
-            <a:ext cx="7315200" cy="329184"/>
+            <a:off x="228600" y="1005840"/>
+            <a:ext cx="11731752" cy="329184"/>
           </a:xfrm>
           <a:prstGeom prst="rect">
             <a:avLst/>
@@ -3266,7 +3266,7 @@
           <a:p>
             <a:pPr algn="l"/>
             <a:r>
-              <a:rPr sz="1050" b="1" i="0">
+              <a:rPr sz="1100" b="1" i="0">
                 <a:solidFill>
                   <a:srgbClr val="FFFFFF"/>
                 </a:solidFill>
@@ -3284,14 +3284,59 @@
         </p:nvSpPr>
         <p:spPr>
           <a:xfrm>
-            <a:off x="228600" y="1444752"/>
-            <a:ext cx="7315200" cy="502919"/>
+            <a:off x="228600" y="1335024"/>
+            <a:ext cx="11731752" cy="2798064"/>
           </a:xfrm>
           <a:prstGeom prst="rect">
             <a:avLst/>
           </a:prstGeom>
           <a:solidFill>
             <a:srgbClr val="F2F2F2"/>
+          </a:solidFill>
+          <a:ln>
+            <a:solidFill>
+              <a:srgbClr val="C0C0C0"/>
+            </a:solidFill>
+          </a:ln>
+        </p:spPr>
+        <p:style>
+          <a:lnRef idx="1">
+            <a:schemeClr val="accent1"/>
+          </a:lnRef>
+          <a:fillRef idx="3">
+            <a:schemeClr val="accent1"/>
+          </a:fillRef>
+          <a:effectRef idx="2">
+            <a:schemeClr val="accent1"/>
+          </a:effectRef>
+          <a:fontRef idx="minor">
+            <a:schemeClr val="lt1"/>
+          </a:fontRef>
+        </p:style>
+        <p:txBody>
+          <a:bodyPr rtlCol="0" anchor="ctr"/>
+          <a:lstStyle/>
+          <a:p>
+            <a:pPr algn="ctr"/>
+          </a:p>
+        </p:txBody>
+      </p:sp>
+      <p:sp>
+        <p:nvSpPr>
+          <p:cNvPr id="8" name="Rectangle 7"/>
+          <p:cNvSpPr/>
+          <p:nvPr/>
+        </p:nvSpPr>
+        <p:spPr>
+          <a:xfrm>
+            <a:off x="292608" y="1371600"/>
+            <a:ext cx="5760720" cy="475488"/>
+          </a:xfrm>
+          <a:prstGeom prst="rect">
+            <a:avLst/>
+          </a:prstGeom>
+          <a:solidFill>
+            <a:srgbClr val="FFFFFF"/>
           </a:solidFill>
           <a:ln>
             <a:solidFill>
@@ -3323,20 +3368,20 @@
       </p:sp>
       <p:sp>
         <p:nvSpPr>
-          <p:cNvPr id="8" name="Rectangle 7"/>
+          <p:cNvPr id="9" name="Rectangle 8"/>
           <p:cNvSpPr/>
           <p:nvPr/>
         </p:nvSpPr>
         <p:spPr>
           <a:xfrm>
-            <a:off x="256032" y="1517904"/>
-            <a:ext cx="347472" cy="347472"/>
+            <a:off x="329184" y="1444752"/>
+            <a:ext cx="310896" cy="310896"/>
           </a:xfrm>
           <a:prstGeom prst="rect">
             <a:avLst/>
           </a:prstGeom>
           <a:solidFill>
-            <a:srgbClr val="378644"/>
+            <a:srgbClr val="2E74B5"/>
           </a:solidFill>
           <a:ln>
             <a:noFill/>
@@ -3366,14 +3411,14 @@
       </p:sp>
       <p:sp>
         <p:nvSpPr>
-          <p:cNvPr id="9" name="TextBox 8"/>
+          <p:cNvPr id="10" name="TextBox 9"/>
           <p:cNvSpPr txBox="1"/>
           <p:nvPr/>
         </p:nvSpPr>
         <p:spPr>
           <a:xfrm>
-            <a:off x="256032" y="1517904"/>
-            <a:ext cx="347472" cy="347472"/>
+            <a:off x="329184" y="1444752"/>
+            <a:ext cx="310896" cy="310896"/>
           </a:xfrm>
           <a:prstGeom prst="rect">
             <a:avLst/>
@@ -3388,7 +3433,7 @@
           <a:p>
             <a:pPr algn="ctr"/>
             <a:r>
-              <a:rPr sz="900" b="1" i="0">
+              <a:rPr sz="850" b="1" i="0">
                 <a:solidFill>
                   <a:srgbClr val="FFFFFF"/>
                 </a:solidFill>
@@ -3400,14 +3445,14 @@
       </p:sp>
       <p:sp>
         <p:nvSpPr>
-          <p:cNvPr id="10" name="TextBox 9"/>
+          <p:cNvPr id="11" name="TextBox 10"/>
           <p:cNvSpPr txBox="1"/>
           <p:nvPr/>
         </p:nvSpPr>
         <p:spPr>
           <a:xfrm>
-            <a:off x="658368" y="1481328"/>
-            <a:ext cx="5394960" cy="310896"/>
+            <a:off x="694944" y="1408176"/>
+            <a:ext cx="4389120" cy="274320"/>
           </a:xfrm>
           <a:prstGeom prst="rect">
             <a:avLst/>
@@ -3422,7 +3467,7 @@
           <a:p>
             <a:pPr algn="l"/>
             <a:r>
-              <a:rPr sz="950" b="0" i="0">
+              <a:rPr sz="850" b="0" i="0">
                 <a:solidFill>
                   <a:srgbClr val="1F3964"/>
                 </a:solidFill>
@@ -3434,57 +3479,14 @@
       </p:sp>
       <p:sp>
         <p:nvSpPr>
-          <p:cNvPr id="11" name="Rectangle 10"/>
-          <p:cNvSpPr/>
-          <p:nvPr/>
-        </p:nvSpPr>
-        <p:spPr>
-          <a:xfrm>
-            <a:off x="6080760" y="1536192"/>
-            <a:ext cx="1417320" cy="274320"/>
-          </a:xfrm>
-          <a:prstGeom prst="rect">
-            <a:avLst/>
-          </a:prstGeom>
-          <a:solidFill>
-            <a:srgbClr val="378644"/>
-          </a:solidFill>
-          <a:ln>
-            <a:noFill/>
-          </a:ln>
-        </p:spPr>
-        <p:style>
-          <a:lnRef idx="1">
-            <a:schemeClr val="accent1"/>
-          </a:lnRef>
-          <a:fillRef idx="3">
-            <a:schemeClr val="accent1"/>
-          </a:fillRef>
-          <a:effectRef idx="2">
-            <a:schemeClr val="accent1"/>
-          </a:effectRef>
-          <a:fontRef idx="minor">
-            <a:schemeClr val="lt1"/>
-          </a:fontRef>
-        </p:style>
-        <p:txBody>
-          <a:bodyPr rtlCol="0" anchor="ctr"/>
-          <a:lstStyle/>
-          <a:p>
-            <a:pPr algn="ctr"/>
-          </a:p>
-        </p:txBody>
-      </p:sp>
-      <p:sp>
-        <p:nvSpPr>
           <p:cNvPr id="12" name="TextBox 11"/>
           <p:cNvSpPr txBox="1"/>
           <p:nvPr/>
         </p:nvSpPr>
         <p:spPr>
           <a:xfrm>
-            <a:off x="6089904" y="1536192"/>
-            <a:ext cx="1408176" cy="274320"/>
+            <a:off x="5093208" y="1627632"/>
+            <a:ext cx="914400" cy="201168"/>
           </a:xfrm>
           <a:prstGeom prst="rect">
             <a:avLst/>
@@ -3497,14 +3499,14 @@
           </a:bodyPr>
           <a:lstStyle/>
           <a:p>
-            <a:pPr algn="ctr"/>
-            <a:r>
-              <a:rPr sz="750" b="0" i="0">
+            <a:pPr algn="r"/>
+            <a:r>
+              <a:rPr sz="750" b="0" i="1">
                 <a:solidFill>
-                  <a:srgbClr val="FFFFFF"/>
+                  <a:srgbClr val="505050"/>
                 </a:solidFill>
               </a:rPr>
-              <a:t>Vic / Lee / Wayne</a:t>
+              <a:t>[Vic / Lee / Wayne]</a:t>
             </a:r>
           </a:p>
         </p:txBody>
@@ -3517,14 +3519,14 @@
         </p:nvSpPr>
         <p:spPr>
           <a:xfrm>
-            <a:off x="228600" y="1984248"/>
-            <a:ext cx="7315200" cy="502919"/>
+            <a:off x="6190488" y="1371600"/>
+            <a:ext cx="5760720" cy="475488"/>
           </a:xfrm>
           <a:prstGeom prst="rect">
             <a:avLst/>
           </a:prstGeom>
           <a:solidFill>
-            <a:srgbClr val="F2F2F2"/>
+            <a:srgbClr val="FFFFFF"/>
           </a:solidFill>
           <a:ln>
             <a:solidFill>
@@ -3562,14 +3564,14 @@
         </p:nvSpPr>
         <p:spPr>
           <a:xfrm>
-            <a:off x="256032" y="2057400"/>
-            <a:ext cx="347472" cy="347472"/>
+            <a:off x="6227064" y="1444752"/>
+            <a:ext cx="310896" cy="310896"/>
           </a:xfrm>
           <a:prstGeom prst="rect">
             <a:avLst/>
           </a:prstGeom>
           <a:solidFill>
-            <a:srgbClr val="378644"/>
+            <a:srgbClr val="2E74B5"/>
           </a:solidFill>
           <a:ln>
             <a:noFill/>
@@ -3605,8 +3607,8 @@
         </p:nvSpPr>
         <p:spPr>
           <a:xfrm>
-            <a:off x="256032" y="2057400"/>
-            <a:ext cx="347472" cy="347472"/>
+            <a:off x="6227064" y="1444752"/>
+            <a:ext cx="310896" cy="310896"/>
           </a:xfrm>
           <a:prstGeom prst="rect">
             <a:avLst/>
@@ -3621,7 +3623,7 @@
           <a:p>
             <a:pPr algn="ctr"/>
             <a:r>
-              <a:rPr sz="900" b="1" i="0">
+              <a:rPr sz="850" b="1" i="0">
                 <a:solidFill>
                   <a:srgbClr val="FFFFFF"/>
                 </a:solidFill>
@@ -3639,8 +3641,8 @@
         </p:nvSpPr>
         <p:spPr>
           <a:xfrm>
-            <a:off x="658368" y="2020824"/>
-            <a:ext cx="5394960" cy="310896"/>
+            <a:off x="6592824" y="1408176"/>
+            <a:ext cx="4389120" cy="274320"/>
           </a:xfrm>
           <a:prstGeom prst="rect">
             <a:avLst/>
@@ -3655,7 +3657,7 @@
           <a:p>
             <a:pPr algn="l"/>
             <a:r>
-              <a:rPr sz="950" b="0" i="0">
+              <a:rPr sz="850" b="0" i="0">
                 <a:solidFill>
                   <a:srgbClr val="1F3964"/>
                 </a:solidFill>
@@ -3667,57 +3669,14 @@
       </p:sp>
       <p:sp>
         <p:nvSpPr>
-          <p:cNvPr id="17" name="Rectangle 16"/>
-          <p:cNvSpPr/>
-          <p:nvPr/>
-        </p:nvSpPr>
-        <p:spPr>
-          <a:xfrm>
-            <a:off x="6080760" y="2075688"/>
-            <a:ext cx="1417320" cy="274320"/>
-          </a:xfrm>
-          <a:prstGeom prst="rect">
-            <a:avLst/>
-          </a:prstGeom>
-          <a:solidFill>
-            <a:srgbClr val="378644"/>
-          </a:solidFill>
-          <a:ln>
-            <a:noFill/>
-          </a:ln>
-        </p:spPr>
-        <p:style>
-          <a:lnRef idx="1">
-            <a:schemeClr val="accent1"/>
-          </a:lnRef>
-          <a:fillRef idx="3">
-            <a:schemeClr val="accent1"/>
-          </a:fillRef>
-          <a:effectRef idx="2">
-            <a:schemeClr val="accent1"/>
-          </a:effectRef>
-          <a:fontRef idx="minor">
-            <a:schemeClr val="lt1"/>
-          </a:fontRef>
-        </p:style>
-        <p:txBody>
-          <a:bodyPr rtlCol="0" anchor="ctr"/>
-          <a:lstStyle/>
-          <a:p>
-            <a:pPr algn="ctr"/>
-          </a:p>
-        </p:txBody>
-      </p:sp>
-      <p:sp>
-        <p:nvSpPr>
-          <p:cNvPr id="18" name="TextBox 17"/>
+          <p:cNvPr id="17" name="TextBox 16"/>
           <p:cNvSpPr txBox="1"/>
           <p:nvPr/>
         </p:nvSpPr>
         <p:spPr>
           <a:xfrm>
-            <a:off x="6089904" y="2075688"/>
-            <a:ext cx="1408176" cy="274320"/>
+            <a:off x="10991088" y="1627632"/>
+            <a:ext cx="914400" cy="201168"/>
           </a:xfrm>
           <a:prstGeom prst="rect">
             <a:avLst/>
@@ -3730,34 +3689,34 @@
           </a:bodyPr>
           <a:lstStyle/>
           <a:p>
-            <a:pPr algn="ctr"/>
-            <a:r>
-              <a:rPr sz="750" b="0" i="0">
+            <a:pPr algn="r"/>
+            <a:r>
+              <a:rPr sz="750" b="0" i="1">
                 <a:solidFill>
-                  <a:srgbClr val="FFFFFF"/>
+                  <a:srgbClr val="505050"/>
                 </a:solidFill>
               </a:rPr>
-              <a:t>Ethan / John Ng / Jay</a:t>
-            </a:r>
-          </a:p>
-        </p:txBody>
-      </p:sp>
-      <p:sp>
-        <p:nvSpPr>
-          <p:cNvPr id="19" name="Rectangle 18"/>
+              <a:t>[Ethan / John Ng / Jay]</a:t>
+            </a:r>
+          </a:p>
+        </p:txBody>
+      </p:sp>
+      <p:sp>
+        <p:nvSpPr>
+          <p:cNvPr id="18" name="Rectangle 17"/>
           <p:cNvSpPr/>
           <p:nvPr/>
         </p:nvSpPr>
         <p:spPr>
           <a:xfrm>
-            <a:off x="228600" y="2523744"/>
-            <a:ext cx="7315200" cy="502919"/>
+            <a:off x="292608" y="1901952"/>
+            <a:ext cx="5760720" cy="475488"/>
           </a:xfrm>
           <a:prstGeom prst="rect">
             <a:avLst/>
           </a:prstGeom>
           <a:solidFill>
-            <a:srgbClr val="F2F2F2"/>
+            <a:srgbClr val="FFFFFF"/>
           </a:solidFill>
           <a:ln>
             <a:solidFill>
@@ -3789,14 +3748,14 @@
       </p:sp>
       <p:sp>
         <p:nvSpPr>
-          <p:cNvPr id="20" name="Rectangle 19"/>
+          <p:cNvPr id="19" name="Rectangle 18"/>
           <p:cNvSpPr/>
           <p:nvPr/>
         </p:nvSpPr>
         <p:spPr>
           <a:xfrm>
-            <a:off x="256032" y="2596896"/>
-            <a:ext cx="347472" cy="347472"/>
+            <a:off x="329184" y="1975104"/>
+            <a:ext cx="310896" cy="310896"/>
           </a:xfrm>
           <a:prstGeom prst="rect">
             <a:avLst/>
@@ -3832,14 +3791,14 @@
       </p:sp>
       <p:sp>
         <p:nvSpPr>
-          <p:cNvPr id="21" name="TextBox 20"/>
+          <p:cNvPr id="20" name="TextBox 19"/>
           <p:cNvSpPr txBox="1"/>
           <p:nvPr/>
         </p:nvSpPr>
         <p:spPr>
           <a:xfrm>
-            <a:off x="256032" y="2596896"/>
-            <a:ext cx="347472" cy="347472"/>
+            <a:off x="329184" y="1975104"/>
+            <a:ext cx="310896" cy="310896"/>
           </a:xfrm>
           <a:prstGeom prst="rect">
             <a:avLst/>
@@ -3854,7 +3813,7 @@
           <a:p>
             <a:pPr algn="ctr"/>
             <a:r>
-              <a:rPr sz="900" b="1" i="0">
+              <a:rPr sz="850" b="1" i="0">
                 <a:solidFill>
                   <a:srgbClr val="FFFFFF"/>
                 </a:solidFill>
@@ -3866,14 +3825,14 @@
       </p:sp>
       <p:sp>
         <p:nvSpPr>
-          <p:cNvPr id="22" name="TextBox 21"/>
+          <p:cNvPr id="21" name="TextBox 20"/>
           <p:cNvSpPr txBox="1"/>
           <p:nvPr/>
         </p:nvSpPr>
         <p:spPr>
           <a:xfrm>
-            <a:off x="658368" y="2560320"/>
-            <a:ext cx="5394960" cy="310896"/>
+            <a:off x="694944" y="1938528"/>
+            <a:ext cx="4389120" cy="274320"/>
           </a:xfrm>
           <a:prstGeom prst="rect">
             <a:avLst/>
@@ -3888,7 +3847,7 @@
           <a:p>
             <a:pPr algn="l"/>
             <a:r>
-              <a:rPr sz="950" b="0" i="0">
+              <a:rPr sz="850" b="0" i="0">
                 <a:solidFill>
                   <a:srgbClr val="1F3964"/>
                 </a:solidFill>
@@ -3900,14 +3859,473 @@
       </p:sp>
       <p:sp>
         <p:nvSpPr>
+          <p:cNvPr id="22" name="TextBox 21"/>
+          <p:cNvSpPr txBox="1"/>
+          <p:nvPr/>
+        </p:nvSpPr>
+        <p:spPr>
+          <a:xfrm>
+            <a:off x="5093208" y="2157984"/>
+            <a:ext cx="914400" cy="201168"/>
+          </a:xfrm>
+          <a:prstGeom prst="rect">
+            <a:avLst/>
+          </a:prstGeom>
+          <a:noFill/>
+        </p:spPr>
+        <p:txBody>
+          <a:bodyPr wrap="square">
+            <a:spAutoFit/>
+          </a:bodyPr>
+          <a:lstStyle/>
+          <a:p>
+            <a:pPr algn="r"/>
+            <a:r>
+              <a:rPr sz="750" b="0" i="1">
+                <a:solidFill>
+                  <a:srgbClr val="505050"/>
+                </a:solidFill>
+              </a:rPr>
+              <a:t>[Lee / John Ng]</a:t>
+            </a:r>
+          </a:p>
+        </p:txBody>
+      </p:sp>
+      <p:sp>
+        <p:nvSpPr>
           <p:cNvPr id="23" name="Rectangle 22"/>
           <p:cNvSpPr/>
           <p:nvPr/>
         </p:nvSpPr>
         <p:spPr>
           <a:xfrm>
-            <a:off x="6080760" y="2615184"/>
-            <a:ext cx="1417320" cy="274320"/>
+            <a:off x="6190488" y="1901952"/>
+            <a:ext cx="5760720" cy="475488"/>
+          </a:xfrm>
+          <a:prstGeom prst="rect">
+            <a:avLst/>
+          </a:prstGeom>
+          <a:solidFill>
+            <a:srgbClr val="FFE0E0"/>
+          </a:solidFill>
+          <a:ln>
+            <a:solidFill>
+              <a:srgbClr val="D0D0D0"/>
+            </a:solidFill>
+          </a:ln>
+        </p:spPr>
+        <p:style>
+          <a:lnRef idx="1">
+            <a:schemeClr val="accent1"/>
+          </a:lnRef>
+          <a:fillRef idx="3">
+            <a:schemeClr val="accent1"/>
+          </a:fillRef>
+          <a:effectRef idx="2">
+            <a:schemeClr val="accent1"/>
+          </a:effectRef>
+          <a:fontRef idx="minor">
+            <a:schemeClr val="lt1"/>
+          </a:fontRef>
+        </p:style>
+        <p:txBody>
+          <a:bodyPr rtlCol="0" anchor="ctr"/>
+          <a:lstStyle/>
+          <a:p>
+            <a:pPr algn="ctr"/>
+          </a:p>
+        </p:txBody>
+      </p:sp>
+      <p:sp>
+        <p:nvSpPr>
+          <p:cNvPr id="24" name="Rectangle 23"/>
+          <p:cNvSpPr/>
+          <p:nvPr/>
+        </p:nvSpPr>
+        <p:spPr>
+          <a:xfrm>
+            <a:off x="6227064" y="1975104"/>
+            <a:ext cx="310896" cy="310896"/>
+          </a:xfrm>
+          <a:prstGeom prst="rect">
+            <a:avLst/>
+          </a:prstGeom>
+          <a:solidFill>
+            <a:srgbClr val="C00000"/>
+          </a:solidFill>
+          <a:ln>
+            <a:noFill/>
+          </a:ln>
+        </p:spPr>
+        <p:style>
+          <a:lnRef idx="1">
+            <a:schemeClr val="accent1"/>
+          </a:lnRef>
+          <a:fillRef idx="3">
+            <a:schemeClr val="accent1"/>
+          </a:fillRef>
+          <a:effectRef idx="2">
+            <a:schemeClr val="accent1"/>
+          </a:effectRef>
+          <a:fontRef idx="minor">
+            <a:schemeClr val="lt1"/>
+          </a:fontRef>
+        </p:style>
+        <p:txBody>
+          <a:bodyPr rtlCol="0" anchor="ctr"/>
+          <a:lstStyle/>
+          <a:p>
+            <a:pPr algn="ctr"/>
+          </a:p>
+        </p:txBody>
+      </p:sp>
+      <p:sp>
+        <p:nvSpPr>
+          <p:cNvPr id="25" name="TextBox 24"/>
+          <p:cNvSpPr txBox="1"/>
+          <p:nvPr/>
+        </p:nvSpPr>
+        <p:spPr>
+          <a:xfrm>
+            <a:off x="6227064" y="1975104"/>
+            <a:ext cx="310896" cy="310896"/>
+          </a:xfrm>
+          <a:prstGeom prst="rect">
+            <a:avLst/>
+          </a:prstGeom>
+          <a:noFill/>
+        </p:spPr>
+        <p:txBody>
+          <a:bodyPr wrap="square">
+            <a:spAutoFit/>
+          </a:bodyPr>
+          <a:lstStyle/>
+          <a:p>
+            <a:pPr algn="ctr"/>
+            <a:r>
+              <a:rPr sz="850" b="1" i="0">
+                <a:solidFill>
+                  <a:srgbClr val="FFFFFF"/>
+                </a:solidFill>
+              </a:rPr>
+              <a:t>4️⃣</a:t>
+            </a:r>
+          </a:p>
+        </p:txBody>
+      </p:sp>
+      <p:sp>
+        <p:nvSpPr>
+          <p:cNvPr id="26" name="TextBox 25"/>
+          <p:cNvSpPr txBox="1"/>
+          <p:nvPr/>
+        </p:nvSpPr>
+        <p:spPr>
+          <a:xfrm>
+            <a:off x="6592824" y="1938528"/>
+            <a:ext cx="4389120" cy="274320"/>
+          </a:xfrm>
+          <a:prstGeom prst="rect">
+            <a:avLst/>
+          </a:prstGeom>
+          <a:noFill/>
+        </p:spPr>
+        <p:txBody>
+          <a:bodyPr wrap="square">
+            <a:spAutoFit/>
+          </a:bodyPr>
+          <a:lstStyle/>
+          <a:p>
+            <a:pPr algn="l"/>
+            <a:r>
+              <a:rPr sz="850" b="1" i="0">
+                <a:solidFill>
+                  <a:srgbClr val="C00000"/>
+                </a:solidFill>
+              </a:rPr>
+              <a:t>⚠️ Place PO — Iniven RC-30 (6 PAR sites) — 8-WEEK LEAD TIME — ORDER IMMEDIATELY</a:t>
+            </a:r>
+          </a:p>
+        </p:txBody>
+      </p:sp>
+      <p:sp>
+        <p:nvSpPr>
+          <p:cNvPr id="27" name="TextBox 26"/>
+          <p:cNvSpPr txBox="1"/>
+          <p:nvPr/>
+        </p:nvSpPr>
+        <p:spPr>
+          <a:xfrm>
+            <a:off x="10991088" y="2157984"/>
+            <a:ext cx="914400" cy="201168"/>
+          </a:xfrm>
+          <a:prstGeom prst="rect">
+            <a:avLst/>
+          </a:prstGeom>
+          <a:noFill/>
+        </p:spPr>
+        <p:txBody>
+          <a:bodyPr wrap="square">
+            <a:spAutoFit/>
+          </a:bodyPr>
+          <a:lstStyle/>
+          <a:p>
+            <a:pPr algn="r"/>
+            <a:r>
+              <a:rPr sz="750" b="0" i="1">
+                <a:solidFill>
+                  <a:srgbClr val="505050"/>
+                </a:solidFill>
+              </a:rPr>
+              <a:t>[Jay]</a:t>
+            </a:r>
+          </a:p>
+        </p:txBody>
+      </p:sp>
+      <p:sp>
+        <p:nvSpPr>
+          <p:cNvPr id="28" name="Rectangle 27"/>
+          <p:cNvSpPr/>
+          <p:nvPr/>
+        </p:nvSpPr>
+        <p:spPr>
+          <a:xfrm>
+            <a:off x="292608" y="2432304"/>
+            <a:ext cx="5760720" cy="475488"/>
+          </a:xfrm>
+          <a:prstGeom prst="rect">
+            <a:avLst/>
+          </a:prstGeom>
+          <a:solidFill>
+            <a:srgbClr val="FFE0E0"/>
+          </a:solidFill>
+          <a:ln>
+            <a:solidFill>
+              <a:srgbClr val="D0D0D0"/>
+            </a:solidFill>
+          </a:ln>
+        </p:spPr>
+        <p:style>
+          <a:lnRef idx="1">
+            <a:schemeClr val="accent1"/>
+          </a:lnRef>
+          <a:fillRef idx="3">
+            <a:schemeClr val="accent1"/>
+          </a:fillRef>
+          <a:effectRef idx="2">
+            <a:schemeClr val="accent1"/>
+          </a:effectRef>
+          <a:fontRef idx="minor">
+            <a:schemeClr val="lt1"/>
+          </a:fontRef>
+        </p:style>
+        <p:txBody>
+          <a:bodyPr rtlCol="0" anchor="ctr"/>
+          <a:lstStyle/>
+          <a:p>
+            <a:pPr algn="ctr"/>
+          </a:p>
+        </p:txBody>
+      </p:sp>
+      <p:sp>
+        <p:nvSpPr>
+          <p:cNvPr id="29" name="Rectangle 28"/>
+          <p:cNvSpPr/>
+          <p:nvPr/>
+        </p:nvSpPr>
+        <p:spPr>
+          <a:xfrm>
+            <a:off x="329184" y="2505456"/>
+            <a:ext cx="310896" cy="310896"/>
+          </a:xfrm>
+          <a:prstGeom prst="rect">
+            <a:avLst/>
+          </a:prstGeom>
+          <a:solidFill>
+            <a:srgbClr val="C00000"/>
+          </a:solidFill>
+          <a:ln>
+            <a:noFill/>
+          </a:ln>
+        </p:spPr>
+        <p:style>
+          <a:lnRef idx="1">
+            <a:schemeClr val="accent1"/>
+          </a:lnRef>
+          <a:fillRef idx="3">
+            <a:schemeClr val="accent1"/>
+          </a:fillRef>
+          <a:effectRef idx="2">
+            <a:schemeClr val="accent1"/>
+          </a:effectRef>
+          <a:fontRef idx="minor">
+            <a:schemeClr val="lt1"/>
+          </a:fontRef>
+        </p:style>
+        <p:txBody>
+          <a:bodyPr rtlCol="0" anchor="ctr"/>
+          <a:lstStyle/>
+          <a:p>
+            <a:pPr algn="ctr"/>
+          </a:p>
+        </p:txBody>
+      </p:sp>
+      <p:sp>
+        <p:nvSpPr>
+          <p:cNvPr id="30" name="TextBox 29"/>
+          <p:cNvSpPr txBox="1"/>
+          <p:nvPr/>
+        </p:nvSpPr>
+        <p:spPr>
+          <a:xfrm>
+            <a:off x="329184" y="2505456"/>
+            <a:ext cx="310896" cy="310896"/>
+          </a:xfrm>
+          <a:prstGeom prst="rect">
+            <a:avLst/>
+          </a:prstGeom>
+          <a:noFill/>
+        </p:spPr>
+        <p:txBody>
+          <a:bodyPr wrap="square">
+            <a:spAutoFit/>
+          </a:bodyPr>
+          <a:lstStyle/>
+          <a:p>
+            <a:pPr algn="ctr"/>
+            <a:r>
+              <a:rPr sz="850" b="1" i="0">
+                <a:solidFill>
+                  <a:srgbClr val="FFFFFF"/>
+                </a:solidFill>
+              </a:rPr>
+              <a:t>5️⃣</a:t>
+            </a:r>
+          </a:p>
+        </p:txBody>
+      </p:sp>
+      <p:sp>
+        <p:nvSpPr>
+          <p:cNvPr id="31" name="TextBox 30"/>
+          <p:cNvSpPr txBox="1"/>
+          <p:nvPr/>
+        </p:nvSpPr>
+        <p:spPr>
+          <a:xfrm>
+            <a:off x="694944" y="2468880"/>
+            <a:ext cx="4389120" cy="274320"/>
+          </a:xfrm>
+          <a:prstGeom prst="rect">
+            <a:avLst/>
+          </a:prstGeom>
+          <a:noFill/>
+        </p:spPr>
+        <p:txBody>
+          <a:bodyPr wrap="square">
+            <a:spAutoFit/>
+          </a:bodyPr>
+          <a:lstStyle/>
+          <a:p>
+            <a:pPr algn="l"/>
+            <a:r>
+              <a:rPr sz="850" b="1" i="0">
+                <a:solidFill>
+                  <a:srgbClr val="C00000"/>
+                </a:solidFill>
+              </a:rPr>
+              <a:t>⚠️ Start PAR engineering design concurrently with PO placement</a:t>
+            </a:r>
+          </a:p>
+        </p:txBody>
+      </p:sp>
+      <p:sp>
+        <p:nvSpPr>
+          <p:cNvPr id="32" name="TextBox 31"/>
+          <p:cNvSpPr txBox="1"/>
+          <p:nvPr/>
+        </p:nvSpPr>
+        <p:spPr>
+          <a:xfrm>
+            <a:off x="5093208" y="2688336"/>
+            <a:ext cx="914400" cy="201168"/>
+          </a:xfrm>
+          <a:prstGeom prst="rect">
+            <a:avLst/>
+          </a:prstGeom>
+          <a:noFill/>
+        </p:spPr>
+        <p:txBody>
+          <a:bodyPr wrap="square">
+            <a:spAutoFit/>
+          </a:bodyPr>
+          <a:lstStyle/>
+          <a:p>
+            <a:pPr algn="r"/>
+            <a:r>
+              <a:rPr sz="750" b="0" i="1">
+                <a:solidFill>
+                  <a:srgbClr val="505050"/>
+                </a:solidFill>
+              </a:rPr>
+              <a:t>[BMcD / Jay]</a:t>
+            </a:r>
+          </a:p>
+        </p:txBody>
+      </p:sp>
+      <p:sp>
+        <p:nvSpPr>
+          <p:cNvPr id="33" name="Rectangle 32"/>
+          <p:cNvSpPr/>
+          <p:nvPr/>
+        </p:nvSpPr>
+        <p:spPr>
+          <a:xfrm>
+            <a:off x="6190488" y="2432304"/>
+            <a:ext cx="5760720" cy="475488"/>
+          </a:xfrm>
+          <a:prstGeom prst="rect">
+            <a:avLst/>
+          </a:prstGeom>
+          <a:solidFill>
+            <a:srgbClr val="FFFFFF"/>
+          </a:solidFill>
+          <a:ln>
+            <a:solidFill>
+              <a:srgbClr val="D0D0D0"/>
+            </a:solidFill>
+          </a:ln>
+        </p:spPr>
+        <p:style>
+          <a:lnRef idx="1">
+            <a:schemeClr val="accent1"/>
+          </a:lnRef>
+          <a:fillRef idx="3">
+            <a:schemeClr val="accent1"/>
+          </a:fillRef>
+          <a:effectRef idx="2">
+            <a:schemeClr val="accent1"/>
+          </a:effectRef>
+          <a:fontRef idx="minor">
+            <a:schemeClr val="lt1"/>
+          </a:fontRef>
+        </p:style>
+        <p:txBody>
+          <a:bodyPr rtlCol="0" anchor="ctr"/>
+          <a:lstStyle/>
+          <a:p>
+            <a:pPr algn="ctr"/>
+          </a:p>
+        </p:txBody>
+      </p:sp>
+      <p:sp>
+        <p:nvSpPr>
+          <p:cNvPr id="34" name="Rectangle 33"/>
+          <p:cNvSpPr/>
+          <p:nvPr/>
+        </p:nvSpPr>
+        <p:spPr>
+          <a:xfrm>
+            <a:off x="6227064" y="2505456"/>
+            <a:ext cx="310896" cy="310896"/>
           </a:xfrm>
           <a:prstGeom prst="rect">
             <a:avLst/>
@@ -3943,14 +4361,14 @@
       </p:sp>
       <p:sp>
         <p:nvSpPr>
-          <p:cNvPr id="24" name="TextBox 23"/>
+          <p:cNvPr id="35" name="TextBox 34"/>
           <p:cNvSpPr txBox="1"/>
           <p:nvPr/>
         </p:nvSpPr>
         <p:spPr>
           <a:xfrm>
-            <a:off x="6089904" y="2615184"/>
-            <a:ext cx="1408176" cy="274320"/>
+            <a:off x="6227064" y="2505456"/>
+            <a:ext cx="310896" cy="310896"/>
           </a:xfrm>
           <a:prstGeom prst="rect">
             <a:avLst/>
@@ -3965,26 +4383,1132 @@
           <a:p>
             <a:pPr algn="ctr"/>
             <a:r>
-              <a:rPr sz="750" b="0" i="0">
+              <a:rPr sz="850" b="1" i="0">
                 <a:solidFill>
                   <a:srgbClr val="FFFFFF"/>
                 </a:solidFill>
               </a:rPr>
-              <a:t>Lee / John Ng</a:t>
-            </a:r>
-          </a:p>
-        </p:txBody>
-      </p:sp>
-      <p:sp>
-        <p:nvSpPr>
-          <p:cNvPr id="25" name="Rectangle 24"/>
+              <a:t>6️⃣</a:t>
+            </a:r>
+          </a:p>
+        </p:txBody>
+      </p:sp>
+      <p:sp>
+        <p:nvSpPr>
+          <p:cNvPr id="36" name="TextBox 35"/>
+          <p:cNvSpPr txBox="1"/>
+          <p:nvPr/>
+        </p:nvSpPr>
+        <p:spPr>
+          <a:xfrm>
+            <a:off x="6592824" y="2468880"/>
+            <a:ext cx="4389120" cy="274320"/>
+          </a:xfrm>
+          <a:prstGeom prst="rect">
+            <a:avLst/>
+          </a:prstGeom>
+          <a:noFill/>
+        </p:spPr>
+        <p:txBody>
+          <a:bodyPr wrap="square">
+            <a:spAutoFit/>
+          </a:bodyPr>
+          <a:lstStyle/>
+          <a:p>
+            <a:pPr algn="l"/>
+            <a:r>
+              <a:rPr sz="850" b="0" i="0">
+                <a:solidFill>
+                  <a:srgbClr val="1F3964"/>
+                </a:solidFill>
+              </a:rPr>
+              <a:t>Northport C37.94 card — bundle order with Phase 2 equipment</a:t>
+            </a:r>
+          </a:p>
+        </p:txBody>
+      </p:sp>
+      <p:sp>
+        <p:nvSpPr>
+          <p:cNvPr id="37" name="TextBox 36"/>
+          <p:cNvSpPr txBox="1"/>
+          <p:nvPr/>
+        </p:nvSpPr>
+        <p:spPr>
+          <a:xfrm>
+            <a:off x="10991088" y="2688336"/>
+            <a:ext cx="914400" cy="201168"/>
+          </a:xfrm>
+          <a:prstGeom prst="rect">
+            <a:avLst/>
+          </a:prstGeom>
+          <a:noFill/>
+        </p:spPr>
+        <p:txBody>
+          <a:bodyPr wrap="square">
+            <a:spAutoFit/>
+          </a:bodyPr>
+          <a:lstStyle/>
+          <a:p>
+            <a:pPr algn="r"/>
+            <a:r>
+              <a:rPr sz="750" b="0" i="1">
+                <a:solidFill>
+                  <a:srgbClr val="505050"/>
+                </a:solidFill>
+              </a:rPr>
+              <a:t>[Jay / BMcD]</a:t>
+            </a:r>
+          </a:p>
+        </p:txBody>
+      </p:sp>
+      <p:sp>
+        <p:nvSpPr>
+          <p:cNvPr id="38" name="Rectangle 37"/>
           <p:cNvSpPr/>
           <p:nvPr/>
         </p:nvSpPr>
         <p:spPr>
           <a:xfrm>
-            <a:off x="228600" y="3063240"/>
-            <a:ext cx="7315200" cy="502919"/>
+            <a:off x="292608" y="2962656"/>
+            <a:ext cx="5760720" cy="475488"/>
+          </a:xfrm>
+          <a:prstGeom prst="rect">
+            <a:avLst/>
+          </a:prstGeom>
+          <a:solidFill>
+            <a:srgbClr val="FFFFFF"/>
+          </a:solidFill>
+          <a:ln>
+            <a:solidFill>
+              <a:srgbClr val="D0D0D0"/>
+            </a:solidFill>
+          </a:ln>
+        </p:spPr>
+        <p:style>
+          <a:lnRef idx="1">
+            <a:schemeClr val="accent1"/>
+          </a:lnRef>
+          <a:fillRef idx="3">
+            <a:schemeClr val="accent1"/>
+          </a:fillRef>
+          <a:effectRef idx="2">
+            <a:schemeClr val="accent1"/>
+          </a:effectRef>
+          <a:fontRef idx="minor">
+            <a:schemeClr val="lt1"/>
+          </a:fontRef>
+        </p:style>
+        <p:txBody>
+          <a:bodyPr rtlCol="0" anchor="ctr"/>
+          <a:lstStyle/>
+          <a:p>
+            <a:pPr algn="ctr"/>
+          </a:p>
+        </p:txBody>
+      </p:sp>
+      <p:sp>
+        <p:nvSpPr>
+          <p:cNvPr id="39" name="Rectangle 38"/>
+          <p:cNvSpPr/>
+          <p:nvPr/>
+        </p:nvSpPr>
+        <p:spPr>
+          <a:xfrm>
+            <a:off x="329184" y="3035808"/>
+            <a:ext cx="310896" cy="310896"/>
+          </a:xfrm>
+          <a:prstGeom prst="rect">
+            <a:avLst/>
+          </a:prstGeom>
+          <a:solidFill>
+            <a:srgbClr val="2E74B5"/>
+          </a:solidFill>
+          <a:ln>
+            <a:noFill/>
+          </a:ln>
+        </p:spPr>
+        <p:style>
+          <a:lnRef idx="1">
+            <a:schemeClr val="accent1"/>
+          </a:lnRef>
+          <a:fillRef idx="3">
+            <a:schemeClr val="accent1"/>
+          </a:fillRef>
+          <a:effectRef idx="2">
+            <a:schemeClr val="accent1"/>
+          </a:effectRef>
+          <a:fontRef idx="minor">
+            <a:schemeClr val="lt1"/>
+          </a:fontRef>
+        </p:style>
+        <p:txBody>
+          <a:bodyPr rtlCol="0" anchor="ctr"/>
+          <a:lstStyle/>
+          <a:p>
+            <a:pPr algn="ctr"/>
+          </a:p>
+        </p:txBody>
+      </p:sp>
+      <p:sp>
+        <p:nvSpPr>
+          <p:cNvPr id="40" name="TextBox 39"/>
+          <p:cNvSpPr txBox="1"/>
+          <p:nvPr/>
+        </p:nvSpPr>
+        <p:spPr>
+          <a:xfrm>
+            <a:off x="329184" y="3035808"/>
+            <a:ext cx="310896" cy="310896"/>
+          </a:xfrm>
+          <a:prstGeom prst="rect">
+            <a:avLst/>
+          </a:prstGeom>
+          <a:noFill/>
+        </p:spPr>
+        <p:txBody>
+          <a:bodyPr wrap="square">
+            <a:spAutoFit/>
+          </a:bodyPr>
+          <a:lstStyle/>
+          <a:p>
+            <a:pPr algn="ctr"/>
+            <a:r>
+              <a:rPr sz="850" b="1" i="0">
+                <a:solidFill>
+                  <a:srgbClr val="FFFFFF"/>
+                </a:solidFill>
+              </a:rPr>
+              <a:t>7️⃣</a:t>
+            </a:r>
+          </a:p>
+        </p:txBody>
+      </p:sp>
+      <p:sp>
+        <p:nvSpPr>
+          <p:cNvPr id="41" name="TextBox 40"/>
+          <p:cNvSpPr txBox="1"/>
+          <p:nvPr/>
+        </p:nvSpPr>
+        <p:spPr>
+          <a:xfrm>
+            <a:off x="694944" y="2999232"/>
+            <a:ext cx="4389120" cy="274320"/>
+          </a:xfrm>
+          <a:prstGeom prst="rect">
+            <a:avLst/>
+          </a:prstGeom>
+          <a:noFill/>
+        </p:spPr>
+        <p:txBody>
+          <a:bodyPr wrap="square">
+            <a:spAutoFit/>
+          </a:bodyPr>
+          <a:lstStyle/>
+          <a:p>
+            <a:pPr algn="l"/>
+            <a:r>
+              <a:rPr sz="850" b="0" i="0">
+                <a:solidFill>
+                  <a:srgbClr val="1F3964"/>
+                </a:solidFill>
+              </a:rPr>
+              <a:t>PAR pilot connectivity test — confirm wiring at Northport</a:t>
+            </a:r>
+          </a:p>
+        </p:txBody>
+      </p:sp>
+      <p:sp>
+        <p:nvSpPr>
+          <p:cNvPr id="42" name="TextBox 41"/>
+          <p:cNvSpPr txBox="1"/>
+          <p:nvPr/>
+        </p:nvSpPr>
+        <p:spPr>
+          <a:xfrm>
+            <a:off x="5093208" y="3218687"/>
+            <a:ext cx="914400" cy="201168"/>
+          </a:xfrm>
+          <a:prstGeom prst="rect">
+            <a:avLst/>
+          </a:prstGeom>
+          <a:noFill/>
+        </p:spPr>
+        <p:txBody>
+          <a:bodyPr wrap="square">
+            <a:spAutoFit/>
+          </a:bodyPr>
+          <a:lstStyle/>
+          <a:p>
+            <a:pPr algn="r"/>
+            <a:r>
+              <a:rPr sz="750" b="0" i="1">
+                <a:solidFill>
+                  <a:srgbClr val="505050"/>
+                </a:solidFill>
+              </a:rPr>
+              <a:t>[BMcD / Hawkeye]</a:t>
+            </a:r>
+          </a:p>
+        </p:txBody>
+      </p:sp>
+      <p:sp>
+        <p:nvSpPr>
+          <p:cNvPr id="43" name="Rectangle 42"/>
+          <p:cNvSpPr/>
+          <p:nvPr/>
+        </p:nvSpPr>
+        <p:spPr>
+          <a:xfrm>
+            <a:off x="6190488" y="2962656"/>
+            <a:ext cx="5760720" cy="475488"/>
+          </a:xfrm>
+          <a:prstGeom prst="rect">
+            <a:avLst/>
+          </a:prstGeom>
+          <a:solidFill>
+            <a:srgbClr val="FFFFFF"/>
+          </a:solidFill>
+          <a:ln>
+            <a:solidFill>
+              <a:srgbClr val="D0D0D0"/>
+            </a:solidFill>
+          </a:ln>
+        </p:spPr>
+        <p:style>
+          <a:lnRef idx="1">
+            <a:schemeClr val="accent1"/>
+          </a:lnRef>
+          <a:fillRef idx="3">
+            <a:schemeClr val="accent1"/>
+          </a:fillRef>
+          <a:effectRef idx="2">
+            <a:schemeClr val="accent1"/>
+          </a:effectRef>
+          <a:fontRef idx="minor">
+            <a:schemeClr val="lt1"/>
+          </a:fontRef>
+        </p:style>
+        <p:txBody>
+          <a:bodyPr rtlCol="0" anchor="ctr"/>
+          <a:lstStyle/>
+          <a:p>
+            <a:pPr algn="ctr"/>
+          </a:p>
+        </p:txBody>
+      </p:sp>
+      <p:sp>
+        <p:nvSpPr>
+          <p:cNvPr id="44" name="Rectangle 43"/>
+          <p:cNvSpPr/>
+          <p:nvPr/>
+        </p:nvSpPr>
+        <p:spPr>
+          <a:xfrm>
+            <a:off x="6227064" y="3035808"/>
+            <a:ext cx="310896" cy="310896"/>
+          </a:xfrm>
+          <a:prstGeom prst="rect">
+            <a:avLst/>
+          </a:prstGeom>
+          <a:solidFill>
+            <a:srgbClr val="2E74B5"/>
+          </a:solidFill>
+          <a:ln>
+            <a:noFill/>
+          </a:ln>
+        </p:spPr>
+        <p:style>
+          <a:lnRef idx="1">
+            <a:schemeClr val="accent1"/>
+          </a:lnRef>
+          <a:fillRef idx="3">
+            <a:schemeClr val="accent1"/>
+          </a:fillRef>
+          <a:effectRef idx="2">
+            <a:schemeClr val="accent1"/>
+          </a:effectRef>
+          <a:fontRef idx="minor">
+            <a:schemeClr val="lt1"/>
+          </a:fontRef>
+        </p:style>
+        <p:txBody>
+          <a:bodyPr rtlCol="0" anchor="ctr"/>
+          <a:lstStyle/>
+          <a:p>
+            <a:pPr algn="ctr"/>
+          </a:p>
+        </p:txBody>
+      </p:sp>
+      <p:sp>
+        <p:nvSpPr>
+          <p:cNvPr id="45" name="TextBox 44"/>
+          <p:cNvSpPr txBox="1"/>
+          <p:nvPr/>
+        </p:nvSpPr>
+        <p:spPr>
+          <a:xfrm>
+            <a:off x="6227064" y="3035808"/>
+            <a:ext cx="310896" cy="310896"/>
+          </a:xfrm>
+          <a:prstGeom prst="rect">
+            <a:avLst/>
+          </a:prstGeom>
+          <a:noFill/>
+        </p:spPr>
+        <p:txBody>
+          <a:bodyPr wrap="square">
+            <a:spAutoFit/>
+          </a:bodyPr>
+          <a:lstStyle/>
+          <a:p>
+            <a:pPr algn="ctr"/>
+            <a:r>
+              <a:rPr sz="850" b="1" i="0">
+                <a:solidFill>
+                  <a:srgbClr val="FFFFFF"/>
+                </a:solidFill>
+              </a:rPr>
+              <a:t>8️⃣</a:t>
+            </a:r>
+          </a:p>
+        </p:txBody>
+      </p:sp>
+      <p:sp>
+        <p:nvSpPr>
+          <p:cNvPr id="46" name="TextBox 45"/>
+          <p:cNvSpPr txBox="1"/>
+          <p:nvPr/>
+        </p:nvSpPr>
+        <p:spPr>
+          <a:xfrm>
+            <a:off x="6592824" y="2999232"/>
+            <a:ext cx="4389120" cy="274320"/>
+          </a:xfrm>
+          <a:prstGeom prst="rect">
+            <a:avLst/>
+          </a:prstGeom>
+          <a:noFill/>
+        </p:spPr>
+        <p:txBody>
+          <a:bodyPr wrap="square">
+            <a:spAutoFit/>
+          </a:bodyPr>
+          <a:lstStyle/>
+          <a:p>
+            <a:pPr algn="l"/>
+            <a:r>
+              <a:rPr sz="850" b="0" i="0">
+                <a:solidFill>
+                  <a:srgbClr val="1F3964"/>
+                </a:solidFill>
+              </a:rPr>
+              <a:t>Hawkeye site surveys — cable &amp; SFP inventory across all Phase 2 sites</a:t>
+            </a:r>
+          </a:p>
+        </p:txBody>
+      </p:sp>
+      <p:sp>
+        <p:nvSpPr>
+          <p:cNvPr id="47" name="TextBox 46"/>
+          <p:cNvSpPr txBox="1"/>
+          <p:nvPr/>
+        </p:nvSpPr>
+        <p:spPr>
+          <a:xfrm>
+            <a:off x="10991088" y="3218687"/>
+            <a:ext cx="914400" cy="201168"/>
+          </a:xfrm>
+          <a:prstGeom prst="rect">
+            <a:avLst/>
+          </a:prstGeom>
+          <a:noFill/>
+        </p:spPr>
+        <p:txBody>
+          <a:bodyPr wrap="square">
+            <a:spAutoFit/>
+          </a:bodyPr>
+          <a:lstStyle/>
+          <a:p>
+            <a:pPr algn="r"/>
+            <a:r>
+              <a:rPr sz="750" b="0" i="1">
+                <a:solidFill>
+                  <a:srgbClr val="505050"/>
+                </a:solidFill>
+              </a:rPr>
+              <a:t>[Vinny / Hawkeye]</a:t>
+            </a:r>
+          </a:p>
+        </p:txBody>
+      </p:sp>
+      <p:sp>
+        <p:nvSpPr>
+          <p:cNvPr id="48" name="Rectangle 47"/>
+          <p:cNvSpPr/>
+          <p:nvPr/>
+        </p:nvSpPr>
+        <p:spPr>
+          <a:xfrm>
+            <a:off x="292608" y="3493008"/>
+            <a:ext cx="5760720" cy="475488"/>
+          </a:xfrm>
+          <a:prstGeom prst="rect">
+            <a:avLst/>
+          </a:prstGeom>
+          <a:solidFill>
+            <a:srgbClr val="FFFFFF"/>
+          </a:solidFill>
+          <a:ln>
+            <a:solidFill>
+              <a:srgbClr val="D0D0D0"/>
+            </a:solidFill>
+          </a:ln>
+        </p:spPr>
+        <p:style>
+          <a:lnRef idx="1">
+            <a:schemeClr val="accent1"/>
+          </a:lnRef>
+          <a:fillRef idx="3">
+            <a:schemeClr val="accent1"/>
+          </a:fillRef>
+          <a:effectRef idx="2">
+            <a:schemeClr val="accent1"/>
+          </a:effectRef>
+          <a:fontRef idx="minor">
+            <a:schemeClr val="lt1"/>
+          </a:fontRef>
+        </p:style>
+        <p:txBody>
+          <a:bodyPr rtlCol="0" anchor="ctr"/>
+          <a:lstStyle/>
+          <a:p>
+            <a:pPr algn="ctr"/>
+          </a:p>
+        </p:txBody>
+      </p:sp>
+      <p:sp>
+        <p:nvSpPr>
+          <p:cNvPr id="49" name="Rectangle 48"/>
+          <p:cNvSpPr/>
+          <p:nvPr/>
+        </p:nvSpPr>
+        <p:spPr>
+          <a:xfrm>
+            <a:off x="329184" y="3566160"/>
+            <a:ext cx="310896" cy="310896"/>
+          </a:xfrm>
+          <a:prstGeom prst="rect">
+            <a:avLst/>
+          </a:prstGeom>
+          <a:solidFill>
+            <a:srgbClr val="2E74B5"/>
+          </a:solidFill>
+          <a:ln>
+            <a:noFill/>
+          </a:ln>
+        </p:spPr>
+        <p:style>
+          <a:lnRef idx="1">
+            <a:schemeClr val="accent1"/>
+          </a:lnRef>
+          <a:fillRef idx="3">
+            <a:schemeClr val="accent1"/>
+          </a:fillRef>
+          <a:effectRef idx="2">
+            <a:schemeClr val="accent1"/>
+          </a:effectRef>
+          <a:fontRef idx="minor">
+            <a:schemeClr val="lt1"/>
+          </a:fontRef>
+        </p:style>
+        <p:txBody>
+          <a:bodyPr rtlCol="0" anchor="ctr"/>
+          <a:lstStyle/>
+          <a:p>
+            <a:pPr algn="ctr"/>
+          </a:p>
+        </p:txBody>
+      </p:sp>
+      <p:sp>
+        <p:nvSpPr>
+          <p:cNvPr id="50" name="TextBox 49"/>
+          <p:cNvSpPr txBox="1"/>
+          <p:nvPr/>
+        </p:nvSpPr>
+        <p:spPr>
+          <a:xfrm>
+            <a:off x="329184" y="3566160"/>
+            <a:ext cx="310896" cy="310896"/>
+          </a:xfrm>
+          <a:prstGeom prst="rect">
+            <a:avLst/>
+          </a:prstGeom>
+          <a:noFill/>
+        </p:spPr>
+        <p:txBody>
+          <a:bodyPr wrap="square">
+            <a:spAutoFit/>
+          </a:bodyPr>
+          <a:lstStyle/>
+          <a:p>
+            <a:pPr algn="ctr"/>
+            <a:r>
+              <a:rPr sz="850" b="1" i="0">
+                <a:solidFill>
+                  <a:srgbClr val="FFFFFF"/>
+                </a:solidFill>
+              </a:rPr>
+              <a:t>9️⃣</a:t>
+            </a:r>
+          </a:p>
+        </p:txBody>
+      </p:sp>
+      <p:sp>
+        <p:nvSpPr>
+          <p:cNvPr id="51" name="TextBox 50"/>
+          <p:cNvSpPr txBox="1"/>
+          <p:nvPr/>
+        </p:nvSpPr>
+        <p:spPr>
+          <a:xfrm>
+            <a:off x="694944" y="3529584"/>
+            <a:ext cx="4389120" cy="274320"/>
+          </a:xfrm>
+          <a:prstGeom prst="rect">
+            <a:avLst/>
+          </a:prstGeom>
+          <a:noFill/>
+        </p:spPr>
+        <p:txBody>
+          <a:bodyPr wrap="square">
+            <a:spAutoFit/>
+          </a:bodyPr>
+          <a:lstStyle/>
+          <a:p>
+            <a:pPr algn="l"/>
+            <a:r>
+              <a:rPr sz="850" b="0" i="0">
+                <a:solidFill>
+                  <a:srgbClr val="1F3964"/>
+                </a:solidFill>
+              </a:rPr>
+              <a:t>Confirm Nokia training dates with Glenn — identify attendees</a:t>
+            </a:r>
+          </a:p>
+        </p:txBody>
+      </p:sp>
+      <p:sp>
+        <p:nvSpPr>
+          <p:cNvPr id="52" name="TextBox 51"/>
+          <p:cNvSpPr txBox="1"/>
+          <p:nvPr/>
+        </p:nvSpPr>
+        <p:spPr>
+          <a:xfrm>
+            <a:off x="5093208" y="3749039"/>
+            <a:ext cx="914400" cy="201168"/>
+          </a:xfrm>
+          <a:prstGeom prst="rect">
+            <a:avLst/>
+          </a:prstGeom>
+          <a:noFill/>
+        </p:spPr>
+        <p:txBody>
+          <a:bodyPr wrap="square">
+            <a:spAutoFit/>
+          </a:bodyPr>
+          <a:lstStyle/>
+          <a:p>
+            <a:pPr algn="r"/>
+            <a:r>
+              <a:rPr sz="750" b="0" i="1">
+                <a:solidFill>
+                  <a:srgbClr val="505050"/>
+                </a:solidFill>
+              </a:rPr>
+              <a:t>[Jay]</a:t>
+            </a:r>
+          </a:p>
+        </p:txBody>
+      </p:sp>
+      <p:sp>
+        <p:nvSpPr>
+          <p:cNvPr id="53" name="Rectangle 52"/>
+          <p:cNvSpPr/>
+          <p:nvPr/>
+        </p:nvSpPr>
+        <p:spPr>
+          <a:xfrm>
+            <a:off x="6190488" y="3493008"/>
+            <a:ext cx="5760720" cy="475488"/>
+          </a:xfrm>
+          <a:prstGeom prst="rect">
+            <a:avLst/>
+          </a:prstGeom>
+          <a:solidFill>
+            <a:srgbClr val="FFE0E0"/>
+          </a:solidFill>
+          <a:ln>
+            <a:solidFill>
+              <a:srgbClr val="D0D0D0"/>
+            </a:solidFill>
+          </a:ln>
+        </p:spPr>
+        <p:style>
+          <a:lnRef idx="1">
+            <a:schemeClr val="accent1"/>
+          </a:lnRef>
+          <a:fillRef idx="3">
+            <a:schemeClr val="accent1"/>
+          </a:fillRef>
+          <a:effectRef idx="2">
+            <a:schemeClr val="accent1"/>
+          </a:effectRef>
+          <a:fontRef idx="minor">
+            <a:schemeClr val="lt1"/>
+          </a:fontRef>
+        </p:style>
+        <p:txBody>
+          <a:bodyPr rtlCol="0" anchor="ctr"/>
+          <a:lstStyle/>
+          <a:p>
+            <a:pPr algn="ctr"/>
+          </a:p>
+        </p:txBody>
+      </p:sp>
+      <p:sp>
+        <p:nvSpPr>
+          <p:cNvPr id="54" name="Rectangle 53"/>
+          <p:cNvSpPr/>
+          <p:nvPr/>
+        </p:nvSpPr>
+        <p:spPr>
+          <a:xfrm>
+            <a:off x="6227064" y="3566160"/>
+            <a:ext cx="310896" cy="310896"/>
+          </a:xfrm>
+          <a:prstGeom prst="rect">
+            <a:avLst/>
+          </a:prstGeom>
+          <a:solidFill>
+            <a:srgbClr val="C00000"/>
+          </a:solidFill>
+          <a:ln>
+            <a:noFill/>
+          </a:ln>
+        </p:spPr>
+        <p:style>
+          <a:lnRef idx="1">
+            <a:schemeClr val="accent1"/>
+          </a:lnRef>
+          <a:fillRef idx="3">
+            <a:schemeClr val="accent1"/>
+          </a:fillRef>
+          <a:effectRef idx="2">
+            <a:schemeClr val="accent1"/>
+          </a:effectRef>
+          <a:fontRef idx="minor">
+            <a:schemeClr val="lt1"/>
+          </a:fontRef>
+        </p:style>
+        <p:txBody>
+          <a:bodyPr rtlCol="0" anchor="ctr"/>
+          <a:lstStyle/>
+          <a:p>
+            <a:pPr algn="ctr"/>
+          </a:p>
+        </p:txBody>
+      </p:sp>
+      <p:sp>
+        <p:nvSpPr>
+          <p:cNvPr id="55" name="TextBox 54"/>
+          <p:cNvSpPr txBox="1"/>
+          <p:nvPr/>
+        </p:nvSpPr>
+        <p:spPr>
+          <a:xfrm>
+            <a:off x="6227064" y="3566160"/>
+            <a:ext cx="310896" cy="310896"/>
+          </a:xfrm>
+          <a:prstGeom prst="rect">
+            <a:avLst/>
+          </a:prstGeom>
+          <a:noFill/>
+        </p:spPr>
+        <p:txBody>
+          <a:bodyPr wrap="square">
+            <a:spAutoFit/>
+          </a:bodyPr>
+          <a:lstStyle/>
+          <a:p>
+            <a:pPr algn="ctr"/>
+            <a:r>
+              <a:rPr sz="850" b="1" i="0">
+                <a:solidFill>
+                  <a:srgbClr val="FFFFFF"/>
+                </a:solidFill>
+              </a:rPr>
+              <a:t>🔟</a:t>
+            </a:r>
+          </a:p>
+        </p:txBody>
+      </p:sp>
+      <p:sp>
+        <p:nvSpPr>
+          <p:cNvPr id="56" name="TextBox 55"/>
+          <p:cNvSpPr txBox="1"/>
+          <p:nvPr/>
+        </p:nvSpPr>
+        <p:spPr>
+          <a:xfrm>
+            <a:off x="6592824" y="3529584"/>
+            <a:ext cx="4389120" cy="274320"/>
+          </a:xfrm>
+          <a:prstGeom prst="rect">
+            <a:avLst/>
+          </a:prstGeom>
+          <a:noFill/>
+        </p:spPr>
+        <p:txBody>
+          <a:bodyPr wrap="square">
+            <a:spAutoFit/>
+          </a:bodyPr>
+          <a:lstStyle/>
+          <a:p>
+            <a:pPr algn="l"/>
+            <a:r>
+              <a:rPr sz="850" b="1" i="0">
+                <a:solidFill>
+                  <a:srgbClr val="C00000"/>
+                </a:solidFill>
+              </a:rPr>
+              <a:t>Lindenhurst IFR submission — due Monday April 27 ⚠️ IMMINENT</a:t>
+            </a:r>
+          </a:p>
+        </p:txBody>
+      </p:sp>
+      <p:sp>
+        <p:nvSpPr>
+          <p:cNvPr id="57" name="TextBox 56"/>
+          <p:cNvSpPr txBox="1"/>
+          <p:nvPr/>
+        </p:nvSpPr>
+        <p:spPr>
+          <a:xfrm>
+            <a:off x="10991088" y="3749039"/>
+            <a:ext cx="914400" cy="201168"/>
+          </a:xfrm>
+          <a:prstGeom prst="rect">
+            <a:avLst/>
+          </a:prstGeom>
+          <a:noFill/>
+        </p:spPr>
+        <p:txBody>
+          <a:bodyPr wrap="square">
+            <a:spAutoFit/>
+          </a:bodyPr>
+          <a:lstStyle/>
+          <a:p>
+            <a:pPr algn="r"/>
+            <a:r>
+              <a:rPr sz="750" b="0" i="1">
+                <a:solidFill>
+                  <a:srgbClr val="505050"/>
+                </a:solidFill>
+              </a:rPr>
+              <a:t>[Burns &amp; McDonnell]</a:t>
+            </a:r>
+          </a:p>
+        </p:txBody>
+      </p:sp>
+      <p:sp>
+        <p:nvSpPr>
+          <p:cNvPr id="58" name="Rectangle 57"/>
+          <p:cNvSpPr/>
+          <p:nvPr/>
+        </p:nvSpPr>
+        <p:spPr>
+          <a:xfrm>
+            <a:off x="228600" y="4206240"/>
+            <a:ext cx="11731752" cy="329184"/>
+          </a:xfrm>
+          <a:prstGeom prst="rect">
+            <a:avLst/>
+          </a:prstGeom>
+          <a:solidFill>
+            <a:srgbClr val="ED7D31"/>
+          </a:solidFill>
+          <a:ln>
+            <a:noFill/>
+          </a:ln>
+        </p:spPr>
+        <p:style>
+          <a:lnRef idx="1">
+            <a:schemeClr val="accent1"/>
+          </a:lnRef>
+          <a:fillRef idx="3">
+            <a:schemeClr val="accent1"/>
+          </a:fillRef>
+          <a:effectRef idx="2">
+            <a:schemeClr val="accent1"/>
+          </a:effectRef>
+          <a:fontRef idx="minor">
+            <a:schemeClr val="lt1"/>
+          </a:fontRef>
+        </p:style>
+        <p:txBody>
+          <a:bodyPr rtlCol="0" anchor="ctr"/>
+          <a:lstStyle/>
+          <a:p>
+            <a:pPr algn="ctr"/>
+          </a:p>
+        </p:txBody>
+      </p:sp>
+      <p:sp>
+        <p:nvSpPr>
+          <p:cNvPr id="59" name="TextBox 58"/>
+          <p:cNvSpPr txBox="1"/>
+          <p:nvPr/>
+        </p:nvSpPr>
+        <p:spPr>
+          <a:xfrm>
+            <a:off x="228600" y="4206240"/>
+            <a:ext cx="11731752" cy="329184"/>
+          </a:xfrm>
+          <a:prstGeom prst="rect">
+            <a:avLst/>
+          </a:prstGeom>
+          <a:noFill/>
+        </p:spPr>
+        <p:txBody>
+          <a:bodyPr wrap="square">
+            <a:spAutoFit/>
+          </a:bodyPr>
+          <a:lstStyle/>
+          <a:p>
+            <a:pPr algn="l"/>
+            <a:r>
+              <a:rPr sz="1100" b="1" i="0">
+                <a:solidFill>
+                  <a:srgbClr val="FFFFFF"/>
+                </a:solidFill>
+              </a:rPr>
+              <a:t>  ⚠️  CURRENT RISKS</a:t>
+            </a:r>
+          </a:p>
+        </p:txBody>
+      </p:sp>
+      <p:sp>
+        <p:nvSpPr>
+          <p:cNvPr id="60" name="Rectangle 59"/>
+          <p:cNvSpPr/>
+          <p:nvPr/>
+        </p:nvSpPr>
+        <p:spPr>
+          <a:xfrm>
+            <a:off x="228600" y="4535424"/>
+            <a:ext cx="11731752" cy="1993392"/>
+          </a:xfrm>
+          <a:prstGeom prst="rect">
+            <a:avLst/>
+          </a:prstGeom>
+          <a:solidFill>
+            <a:srgbClr val="F2F2F2"/>
+          </a:solidFill>
+          <a:ln>
+            <a:solidFill>
+              <a:srgbClr val="C0C0C0"/>
+            </a:solidFill>
+          </a:ln>
+        </p:spPr>
+        <p:style>
+          <a:lnRef idx="1">
+            <a:schemeClr val="accent1"/>
+          </a:lnRef>
+          <a:fillRef idx="3">
+            <a:schemeClr val="accent1"/>
+          </a:fillRef>
+          <a:effectRef idx="2">
+            <a:schemeClr val="accent1"/>
+          </a:effectRef>
+          <a:fontRef idx="minor">
+            <a:schemeClr val="lt1"/>
+          </a:fontRef>
+        </p:style>
+        <p:txBody>
+          <a:bodyPr rtlCol="0" anchor="ctr"/>
+          <a:lstStyle/>
+          <a:p>
+            <a:pPr algn="ctr"/>
+          </a:p>
+        </p:txBody>
+      </p:sp>
+      <p:sp>
+        <p:nvSpPr>
+          <p:cNvPr id="61" name="Rectangle 60"/>
+          <p:cNvSpPr/>
+          <p:nvPr/>
+        </p:nvSpPr>
+        <p:spPr>
+          <a:xfrm>
+            <a:off x="292608" y="4572000"/>
+            <a:ext cx="2212848" cy="1901952"/>
+          </a:xfrm>
+          <a:prstGeom prst="rect">
+            <a:avLst/>
+          </a:prstGeom>
+          <a:solidFill>
+            <a:srgbClr val="FFE0E0"/>
+          </a:solidFill>
+          <a:ln>
+            <a:solidFill>
+              <a:srgbClr val="D0D0D0"/>
+            </a:solidFill>
+          </a:ln>
+        </p:spPr>
+        <p:style>
+          <a:lnRef idx="1">
+            <a:schemeClr val="accent1"/>
+          </a:lnRef>
+          <a:fillRef idx="3">
+            <a:schemeClr val="accent1"/>
+          </a:fillRef>
+          <a:effectRef idx="2">
+            <a:schemeClr val="accent1"/>
+          </a:effectRef>
+          <a:fontRef idx="minor">
+            <a:schemeClr val="lt1"/>
+          </a:fontRef>
+        </p:style>
+        <p:txBody>
+          <a:bodyPr rtlCol="0" anchor="ctr"/>
+          <a:lstStyle/>
+          <a:p>
+            <a:pPr algn="ctr"/>
+          </a:p>
+        </p:txBody>
+      </p:sp>
+      <p:sp>
+        <p:nvSpPr>
+          <p:cNvPr id="62" name="Rectangle 61"/>
+          <p:cNvSpPr/>
+          <p:nvPr/>
+        </p:nvSpPr>
+        <p:spPr>
+          <a:xfrm>
+            <a:off x="347472" y="4645152"/>
+            <a:ext cx="292608" cy="292608"/>
+          </a:xfrm>
+          <a:prstGeom prst="rect">
+            <a:avLst/>
+          </a:prstGeom>
+          <a:solidFill>
+            <a:srgbClr val="C00000"/>
+          </a:solidFill>
+          <a:ln>
+            <a:noFill/>
+          </a:ln>
+        </p:spPr>
+        <p:style>
+          <a:lnRef idx="1">
+            <a:schemeClr val="accent1"/>
+          </a:lnRef>
+          <a:fillRef idx="3">
+            <a:schemeClr val="accent1"/>
+          </a:fillRef>
+          <a:effectRef idx="2">
+            <a:schemeClr val="accent1"/>
+          </a:effectRef>
+          <a:fontRef idx="minor">
+            <a:schemeClr val="lt1"/>
+          </a:fontRef>
+        </p:style>
+        <p:txBody>
+          <a:bodyPr rtlCol="0" anchor="ctr"/>
+          <a:lstStyle/>
+          <a:p>
+            <a:pPr algn="ctr"/>
+          </a:p>
+        </p:txBody>
+      </p:sp>
+      <p:sp>
+        <p:nvSpPr>
+          <p:cNvPr id="63" name="TextBox 62"/>
+          <p:cNvSpPr txBox="1"/>
+          <p:nvPr/>
+        </p:nvSpPr>
+        <p:spPr>
+          <a:xfrm>
+            <a:off x="347472" y="4645152"/>
+            <a:ext cx="292608" cy="292608"/>
+          </a:xfrm>
+          <a:prstGeom prst="rect">
+            <a:avLst/>
+          </a:prstGeom>
+          <a:noFill/>
+        </p:spPr>
+        <p:txBody>
+          <a:bodyPr wrap="square">
+            <a:spAutoFit/>
+          </a:bodyPr>
+          <a:lstStyle/>
+          <a:p>
+            <a:pPr algn="ctr"/>
+            <a:r>
+              <a:rPr sz="900" b="1" i="0">
+                <a:solidFill>
+                  <a:srgbClr val="FFFFFF"/>
+                </a:solidFill>
+              </a:rPr>
+              <a:t>🔴</a:t>
+            </a:r>
+          </a:p>
+        </p:txBody>
+      </p:sp>
+      <p:sp>
+        <p:nvSpPr>
+          <p:cNvPr id="64" name="TextBox 63"/>
+          <p:cNvSpPr txBox="1"/>
+          <p:nvPr/>
+        </p:nvSpPr>
+        <p:spPr>
+          <a:xfrm>
+            <a:off x="347472" y="4974336"/>
+            <a:ext cx="2103120" cy="1444752"/>
+          </a:xfrm>
+          <a:prstGeom prst="rect">
+            <a:avLst/>
+          </a:prstGeom>
+          <a:noFill/>
+        </p:spPr>
+        <p:txBody>
+          <a:bodyPr wrap="square">
+            <a:spAutoFit/>
+          </a:bodyPr>
+          <a:lstStyle/>
+          <a:p>
+            <a:pPr algn="l"/>
+            <a:r>
+              <a:rPr sz="850" b="0" i="0">
+                <a:solidFill>
+                  <a:srgbClr val="1F3964"/>
+                </a:solidFill>
+              </a:rPr>
+              <a:t>PAR Serial-to-IP Equipment (Iniven RC-30) — 8-week lead time. PO not yet placed. CRITICAL PATH.</a:t>
+            </a:r>
+          </a:p>
+        </p:txBody>
+      </p:sp>
+      <p:sp>
+        <p:nvSpPr>
+          <p:cNvPr id="65" name="Rectangle 64"/>
+          <p:cNvSpPr/>
+          <p:nvPr/>
+        </p:nvSpPr>
+        <p:spPr>
+          <a:xfrm>
+            <a:off x="2578608" y="4572000"/>
+            <a:ext cx="2212848" cy="1901952"/>
           </a:xfrm>
           <a:prstGeom prst="rect">
             <a:avLst/>
@@ -4022,20 +5546,20 @@
       </p:sp>
       <p:sp>
         <p:nvSpPr>
-          <p:cNvPr id="26" name="Rectangle 25"/>
+          <p:cNvPr id="66" name="Rectangle 65"/>
           <p:cNvSpPr/>
           <p:nvPr/>
         </p:nvSpPr>
         <p:spPr>
           <a:xfrm>
-            <a:off x="256032" y="3136392"/>
-            <a:ext cx="347472" cy="347472"/>
+            <a:off x="2633472" y="4645152"/>
+            <a:ext cx="292608" cy="292608"/>
           </a:xfrm>
           <a:prstGeom prst="rect">
             <a:avLst/>
           </a:prstGeom>
           <a:solidFill>
-            <a:srgbClr val="ED7D31"/>
+            <a:srgbClr val="FFC000"/>
           </a:solidFill>
           <a:ln>
             <a:noFill/>
@@ -4065,14 +5589,14 @@
       </p:sp>
       <p:sp>
         <p:nvSpPr>
-          <p:cNvPr id="27" name="TextBox 26"/>
+          <p:cNvPr id="67" name="TextBox 66"/>
           <p:cNvSpPr txBox="1"/>
           <p:nvPr/>
         </p:nvSpPr>
         <p:spPr>
           <a:xfrm>
-            <a:off x="256032" y="3136392"/>
-            <a:ext cx="347472" cy="347472"/>
+            <a:off x="2633472" y="4645152"/>
+            <a:ext cx="292608" cy="292608"/>
           </a:xfrm>
           <a:prstGeom prst="rect">
             <a:avLst/>
@@ -4092,21 +5616,21 @@
                   <a:srgbClr val="FFFFFF"/>
                 </a:solidFill>
               </a:rPr>
-              <a:t>4️⃣</a:t>
-            </a:r>
-          </a:p>
-        </p:txBody>
-      </p:sp>
-      <p:sp>
-        <p:nvSpPr>
-          <p:cNvPr id="28" name="TextBox 27"/>
+              <a:t>🟡</a:t>
+            </a:r>
+          </a:p>
+        </p:txBody>
+      </p:sp>
+      <p:sp>
+        <p:nvSpPr>
+          <p:cNvPr id="68" name="TextBox 67"/>
           <p:cNvSpPr txBox="1"/>
           <p:nvPr/>
         </p:nvSpPr>
         <p:spPr>
           <a:xfrm>
-            <a:off x="658368" y="3099816"/>
-            <a:ext cx="5394960" cy="310896"/>
+            <a:off x="2633472" y="4974336"/>
+            <a:ext cx="2103120" cy="1444752"/>
           </a:xfrm>
           <a:prstGeom prst="rect">
             <a:avLst/>
@@ -4121,103 +5645,26 @@
           <a:p>
             <a:pPr algn="l"/>
             <a:r>
-              <a:rPr sz="950" b="0" i="0">
+              <a:rPr sz="850" b="0" i="0">
                 <a:solidFill>
                   <a:srgbClr val="1F3964"/>
                 </a:solidFill>
               </a:rPr>
-              <a:t>Start PAR engineering design — Chakrapani team, concurrent with RC-30 delivery</a:t>
-            </a:r>
-          </a:p>
-        </p:txBody>
-      </p:sp>
-      <p:sp>
-        <p:nvSpPr>
-          <p:cNvPr id="29" name="Rectangle 28"/>
+              <a:t>DNS update — NSP installed 4/21, status being confirmed. DNS fix escalated to Vic.</a:t>
+            </a:r>
+          </a:p>
+        </p:txBody>
+      </p:sp>
+      <p:sp>
+        <p:nvSpPr>
+          <p:cNvPr id="69" name="Rectangle 68"/>
           <p:cNvSpPr/>
           <p:nvPr/>
         </p:nvSpPr>
         <p:spPr>
           <a:xfrm>
-            <a:off x="6080760" y="3154680"/>
-            <a:ext cx="1417320" cy="274320"/>
-          </a:xfrm>
-          <a:prstGeom prst="rect">
-            <a:avLst/>
-          </a:prstGeom>
-          <a:solidFill>
-            <a:srgbClr val="ED7D31"/>
-          </a:solidFill>
-          <a:ln>
-            <a:noFill/>
-          </a:ln>
-        </p:spPr>
-        <p:style>
-          <a:lnRef idx="1">
-            <a:schemeClr val="accent1"/>
-          </a:lnRef>
-          <a:fillRef idx="3">
-            <a:schemeClr val="accent1"/>
-          </a:fillRef>
-          <a:effectRef idx="2">
-            <a:schemeClr val="accent1"/>
-          </a:effectRef>
-          <a:fontRef idx="minor">
-            <a:schemeClr val="lt1"/>
-          </a:fontRef>
-        </p:style>
-        <p:txBody>
-          <a:bodyPr rtlCol="0" anchor="ctr"/>
-          <a:lstStyle/>
-          <a:p>
-            <a:pPr algn="ctr"/>
-          </a:p>
-        </p:txBody>
-      </p:sp>
-      <p:sp>
-        <p:nvSpPr>
-          <p:cNvPr id="30" name="TextBox 29"/>
-          <p:cNvSpPr txBox="1"/>
-          <p:nvPr/>
-        </p:nvSpPr>
-        <p:spPr>
-          <a:xfrm>
-            <a:off x="6089904" y="3154680"/>
-            <a:ext cx="1408176" cy="274320"/>
-          </a:xfrm>
-          <a:prstGeom prst="rect">
-            <a:avLst/>
-          </a:prstGeom>
-          <a:noFill/>
-        </p:spPr>
-        <p:txBody>
-          <a:bodyPr wrap="square">
-            <a:spAutoFit/>
-          </a:bodyPr>
-          <a:lstStyle/>
-          <a:p>
-            <a:pPr algn="ctr"/>
-            <a:r>
-              <a:rPr sz="750" b="0" i="0">
-                <a:solidFill>
-                  <a:srgbClr val="FFFFFF"/>
-                </a:solidFill>
-              </a:rPr>
-              <a:t>BMcD / Jay</a:t>
-            </a:r>
-          </a:p>
-        </p:txBody>
-      </p:sp>
-      <p:sp>
-        <p:nvSpPr>
-          <p:cNvPr id="31" name="Rectangle 30"/>
-          <p:cNvSpPr/>
-          <p:nvPr/>
-        </p:nvSpPr>
-        <p:spPr>
-          <a:xfrm>
-            <a:off x="228600" y="3602736"/>
-            <a:ext cx="7315200" cy="502919"/>
+            <a:off x="4864608" y="4572000"/>
+            <a:ext cx="2212848" cy="1901952"/>
           </a:xfrm>
           <a:prstGeom prst="rect">
             <a:avLst/>
@@ -4255,20 +5702,20 @@
       </p:sp>
       <p:sp>
         <p:nvSpPr>
-          <p:cNvPr id="32" name="Rectangle 31"/>
+          <p:cNvPr id="70" name="Rectangle 69"/>
           <p:cNvSpPr/>
           <p:nvPr/>
         </p:nvSpPr>
         <p:spPr>
           <a:xfrm>
-            <a:off x="256032" y="3675887"/>
-            <a:ext cx="347472" cy="347472"/>
+            <a:off x="4919472" y="4645152"/>
+            <a:ext cx="292608" cy="292608"/>
           </a:xfrm>
           <a:prstGeom prst="rect">
             <a:avLst/>
           </a:prstGeom>
           <a:solidFill>
-            <a:srgbClr val="ED7D31"/>
+            <a:srgbClr val="FFC000"/>
           </a:solidFill>
           <a:ln>
             <a:noFill/>
@@ -4298,14 +5745,14 @@
       </p:sp>
       <p:sp>
         <p:nvSpPr>
-          <p:cNvPr id="33" name="TextBox 32"/>
+          <p:cNvPr id="71" name="TextBox 70"/>
           <p:cNvSpPr txBox="1"/>
           <p:nvPr/>
         </p:nvSpPr>
         <p:spPr>
           <a:xfrm>
-            <a:off x="256032" y="3675887"/>
-            <a:ext cx="347472" cy="347472"/>
+            <a:off x="4919472" y="4645152"/>
+            <a:ext cx="292608" cy="292608"/>
           </a:xfrm>
           <a:prstGeom prst="rect">
             <a:avLst/>
@@ -4325,21 +5772,21 @@
                   <a:srgbClr val="FFFFFF"/>
                 </a:solidFill>
               </a:rPr>
-              <a:t>5️⃣</a:t>
-            </a:r>
-          </a:p>
-        </p:txBody>
-      </p:sp>
-      <p:sp>
-        <p:nvSpPr>
-          <p:cNvPr id="34" name="TextBox 33"/>
+              <a:t>🟡</a:t>
+            </a:r>
+          </a:p>
+        </p:txBody>
+      </p:sp>
+      <p:sp>
+        <p:nvSpPr>
+          <p:cNvPr id="72" name="TextBox 71"/>
           <p:cNvSpPr txBox="1"/>
           <p:nvPr/>
         </p:nvSpPr>
         <p:spPr>
           <a:xfrm>
-            <a:off x="658368" y="3639312"/>
-            <a:ext cx="5394960" cy="310896"/>
+            <a:off x="4919472" y="4974336"/>
+            <a:ext cx="2103120" cy="1444752"/>
           </a:xfrm>
           <a:prstGeom prst="rect">
             <a:avLst/>
@@ -4354,103 +5801,26 @@
           <a:p>
             <a:pPr algn="l"/>
             <a:r>
-              <a:rPr sz="950" b="0" i="0">
+              <a:rPr sz="850" b="0" i="0">
                 <a:solidFill>
                   <a:srgbClr val="1F3964"/>
                 </a:solidFill>
               </a:rPr>
-              <a:t>Northport C37.94 card — bundle order with Phase 2 equipment PO</a:t>
-            </a:r>
-          </a:p>
-        </p:txBody>
-      </p:sp>
-      <p:sp>
-        <p:nvSpPr>
-          <p:cNvPr id="35" name="Rectangle 34"/>
+              <a:t>Weather delays — substation closures possible at temps &gt;90°F. Potential 2-week delay per event. (Risk — not yet an issue. Monitor summer forecast. Schedule critical work in cooler windows.)</a:t>
+            </a:r>
+          </a:p>
+        </p:txBody>
+      </p:sp>
+      <p:sp>
+        <p:nvSpPr>
+          <p:cNvPr id="73" name="Rectangle 72"/>
           <p:cNvSpPr/>
           <p:nvPr/>
         </p:nvSpPr>
         <p:spPr>
           <a:xfrm>
-            <a:off x="6080760" y="3694176"/>
-            <a:ext cx="1417320" cy="274320"/>
-          </a:xfrm>
-          <a:prstGeom prst="rect">
-            <a:avLst/>
-          </a:prstGeom>
-          <a:solidFill>
-            <a:srgbClr val="ED7D31"/>
-          </a:solidFill>
-          <a:ln>
-            <a:noFill/>
-          </a:ln>
-        </p:spPr>
-        <p:style>
-          <a:lnRef idx="1">
-            <a:schemeClr val="accent1"/>
-          </a:lnRef>
-          <a:fillRef idx="3">
-            <a:schemeClr val="accent1"/>
-          </a:fillRef>
-          <a:effectRef idx="2">
-            <a:schemeClr val="accent1"/>
-          </a:effectRef>
-          <a:fontRef idx="minor">
-            <a:schemeClr val="lt1"/>
-          </a:fontRef>
-        </p:style>
-        <p:txBody>
-          <a:bodyPr rtlCol="0" anchor="ctr"/>
-          <a:lstStyle/>
-          <a:p>
-            <a:pPr algn="ctr"/>
-          </a:p>
-        </p:txBody>
-      </p:sp>
-      <p:sp>
-        <p:nvSpPr>
-          <p:cNvPr id="36" name="TextBox 35"/>
-          <p:cNvSpPr txBox="1"/>
-          <p:nvPr/>
-        </p:nvSpPr>
-        <p:spPr>
-          <a:xfrm>
-            <a:off x="6089904" y="3694176"/>
-            <a:ext cx="1408176" cy="274320"/>
-          </a:xfrm>
-          <a:prstGeom prst="rect">
-            <a:avLst/>
-          </a:prstGeom>
-          <a:noFill/>
-        </p:spPr>
-        <p:txBody>
-          <a:bodyPr wrap="square">
-            <a:spAutoFit/>
-          </a:bodyPr>
-          <a:lstStyle/>
-          <a:p>
-            <a:pPr algn="ctr"/>
-            <a:r>
-              <a:rPr sz="750" b="0" i="0">
-                <a:solidFill>
-                  <a:srgbClr val="FFFFFF"/>
-                </a:solidFill>
-              </a:rPr>
-              <a:t>Jay / BMcD</a:t>
-            </a:r>
-          </a:p>
-        </p:txBody>
-      </p:sp>
-      <p:sp>
-        <p:nvSpPr>
-          <p:cNvPr id="37" name="Rectangle 36"/>
-          <p:cNvSpPr/>
-          <p:nvPr/>
-        </p:nvSpPr>
-        <p:spPr>
-          <a:xfrm>
-            <a:off x="228600" y="4142231"/>
-            <a:ext cx="7315200" cy="502919"/>
+            <a:off x="7150608" y="4572000"/>
+            <a:ext cx="2212848" cy="1901952"/>
           </a:xfrm>
           <a:prstGeom prst="rect">
             <a:avLst/>
@@ -4488,20 +5858,20 @@
       </p:sp>
       <p:sp>
         <p:nvSpPr>
-          <p:cNvPr id="38" name="Rectangle 37"/>
+          <p:cNvPr id="74" name="Rectangle 73"/>
           <p:cNvSpPr/>
           <p:nvPr/>
         </p:nvSpPr>
         <p:spPr>
           <a:xfrm>
-            <a:off x="256032" y="4215383"/>
-            <a:ext cx="347472" cy="347472"/>
+            <a:off x="7205472" y="4645152"/>
+            <a:ext cx="292608" cy="292608"/>
           </a:xfrm>
           <a:prstGeom prst="rect">
             <a:avLst/>
           </a:prstGeom>
           <a:solidFill>
-            <a:srgbClr val="ED7D31"/>
+            <a:srgbClr val="FFC000"/>
           </a:solidFill>
           <a:ln>
             <a:noFill/>
@@ -4531,14 +5901,14 @@
       </p:sp>
       <p:sp>
         <p:nvSpPr>
-          <p:cNvPr id="39" name="TextBox 38"/>
+          <p:cNvPr id="75" name="TextBox 74"/>
           <p:cNvSpPr txBox="1"/>
           <p:nvPr/>
         </p:nvSpPr>
         <p:spPr>
           <a:xfrm>
-            <a:off x="256032" y="4215383"/>
-            <a:ext cx="347472" cy="347472"/>
+            <a:off x="7205472" y="4645152"/>
+            <a:ext cx="292608" cy="292608"/>
           </a:xfrm>
           <a:prstGeom prst="rect">
             <a:avLst/>
@@ -4558,21 +5928,21 @@
                   <a:srgbClr val="FFFFFF"/>
                 </a:solidFill>
               </a:rPr>
-              <a:t>6️⃣</a:t>
-            </a:r>
-          </a:p>
-        </p:txBody>
-      </p:sp>
-      <p:sp>
-        <p:nvSpPr>
-          <p:cNvPr id="40" name="TextBox 39"/>
+              <a:t>🟡</a:t>
+            </a:r>
+          </a:p>
+        </p:txBody>
+      </p:sp>
+      <p:sp>
+        <p:nvSpPr>
+          <p:cNvPr id="76" name="TextBox 75"/>
           <p:cNvSpPr txBox="1"/>
           <p:nvPr/>
         </p:nvSpPr>
         <p:spPr>
           <a:xfrm>
-            <a:off x="658368" y="4178807"/>
-            <a:ext cx="5394960" cy="310896"/>
+            <a:off x="7205472" y="4974336"/>
+            <a:ext cx="2103120" cy="1444752"/>
           </a:xfrm>
           <a:prstGeom prst="rect">
             <a:avLst/>
@@ -4587,879 +5957,26 @@
           <a:p>
             <a:pPr algn="l"/>
             <a:r>
-              <a:rPr sz="950" b="0" i="0">
+              <a:rPr sz="850" b="0" i="0">
                 <a:solidFill>
                   <a:srgbClr val="1F3964"/>
                 </a:solidFill>
               </a:rPr>
-              <a:t>Hawkeye site surveys — cable &amp; SFP inventory across all Phase 2 sites</a:t>
-            </a:r>
-          </a:p>
-        </p:txBody>
-      </p:sp>
-      <p:sp>
-        <p:nvSpPr>
-          <p:cNvPr id="41" name="Rectangle 40"/>
+              <a:t>RTU serial test scheduling — DB9 cables delivered to John Ng ✅. Awaiting test date from relay team.</a:t>
+            </a:r>
+          </a:p>
+        </p:txBody>
+      </p:sp>
+      <p:sp>
+        <p:nvSpPr>
+          <p:cNvPr id="77" name="Rectangle 76"/>
           <p:cNvSpPr/>
           <p:nvPr/>
         </p:nvSpPr>
         <p:spPr>
           <a:xfrm>
-            <a:off x="6080760" y="4233671"/>
-            <a:ext cx="1417320" cy="274320"/>
-          </a:xfrm>
-          <a:prstGeom prst="rect">
-            <a:avLst/>
-          </a:prstGeom>
-          <a:solidFill>
-            <a:srgbClr val="ED7D31"/>
-          </a:solidFill>
-          <a:ln>
-            <a:noFill/>
-          </a:ln>
-        </p:spPr>
-        <p:style>
-          <a:lnRef idx="1">
-            <a:schemeClr val="accent1"/>
-          </a:lnRef>
-          <a:fillRef idx="3">
-            <a:schemeClr val="accent1"/>
-          </a:fillRef>
-          <a:effectRef idx="2">
-            <a:schemeClr val="accent1"/>
-          </a:effectRef>
-          <a:fontRef idx="minor">
-            <a:schemeClr val="lt1"/>
-          </a:fontRef>
-        </p:style>
-        <p:txBody>
-          <a:bodyPr rtlCol="0" anchor="ctr"/>
-          <a:lstStyle/>
-          <a:p>
-            <a:pPr algn="ctr"/>
-          </a:p>
-        </p:txBody>
-      </p:sp>
-      <p:sp>
-        <p:nvSpPr>
-          <p:cNvPr id="42" name="TextBox 41"/>
-          <p:cNvSpPr txBox="1"/>
-          <p:nvPr/>
-        </p:nvSpPr>
-        <p:spPr>
-          <a:xfrm>
-            <a:off x="6089904" y="4233671"/>
-            <a:ext cx="1408176" cy="274320"/>
-          </a:xfrm>
-          <a:prstGeom prst="rect">
-            <a:avLst/>
-          </a:prstGeom>
-          <a:noFill/>
-        </p:spPr>
-        <p:txBody>
-          <a:bodyPr wrap="square">
-            <a:spAutoFit/>
-          </a:bodyPr>
-          <a:lstStyle/>
-          <a:p>
-            <a:pPr algn="ctr"/>
-            <a:r>
-              <a:rPr sz="750" b="0" i="0">
-                <a:solidFill>
-                  <a:srgbClr val="FFFFFF"/>
-                </a:solidFill>
-              </a:rPr>
-              <a:t>Vinny / Hawkeye</a:t>
-            </a:r>
-          </a:p>
-        </p:txBody>
-      </p:sp>
-      <p:sp>
-        <p:nvSpPr>
-          <p:cNvPr id="43" name="Rectangle 42"/>
-          <p:cNvSpPr/>
-          <p:nvPr/>
-        </p:nvSpPr>
-        <p:spPr>
-          <a:xfrm>
-            <a:off x="228600" y="4681728"/>
-            <a:ext cx="7315200" cy="502919"/>
-          </a:xfrm>
-          <a:prstGeom prst="rect">
-            <a:avLst/>
-          </a:prstGeom>
-          <a:solidFill>
-            <a:srgbClr val="F2F2F2"/>
-          </a:solidFill>
-          <a:ln>
-            <a:solidFill>
-              <a:srgbClr val="D0D0D0"/>
-            </a:solidFill>
-          </a:ln>
-        </p:spPr>
-        <p:style>
-          <a:lnRef idx="1">
-            <a:schemeClr val="accent1"/>
-          </a:lnRef>
-          <a:fillRef idx="3">
-            <a:schemeClr val="accent1"/>
-          </a:fillRef>
-          <a:effectRef idx="2">
-            <a:schemeClr val="accent1"/>
-          </a:effectRef>
-          <a:fontRef idx="minor">
-            <a:schemeClr val="lt1"/>
-          </a:fontRef>
-        </p:style>
-        <p:txBody>
-          <a:bodyPr rtlCol="0" anchor="ctr"/>
-          <a:lstStyle/>
-          <a:p>
-            <a:pPr algn="ctr"/>
-          </a:p>
-        </p:txBody>
-      </p:sp>
-      <p:sp>
-        <p:nvSpPr>
-          <p:cNvPr id="44" name="Rectangle 43"/>
-          <p:cNvSpPr/>
-          <p:nvPr/>
-        </p:nvSpPr>
-        <p:spPr>
-          <a:xfrm>
-            <a:off x="256032" y="4754880"/>
-            <a:ext cx="347472" cy="347472"/>
-          </a:xfrm>
-          <a:prstGeom prst="rect">
-            <a:avLst/>
-          </a:prstGeom>
-          <a:solidFill>
-            <a:srgbClr val="2E74B5"/>
-          </a:solidFill>
-          <a:ln>
-            <a:noFill/>
-          </a:ln>
-        </p:spPr>
-        <p:style>
-          <a:lnRef idx="1">
-            <a:schemeClr val="accent1"/>
-          </a:lnRef>
-          <a:fillRef idx="3">
-            <a:schemeClr val="accent1"/>
-          </a:fillRef>
-          <a:effectRef idx="2">
-            <a:schemeClr val="accent1"/>
-          </a:effectRef>
-          <a:fontRef idx="minor">
-            <a:schemeClr val="lt1"/>
-          </a:fontRef>
-        </p:style>
-        <p:txBody>
-          <a:bodyPr rtlCol="0" anchor="ctr"/>
-          <a:lstStyle/>
-          <a:p>
-            <a:pPr algn="ctr"/>
-          </a:p>
-        </p:txBody>
-      </p:sp>
-      <p:sp>
-        <p:nvSpPr>
-          <p:cNvPr id="45" name="TextBox 44"/>
-          <p:cNvSpPr txBox="1"/>
-          <p:nvPr/>
-        </p:nvSpPr>
-        <p:spPr>
-          <a:xfrm>
-            <a:off x="256032" y="4754880"/>
-            <a:ext cx="347472" cy="347472"/>
-          </a:xfrm>
-          <a:prstGeom prst="rect">
-            <a:avLst/>
-          </a:prstGeom>
-          <a:noFill/>
-        </p:spPr>
-        <p:txBody>
-          <a:bodyPr wrap="square">
-            <a:spAutoFit/>
-          </a:bodyPr>
-          <a:lstStyle/>
-          <a:p>
-            <a:pPr algn="ctr"/>
-            <a:r>
-              <a:rPr sz="900" b="1" i="0">
-                <a:solidFill>
-                  <a:srgbClr val="FFFFFF"/>
-                </a:solidFill>
-              </a:rPr>
-              <a:t>7️⃣</a:t>
-            </a:r>
-          </a:p>
-        </p:txBody>
-      </p:sp>
-      <p:sp>
-        <p:nvSpPr>
-          <p:cNvPr id="46" name="TextBox 45"/>
-          <p:cNvSpPr txBox="1"/>
-          <p:nvPr/>
-        </p:nvSpPr>
-        <p:spPr>
-          <a:xfrm>
-            <a:off x="658368" y="4718304"/>
-            <a:ext cx="5394960" cy="310896"/>
-          </a:xfrm>
-          <a:prstGeom prst="rect">
-            <a:avLst/>
-          </a:prstGeom>
-          <a:noFill/>
-        </p:spPr>
-        <p:txBody>
-          <a:bodyPr wrap="square">
-            <a:spAutoFit/>
-          </a:bodyPr>
-          <a:lstStyle/>
-          <a:p>
-            <a:pPr algn="l"/>
-            <a:r>
-              <a:rPr sz="950" b="0" i="0">
-                <a:solidFill>
-                  <a:srgbClr val="1F3964"/>
-                </a:solidFill>
-              </a:rPr>
-              <a:t>Confirm Nokia training dates with Glenn — identify attendees &amp; syllabus</a:t>
-            </a:r>
-          </a:p>
-        </p:txBody>
-      </p:sp>
-      <p:sp>
-        <p:nvSpPr>
-          <p:cNvPr id="47" name="Rectangle 46"/>
-          <p:cNvSpPr/>
-          <p:nvPr/>
-        </p:nvSpPr>
-        <p:spPr>
-          <a:xfrm>
-            <a:off x="6080760" y="4773168"/>
-            <a:ext cx="1417320" cy="274320"/>
-          </a:xfrm>
-          <a:prstGeom prst="rect">
-            <a:avLst/>
-          </a:prstGeom>
-          <a:solidFill>
-            <a:srgbClr val="2E74B5"/>
-          </a:solidFill>
-          <a:ln>
-            <a:noFill/>
-          </a:ln>
-        </p:spPr>
-        <p:style>
-          <a:lnRef idx="1">
-            <a:schemeClr val="accent1"/>
-          </a:lnRef>
-          <a:fillRef idx="3">
-            <a:schemeClr val="accent1"/>
-          </a:fillRef>
-          <a:effectRef idx="2">
-            <a:schemeClr val="accent1"/>
-          </a:effectRef>
-          <a:fontRef idx="minor">
-            <a:schemeClr val="lt1"/>
-          </a:fontRef>
-        </p:style>
-        <p:txBody>
-          <a:bodyPr rtlCol="0" anchor="ctr"/>
-          <a:lstStyle/>
-          <a:p>
-            <a:pPr algn="ctr"/>
-          </a:p>
-        </p:txBody>
-      </p:sp>
-      <p:sp>
-        <p:nvSpPr>
-          <p:cNvPr id="48" name="TextBox 47"/>
-          <p:cNvSpPr txBox="1"/>
-          <p:nvPr/>
-        </p:nvSpPr>
-        <p:spPr>
-          <a:xfrm>
-            <a:off x="6089904" y="4773168"/>
-            <a:ext cx="1408176" cy="274320"/>
-          </a:xfrm>
-          <a:prstGeom prst="rect">
-            <a:avLst/>
-          </a:prstGeom>
-          <a:noFill/>
-        </p:spPr>
-        <p:txBody>
-          <a:bodyPr wrap="square">
-            <a:spAutoFit/>
-          </a:bodyPr>
-          <a:lstStyle/>
-          <a:p>
-            <a:pPr algn="ctr"/>
-            <a:r>
-              <a:rPr sz="750" b="0" i="0">
-                <a:solidFill>
-                  <a:srgbClr val="FFFFFF"/>
-                </a:solidFill>
-              </a:rPr>
-              <a:t>Jay</a:t>
-            </a:r>
-          </a:p>
-        </p:txBody>
-      </p:sp>
-      <p:sp>
-        <p:nvSpPr>
-          <p:cNvPr id="49" name="Rectangle 48"/>
-          <p:cNvSpPr/>
-          <p:nvPr/>
-        </p:nvSpPr>
-        <p:spPr>
-          <a:xfrm>
-            <a:off x="228600" y="5221224"/>
-            <a:ext cx="7315200" cy="502919"/>
-          </a:xfrm>
-          <a:prstGeom prst="rect">
-            <a:avLst/>
-          </a:prstGeom>
-          <a:solidFill>
-            <a:srgbClr val="FFE0E0"/>
-          </a:solidFill>
-          <a:ln>
-            <a:solidFill>
-              <a:srgbClr val="D0D0D0"/>
-            </a:solidFill>
-          </a:ln>
-        </p:spPr>
-        <p:style>
-          <a:lnRef idx="1">
-            <a:schemeClr val="accent1"/>
-          </a:lnRef>
-          <a:fillRef idx="3">
-            <a:schemeClr val="accent1"/>
-          </a:fillRef>
-          <a:effectRef idx="2">
-            <a:schemeClr val="accent1"/>
-          </a:effectRef>
-          <a:fontRef idx="minor">
-            <a:schemeClr val="lt1"/>
-          </a:fontRef>
-        </p:style>
-        <p:txBody>
-          <a:bodyPr rtlCol="0" anchor="ctr"/>
-          <a:lstStyle/>
-          <a:p>
-            <a:pPr algn="ctr"/>
-          </a:p>
-        </p:txBody>
-      </p:sp>
-      <p:sp>
-        <p:nvSpPr>
-          <p:cNvPr id="50" name="Rectangle 49"/>
-          <p:cNvSpPr/>
-          <p:nvPr/>
-        </p:nvSpPr>
-        <p:spPr>
-          <a:xfrm>
-            <a:off x="256032" y="5294376"/>
-            <a:ext cx="347472" cy="347472"/>
-          </a:xfrm>
-          <a:prstGeom prst="rect">
-            <a:avLst/>
-          </a:prstGeom>
-          <a:solidFill>
-            <a:srgbClr val="C00000"/>
-          </a:solidFill>
-          <a:ln>
-            <a:noFill/>
-          </a:ln>
-        </p:spPr>
-        <p:style>
-          <a:lnRef idx="1">
-            <a:schemeClr val="accent1"/>
-          </a:lnRef>
-          <a:fillRef idx="3">
-            <a:schemeClr val="accent1"/>
-          </a:fillRef>
-          <a:effectRef idx="2">
-            <a:schemeClr val="accent1"/>
-          </a:effectRef>
-          <a:fontRef idx="minor">
-            <a:schemeClr val="lt1"/>
-          </a:fontRef>
-        </p:style>
-        <p:txBody>
-          <a:bodyPr rtlCol="0" anchor="ctr"/>
-          <a:lstStyle/>
-          <a:p>
-            <a:pPr algn="ctr"/>
-          </a:p>
-        </p:txBody>
-      </p:sp>
-      <p:sp>
-        <p:nvSpPr>
-          <p:cNvPr id="51" name="TextBox 50"/>
-          <p:cNvSpPr txBox="1"/>
-          <p:nvPr/>
-        </p:nvSpPr>
-        <p:spPr>
-          <a:xfrm>
-            <a:off x="256032" y="5294376"/>
-            <a:ext cx="347472" cy="347472"/>
-          </a:xfrm>
-          <a:prstGeom prst="rect">
-            <a:avLst/>
-          </a:prstGeom>
-          <a:noFill/>
-        </p:spPr>
-        <p:txBody>
-          <a:bodyPr wrap="square">
-            <a:spAutoFit/>
-          </a:bodyPr>
-          <a:lstStyle/>
-          <a:p>
-            <a:pPr algn="ctr"/>
-            <a:r>
-              <a:rPr sz="900" b="1" i="0">
-                <a:solidFill>
-                  <a:srgbClr val="FFFFFF"/>
-                </a:solidFill>
-              </a:rPr>
-              <a:t>8️⃣</a:t>
-            </a:r>
-          </a:p>
-        </p:txBody>
-      </p:sp>
-      <p:sp>
-        <p:nvSpPr>
-          <p:cNvPr id="52" name="TextBox 51"/>
-          <p:cNvSpPr txBox="1"/>
-          <p:nvPr/>
-        </p:nvSpPr>
-        <p:spPr>
-          <a:xfrm>
-            <a:off x="658368" y="5257800"/>
-            <a:ext cx="5394960" cy="310896"/>
-          </a:xfrm>
-          <a:prstGeom prst="rect">
-            <a:avLst/>
-          </a:prstGeom>
-          <a:noFill/>
-        </p:spPr>
-        <p:txBody>
-          <a:bodyPr wrap="square">
-            <a:spAutoFit/>
-          </a:bodyPr>
-          <a:lstStyle/>
-          <a:p>
-            <a:pPr algn="l"/>
-            <a:r>
-              <a:rPr sz="950" b="1" i="0">
-                <a:solidFill>
-                  <a:srgbClr val="1F3964"/>
-                </a:solidFill>
-              </a:rPr>
-              <a:t>Lindenhurst IFR submission — due Monday April 27  ⚠️ IMMINENT</a:t>
-            </a:r>
-          </a:p>
-        </p:txBody>
-      </p:sp>
-      <p:sp>
-        <p:nvSpPr>
-          <p:cNvPr id="53" name="Rectangle 52"/>
-          <p:cNvSpPr/>
-          <p:nvPr/>
-        </p:nvSpPr>
-        <p:spPr>
-          <a:xfrm>
-            <a:off x="6080760" y="5312664"/>
-            <a:ext cx="1417320" cy="274320"/>
-          </a:xfrm>
-          <a:prstGeom prst="rect">
-            <a:avLst/>
-          </a:prstGeom>
-          <a:solidFill>
-            <a:srgbClr val="C00000"/>
-          </a:solidFill>
-          <a:ln>
-            <a:noFill/>
-          </a:ln>
-        </p:spPr>
-        <p:style>
-          <a:lnRef idx="1">
-            <a:schemeClr val="accent1"/>
-          </a:lnRef>
-          <a:fillRef idx="3">
-            <a:schemeClr val="accent1"/>
-          </a:fillRef>
-          <a:effectRef idx="2">
-            <a:schemeClr val="accent1"/>
-          </a:effectRef>
-          <a:fontRef idx="minor">
-            <a:schemeClr val="lt1"/>
-          </a:fontRef>
-        </p:style>
-        <p:txBody>
-          <a:bodyPr rtlCol="0" anchor="ctr"/>
-          <a:lstStyle/>
-          <a:p>
-            <a:pPr algn="ctr"/>
-          </a:p>
-        </p:txBody>
-      </p:sp>
-      <p:sp>
-        <p:nvSpPr>
-          <p:cNvPr id="54" name="TextBox 53"/>
-          <p:cNvSpPr txBox="1"/>
-          <p:nvPr/>
-        </p:nvSpPr>
-        <p:spPr>
-          <a:xfrm>
-            <a:off x="6089904" y="5312664"/>
-            <a:ext cx="1408176" cy="274320"/>
-          </a:xfrm>
-          <a:prstGeom prst="rect">
-            <a:avLst/>
-          </a:prstGeom>
-          <a:noFill/>
-        </p:spPr>
-        <p:txBody>
-          <a:bodyPr wrap="square">
-            <a:spAutoFit/>
-          </a:bodyPr>
-          <a:lstStyle/>
-          <a:p>
-            <a:pPr algn="ctr"/>
-            <a:r>
-              <a:rPr sz="750" b="0" i="0">
-                <a:solidFill>
-                  <a:srgbClr val="FFFFFF"/>
-                </a:solidFill>
-              </a:rPr>
-              <a:t>Burns &amp; McDonnell</a:t>
-            </a:r>
-          </a:p>
-        </p:txBody>
-      </p:sp>
-      <p:sp>
-        <p:nvSpPr>
-          <p:cNvPr id="55" name="Rectangle 54"/>
-          <p:cNvSpPr/>
-          <p:nvPr/>
-        </p:nvSpPr>
-        <p:spPr>
-          <a:xfrm>
-            <a:off x="228600" y="5760720"/>
-            <a:ext cx="7315200" cy="502919"/>
-          </a:xfrm>
-          <a:prstGeom prst="rect">
-            <a:avLst/>
-          </a:prstGeom>
-          <a:solidFill>
-            <a:srgbClr val="FFE0E0"/>
-          </a:solidFill>
-          <a:ln>
-            <a:solidFill>
-              <a:srgbClr val="D0D0D0"/>
-            </a:solidFill>
-          </a:ln>
-        </p:spPr>
-        <p:style>
-          <a:lnRef idx="1">
-            <a:schemeClr val="accent1"/>
-          </a:lnRef>
-          <a:fillRef idx="3">
-            <a:schemeClr val="accent1"/>
-          </a:fillRef>
-          <a:effectRef idx="2">
-            <a:schemeClr val="accent1"/>
-          </a:effectRef>
-          <a:fontRef idx="minor">
-            <a:schemeClr val="lt1"/>
-          </a:fontRef>
-        </p:style>
-        <p:txBody>
-          <a:bodyPr rtlCol="0" anchor="ctr"/>
-          <a:lstStyle/>
-          <a:p>
-            <a:pPr algn="ctr"/>
-          </a:p>
-        </p:txBody>
-      </p:sp>
-      <p:sp>
-        <p:nvSpPr>
-          <p:cNvPr id="56" name="Rectangle 55"/>
-          <p:cNvSpPr/>
-          <p:nvPr/>
-        </p:nvSpPr>
-        <p:spPr>
-          <a:xfrm>
-            <a:off x="256032" y="5833872"/>
-            <a:ext cx="347472" cy="347472"/>
-          </a:xfrm>
-          <a:prstGeom prst="rect">
-            <a:avLst/>
-          </a:prstGeom>
-          <a:solidFill>
-            <a:srgbClr val="C00000"/>
-          </a:solidFill>
-          <a:ln>
-            <a:noFill/>
-          </a:ln>
-        </p:spPr>
-        <p:style>
-          <a:lnRef idx="1">
-            <a:schemeClr val="accent1"/>
-          </a:lnRef>
-          <a:fillRef idx="3">
-            <a:schemeClr val="accent1"/>
-          </a:fillRef>
-          <a:effectRef idx="2">
-            <a:schemeClr val="accent1"/>
-          </a:effectRef>
-          <a:fontRef idx="minor">
-            <a:schemeClr val="lt1"/>
-          </a:fontRef>
-        </p:style>
-        <p:txBody>
-          <a:bodyPr rtlCol="0" anchor="ctr"/>
-          <a:lstStyle/>
-          <a:p>
-            <a:pPr algn="ctr"/>
-          </a:p>
-        </p:txBody>
-      </p:sp>
-      <p:sp>
-        <p:nvSpPr>
-          <p:cNvPr id="57" name="TextBox 56"/>
-          <p:cNvSpPr txBox="1"/>
-          <p:nvPr/>
-        </p:nvSpPr>
-        <p:spPr>
-          <a:xfrm>
-            <a:off x="256032" y="5833872"/>
-            <a:ext cx="347472" cy="347472"/>
-          </a:xfrm>
-          <a:prstGeom prst="rect">
-            <a:avLst/>
-          </a:prstGeom>
-          <a:noFill/>
-        </p:spPr>
-        <p:txBody>
-          <a:bodyPr wrap="square">
-            <a:spAutoFit/>
-          </a:bodyPr>
-          <a:lstStyle/>
-          <a:p>
-            <a:pPr algn="ctr"/>
-            <a:r>
-              <a:rPr sz="900" b="1" i="0">
-                <a:solidFill>
-                  <a:srgbClr val="FFFFFF"/>
-                </a:solidFill>
-              </a:rPr>
-              <a:t>9️⃣</a:t>
-            </a:r>
-          </a:p>
-        </p:txBody>
-      </p:sp>
-      <p:sp>
-        <p:nvSpPr>
-          <p:cNvPr id="58" name="TextBox 57"/>
-          <p:cNvSpPr txBox="1"/>
-          <p:nvPr/>
-        </p:nvSpPr>
-        <p:spPr>
-          <a:xfrm>
-            <a:off x="658368" y="5797296"/>
-            <a:ext cx="5394960" cy="310896"/>
-          </a:xfrm>
-          <a:prstGeom prst="rect">
-            <a:avLst/>
-          </a:prstGeom>
-          <a:noFill/>
-        </p:spPr>
-        <p:txBody>
-          <a:bodyPr wrap="square">
-            <a:spAutoFit/>
-          </a:bodyPr>
-          <a:lstStyle/>
-          <a:p>
-            <a:pPr algn="l"/>
-            <a:r>
-              <a:rPr sz="950" b="0" i="0">
-                <a:solidFill>
-                  <a:srgbClr val="1F3964"/>
-                </a:solidFill>
-              </a:rPr>
-              <a:t>Reconcile PAR relay labor ($495K) forecast with Chad — spread across months</a:t>
-            </a:r>
-          </a:p>
-        </p:txBody>
-      </p:sp>
-      <p:sp>
-        <p:nvSpPr>
-          <p:cNvPr id="59" name="Rectangle 58"/>
-          <p:cNvSpPr/>
-          <p:nvPr/>
-        </p:nvSpPr>
-        <p:spPr>
-          <a:xfrm>
-            <a:off x="6080760" y="5852159"/>
-            <a:ext cx="1417320" cy="274320"/>
-          </a:xfrm>
-          <a:prstGeom prst="rect">
-            <a:avLst/>
-          </a:prstGeom>
-          <a:solidFill>
-            <a:srgbClr val="C00000"/>
-          </a:solidFill>
-          <a:ln>
-            <a:noFill/>
-          </a:ln>
-        </p:spPr>
-        <p:style>
-          <a:lnRef idx="1">
-            <a:schemeClr val="accent1"/>
-          </a:lnRef>
-          <a:fillRef idx="3">
-            <a:schemeClr val="accent1"/>
-          </a:fillRef>
-          <a:effectRef idx="2">
-            <a:schemeClr val="accent1"/>
-          </a:effectRef>
-          <a:fontRef idx="minor">
-            <a:schemeClr val="lt1"/>
-          </a:fontRef>
-        </p:style>
-        <p:txBody>
-          <a:bodyPr rtlCol="0" anchor="ctr"/>
-          <a:lstStyle/>
-          <a:p>
-            <a:pPr algn="ctr"/>
-          </a:p>
-        </p:txBody>
-      </p:sp>
-      <p:sp>
-        <p:nvSpPr>
-          <p:cNvPr id="60" name="TextBox 59"/>
-          <p:cNvSpPr txBox="1"/>
-          <p:nvPr/>
-        </p:nvSpPr>
-        <p:spPr>
-          <a:xfrm>
-            <a:off x="6089904" y="5852159"/>
-            <a:ext cx="1408176" cy="274320"/>
-          </a:xfrm>
-          <a:prstGeom prst="rect">
-            <a:avLst/>
-          </a:prstGeom>
-          <a:noFill/>
-        </p:spPr>
-        <p:txBody>
-          <a:bodyPr wrap="square">
-            <a:spAutoFit/>
-          </a:bodyPr>
-          <a:lstStyle/>
-          <a:p>
-            <a:pPr algn="ctr"/>
-            <a:r>
-              <a:rPr sz="750" b="0" i="0">
-                <a:solidFill>
-                  <a:srgbClr val="FFFFFF"/>
-                </a:solidFill>
-              </a:rPr>
-              <a:t>Jay / Chad</a:t>
-            </a:r>
-          </a:p>
-        </p:txBody>
-      </p:sp>
-      <p:sp>
-        <p:nvSpPr>
-          <p:cNvPr id="61" name="Rectangle 60"/>
-          <p:cNvSpPr/>
-          <p:nvPr/>
-        </p:nvSpPr>
-        <p:spPr>
-          <a:xfrm>
-            <a:off x="7726679" y="1097280"/>
-            <a:ext cx="4233672" cy="329184"/>
-          </a:xfrm>
-          <a:prstGeom prst="rect">
-            <a:avLst/>
-          </a:prstGeom>
-          <a:solidFill>
-            <a:srgbClr val="ED7D31"/>
-          </a:solidFill>
-          <a:ln>
-            <a:noFill/>
-          </a:ln>
-        </p:spPr>
-        <p:style>
-          <a:lnRef idx="1">
-            <a:schemeClr val="accent1"/>
-          </a:lnRef>
-          <a:fillRef idx="3">
-            <a:schemeClr val="accent1"/>
-          </a:fillRef>
-          <a:effectRef idx="2">
-            <a:schemeClr val="accent1"/>
-          </a:effectRef>
-          <a:fontRef idx="minor">
-            <a:schemeClr val="lt1"/>
-          </a:fontRef>
-        </p:style>
-        <p:txBody>
-          <a:bodyPr rtlCol="0" anchor="ctr"/>
-          <a:lstStyle/>
-          <a:p>
-            <a:pPr algn="ctr"/>
-          </a:p>
-        </p:txBody>
-      </p:sp>
-      <p:sp>
-        <p:nvSpPr>
-          <p:cNvPr id="62" name="TextBox 61"/>
-          <p:cNvSpPr txBox="1"/>
-          <p:nvPr/>
-        </p:nvSpPr>
-        <p:spPr>
-          <a:xfrm>
-            <a:off x="7726679" y="1097280"/>
-            <a:ext cx="4233672" cy="329184"/>
-          </a:xfrm>
-          <a:prstGeom prst="rect">
-            <a:avLst/>
-          </a:prstGeom>
-          <a:noFill/>
-        </p:spPr>
-        <p:txBody>
-          <a:bodyPr wrap="square">
-            <a:spAutoFit/>
-          </a:bodyPr>
-          <a:lstStyle/>
-          <a:p>
-            <a:pPr algn="l"/>
-            <a:r>
-              <a:rPr sz="1050" b="1" i="0">
-                <a:solidFill>
-                  <a:srgbClr val="FFFFFF"/>
-                </a:solidFill>
-              </a:rPr>
-              <a:t>  ⚠️  CURRENT RISKS</a:t>
-            </a:r>
-          </a:p>
-        </p:txBody>
-      </p:sp>
-      <p:sp>
-        <p:nvSpPr>
-          <p:cNvPr id="63" name="Rectangle 62"/>
-          <p:cNvSpPr/>
-          <p:nvPr/>
-        </p:nvSpPr>
-        <p:spPr>
-          <a:xfrm>
-            <a:off x="7726679" y="1444752"/>
-            <a:ext cx="4233672" cy="1499616"/>
+            <a:off x="9436608" y="4572000"/>
+            <a:ext cx="2212848" cy="1901952"/>
           </a:xfrm>
           <a:prstGeom prst="rect">
             <a:avLst/>
@@ -5497,14 +6014,14 @@
       </p:sp>
       <p:sp>
         <p:nvSpPr>
-          <p:cNvPr id="64" name="Rectangle 63"/>
+          <p:cNvPr id="78" name="Rectangle 77"/>
           <p:cNvSpPr/>
           <p:nvPr/>
         </p:nvSpPr>
         <p:spPr>
           <a:xfrm>
-            <a:off x="7754112" y="1554480"/>
-            <a:ext cx="320040" cy="320040"/>
+            <a:off x="9491472" y="4645152"/>
+            <a:ext cx="292608" cy="292608"/>
           </a:xfrm>
           <a:prstGeom prst="rect">
             <a:avLst/>
@@ -5540,14 +6057,14 @@
       </p:sp>
       <p:sp>
         <p:nvSpPr>
-          <p:cNvPr id="65" name="TextBox 64"/>
+          <p:cNvPr id="79" name="TextBox 78"/>
           <p:cNvSpPr txBox="1"/>
           <p:nvPr/>
         </p:nvSpPr>
         <p:spPr>
           <a:xfrm>
-            <a:off x="7754112" y="1554480"/>
-            <a:ext cx="320040" cy="320040"/>
+            <a:off x="9491472" y="4645152"/>
+            <a:ext cx="292608" cy="292608"/>
           </a:xfrm>
           <a:prstGeom prst="rect">
             <a:avLst/>
@@ -5562,7 +6079,7 @@
           <a:p>
             <a:pPr algn="ctr"/>
             <a:r>
-              <a:rPr sz="1000" b="1" i="0">
+              <a:rPr sz="900" b="1" i="0">
                 <a:solidFill>
                   <a:srgbClr val="FFFFFF"/>
                 </a:solidFill>
@@ -5574,14 +6091,14 @@
       </p:sp>
       <p:sp>
         <p:nvSpPr>
-          <p:cNvPr id="66" name="TextBox 65"/>
+          <p:cNvPr id="80" name="TextBox 79"/>
           <p:cNvSpPr txBox="1"/>
           <p:nvPr/>
         </p:nvSpPr>
         <p:spPr>
           <a:xfrm>
-            <a:off x="8119872" y="1517904"/>
-            <a:ext cx="3749039" cy="292608"/>
+            <a:off x="9491472" y="4974336"/>
+            <a:ext cx="2103120" cy="1444752"/>
           </a:xfrm>
           <a:prstGeom prst="rect">
             <a:avLst/>
@@ -5596,433 +6113,19 @@
           <a:p>
             <a:pPr algn="l"/>
             <a:r>
-              <a:rPr sz="1000" b="1" i="0">
+              <a:rPr sz="850" b="0" i="0">
                 <a:solidFill>
                   <a:srgbClr val="1F3964"/>
                 </a:solidFill>
               </a:rPr>
-              <a:t>DNS Update</a:t>
-            </a:r>
-          </a:p>
-        </p:txBody>
-      </p:sp>
-      <p:sp>
-        <p:nvSpPr>
-          <p:cNvPr id="67" name="TextBox 66"/>
-          <p:cNvSpPr txBox="1"/>
-          <p:nvPr/>
-        </p:nvSpPr>
-        <p:spPr>
-          <a:xfrm>
-            <a:off x="8119872" y="1792224"/>
-            <a:ext cx="3749039" cy="1005840"/>
-          </a:xfrm>
-          <a:prstGeom prst="rect">
-            <a:avLst/>
-          </a:prstGeom>
-          <a:noFill/>
-        </p:spPr>
-        <p:txBody>
-          <a:bodyPr wrap="square">
-            <a:spAutoFit/>
-          </a:bodyPr>
-          <a:lstStyle/>
-          <a:p>
-            <a:pPr algn="l"/>
-            <a:r>
-              <a:rPr sz="900" b="0" i="0">
-                <a:solidFill>
-                  <a:srgbClr val="404040"/>
-                </a:solidFill>
-              </a:rPr>
-              <a:t>NSP installed 4/21, status being confirmed. DNS fix escalated to Vic.</a:t>
-            </a:r>
-          </a:p>
-        </p:txBody>
-      </p:sp>
-      <p:sp>
-        <p:nvSpPr>
-          <p:cNvPr id="68" name="Rectangle 67"/>
-          <p:cNvSpPr/>
-          <p:nvPr/>
-        </p:nvSpPr>
-        <p:spPr>
-          <a:xfrm>
-            <a:off x="7726679" y="2999232"/>
-            <a:ext cx="4233672" cy="1499616"/>
-          </a:xfrm>
-          <a:prstGeom prst="rect">
-            <a:avLst/>
-          </a:prstGeom>
-          <a:solidFill>
-            <a:srgbClr val="FFF2CC"/>
-          </a:solidFill>
-          <a:ln>
-            <a:solidFill>
-              <a:srgbClr val="D0D0D0"/>
-            </a:solidFill>
-          </a:ln>
-        </p:spPr>
-        <p:style>
-          <a:lnRef idx="1">
-            <a:schemeClr val="accent1"/>
-          </a:lnRef>
-          <a:fillRef idx="3">
-            <a:schemeClr val="accent1"/>
-          </a:fillRef>
-          <a:effectRef idx="2">
-            <a:schemeClr val="accent1"/>
-          </a:effectRef>
-          <a:fontRef idx="minor">
-            <a:schemeClr val="lt1"/>
-          </a:fontRef>
-        </p:style>
-        <p:txBody>
-          <a:bodyPr rtlCol="0" anchor="ctr"/>
-          <a:lstStyle/>
-          <a:p>
-            <a:pPr algn="ctr"/>
-          </a:p>
-        </p:txBody>
-      </p:sp>
-      <p:sp>
-        <p:nvSpPr>
-          <p:cNvPr id="69" name="Rectangle 68"/>
-          <p:cNvSpPr/>
-          <p:nvPr/>
-        </p:nvSpPr>
-        <p:spPr>
-          <a:xfrm>
-            <a:off x="7754112" y="3108960"/>
-            <a:ext cx="320040" cy="320040"/>
-          </a:xfrm>
-          <a:prstGeom prst="rect">
-            <a:avLst/>
-          </a:prstGeom>
-          <a:solidFill>
-            <a:srgbClr val="FFC000"/>
-          </a:solidFill>
-          <a:ln>
-            <a:noFill/>
-          </a:ln>
-        </p:spPr>
-        <p:style>
-          <a:lnRef idx="1">
-            <a:schemeClr val="accent1"/>
-          </a:lnRef>
-          <a:fillRef idx="3">
-            <a:schemeClr val="accent1"/>
-          </a:fillRef>
-          <a:effectRef idx="2">
-            <a:schemeClr val="accent1"/>
-          </a:effectRef>
-          <a:fontRef idx="minor">
-            <a:schemeClr val="lt1"/>
-          </a:fontRef>
-        </p:style>
-        <p:txBody>
-          <a:bodyPr rtlCol="0" anchor="ctr"/>
-          <a:lstStyle/>
-          <a:p>
-            <a:pPr algn="ctr"/>
-          </a:p>
-        </p:txBody>
-      </p:sp>
-      <p:sp>
-        <p:nvSpPr>
-          <p:cNvPr id="70" name="TextBox 69"/>
-          <p:cNvSpPr txBox="1"/>
-          <p:nvPr/>
-        </p:nvSpPr>
-        <p:spPr>
-          <a:xfrm>
-            <a:off x="7754112" y="3108960"/>
-            <a:ext cx="320040" cy="320040"/>
-          </a:xfrm>
-          <a:prstGeom prst="rect">
-            <a:avLst/>
-          </a:prstGeom>
-          <a:noFill/>
-        </p:spPr>
-        <p:txBody>
-          <a:bodyPr wrap="square">
-            <a:spAutoFit/>
-          </a:bodyPr>
-          <a:lstStyle/>
-          <a:p>
-            <a:pPr algn="ctr"/>
-            <a:r>
-              <a:rPr sz="1000" b="1" i="0">
-                <a:solidFill>
-                  <a:srgbClr val="FFFFFF"/>
-                </a:solidFill>
-              </a:rPr>
-              <a:t>🟡</a:t>
-            </a:r>
-          </a:p>
-        </p:txBody>
-      </p:sp>
-      <p:sp>
-        <p:nvSpPr>
-          <p:cNvPr id="71" name="TextBox 70"/>
-          <p:cNvSpPr txBox="1"/>
-          <p:nvPr/>
-        </p:nvSpPr>
-        <p:spPr>
-          <a:xfrm>
-            <a:off x="8119872" y="3072384"/>
-            <a:ext cx="3749039" cy="292608"/>
-          </a:xfrm>
-          <a:prstGeom prst="rect">
-            <a:avLst/>
-          </a:prstGeom>
-          <a:noFill/>
-        </p:spPr>
-        <p:txBody>
-          <a:bodyPr wrap="square">
-            <a:spAutoFit/>
-          </a:bodyPr>
-          <a:lstStyle/>
-          <a:p>
-            <a:pPr algn="l"/>
-            <a:r>
-              <a:rPr sz="1000" b="1" i="0">
-                <a:solidFill>
-                  <a:srgbClr val="1F3964"/>
-                </a:solidFill>
-              </a:rPr>
-              <a:t>Weather Delays</a:t>
-            </a:r>
-          </a:p>
-        </p:txBody>
-      </p:sp>
-      <p:sp>
-        <p:nvSpPr>
-          <p:cNvPr id="72" name="TextBox 71"/>
-          <p:cNvSpPr txBox="1"/>
-          <p:nvPr/>
-        </p:nvSpPr>
-        <p:spPr>
-          <a:xfrm>
-            <a:off x="8119872" y="3346704"/>
-            <a:ext cx="3749039" cy="1005840"/>
-          </a:xfrm>
-          <a:prstGeom prst="rect">
-            <a:avLst/>
-          </a:prstGeom>
-          <a:noFill/>
-        </p:spPr>
-        <p:txBody>
-          <a:bodyPr wrap="square">
-            <a:spAutoFit/>
-          </a:bodyPr>
-          <a:lstStyle/>
-          <a:p>
-            <a:pPr algn="l"/>
-            <a:r>
-              <a:rPr sz="900" b="0" i="0">
-                <a:solidFill>
-                  <a:srgbClr val="404040"/>
-                </a:solidFill>
-              </a:rPr>
-              <a:t>Substation closures possible at temps &gt;90°F. Potential 2-week delay per event. Risk — not yet an issue. Monitor summer forecast. Schedule critical work in cooler windows.</a:t>
-            </a:r>
-          </a:p>
-        </p:txBody>
-      </p:sp>
-      <p:sp>
-        <p:nvSpPr>
-          <p:cNvPr id="73" name="Rectangle 72"/>
-          <p:cNvSpPr/>
-          <p:nvPr/>
-        </p:nvSpPr>
-        <p:spPr>
-          <a:xfrm>
-            <a:off x="7726679" y="4553712"/>
-            <a:ext cx="4233672" cy="1499616"/>
-          </a:xfrm>
-          <a:prstGeom prst="rect">
-            <a:avLst/>
-          </a:prstGeom>
-          <a:solidFill>
-            <a:srgbClr val="FFF2CC"/>
-          </a:solidFill>
-          <a:ln>
-            <a:solidFill>
-              <a:srgbClr val="D0D0D0"/>
-            </a:solidFill>
-          </a:ln>
-        </p:spPr>
-        <p:style>
-          <a:lnRef idx="1">
-            <a:schemeClr val="accent1"/>
-          </a:lnRef>
-          <a:fillRef idx="3">
-            <a:schemeClr val="accent1"/>
-          </a:fillRef>
-          <a:effectRef idx="2">
-            <a:schemeClr val="accent1"/>
-          </a:effectRef>
-          <a:fontRef idx="minor">
-            <a:schemeClr val="lt1"/>
-          </a:fontRef>
-        </p:style>
-        <p:txBody>
-          <a:bodyPr rtlCol="0" anchor="ctr"/>
-          <a:lstStyle/>
-          <a:p>
-            <a:pPr algn="ctr"/>
-          </a:p>
-        </p:txBody>
-      </p:sp>
-      <p:sp>
-        <p:nvSpPr>
-          <p:cNvPr id="74" name="Rectangle 73"/>
-          <p:cNvSpPr/>
-          <p:nvPr/>
-        </p:nvSpPr>
-        <p:spPr>
-          <a:xfrm>
-            <a:off x="7754112" y="4663440"/>
-            <a:ext cx="320040" cy="320040"/>
-          </a:xfrm>
-          <a:prstGeom prst="rect">
-            <a:avLst/>
-          </a:prstGeom>
-          <a:solidFill>
-            <a:srgbClr val="FFC000"/>
-          </a:solidFill>
-          <a:ln>
-            <a:noFill/>
-          </a:ln>
-        </p:spPr>
-        <p:style>
-          <a:lnRef idx="1">
-            <a:schemeClr val="accent1"/>
-          </a:lnRef>
-          <a:fillRef idx="3">
-            <a:schemeClr val="accent1"/>
-          </a:fillRef>
-          <a:effectRef idx="2">
-            <a:schemeClr val="accent1"/>
-          </a:effectRef>
-          <a:fontRef idx="minor">
-            <a:schemeClr val="lt1"/>
-          </a:fontRef>
-        </p:style>
-        <p:txBody>
-          <a:bodyPr rtlCol="0" anchor="ctr"/>
-          <a:lstStyle/>
-          <a:p>
-            <a:pPr algn="ctr"/>
-          </a:p>
-        </p:txBody>
-      </p:sp>
-      <p:sp>
-        <p:nvSpPr>
-          <p:cNvPr id="75" name="TextBox 74"/>
-          <p:cNvSpPr txBox="1"/>
-          <p:nvPr/>
-        </p:nvSpPr>
-        <p:spPr>
-          <a:xfrm>
-            <a:off x="7754112" y="4663440"/>
-            <a:ext cx="320040" cy="320040"/>
-          </a:xfrm>
-          <a:prstGeom prst="rect">
-            <a:avLst/>
-          </a:prstGeom>
-          <a:noFill/>
-        </p:spPr>
-        <p:txBody>
-          <a:bodyPr wrap="square">
-            <a:spAutoFit/>
-          </a:bodyPr>
-          <a:lstStyle/>
-          <a:p>
-            <a:pPr algn="ctr"/>
-            <a:r>
-              <a:rPr sz="1000" b="1" i="0">
-                <a:solidFill>
-                  <a:srgbClr val="FFFFFF"/>
-                </a:solidFill>
-              </a:rPr>
-              <a:t>🟡</a:t>
-            </a:r>
-          </a:p>
-        </p:txBody>
-      </p:sp>
-      <p:sp>
-        <p:nvSpPr>
-          <p:cNvPr id="76" name="TextBox 75"/>
-          <p:cNvSpPr txBox="1"/>
-          <p:nvPr/>
-        </p:nvSpPr>
-        <p:spPr>
-          <a:xfrm>
-            <a:off x="8119872" y="4626864"/>
-            <a:ext cx="3749039" cy="292608"/>
-          </a:xfrm>
-          <a:prstGeom prst="rect">
-            <a:avLst/>
-          </a:prstGeom>
-          <a:noFill/>
-        </p:spPr>
-        <p:txBody>
-          <a:bodyPr wrap="square">
-            <a:spAutoFit/>
-          </a:bodyPr>
-          <a:lstStyle/>
-          <a:p>
-            <a:pPr algn="l"/>
-            <a:r>
-              <a:rPr sz="1000" b="1" i="0">
-                <a:solidFill>
-                  <a:srgbClr val="1F3964"/>
-                </a:solidFill>
-              </a:rPr>
-              <a:t>RTU Serial Test Scheduling</a:t>
-            </a:r>
-          </a:p>
-        </p:txBody>
-      </p:sp>
-      <p:sp>
-        <p:nvSpPr>
-          <p:cNvPr id="77" name="TextBox 76"/>
-          <p:cNvSpPr txBox="1"/>
-          <p:nvPr/>
-        </p:nvSpPr>
-        <p:spPr>
-          <a:xfrm>
-            <a:off x="8119872" y="4901184"/>
-            <a:ext cx="3749039" cy="1005840"/>
-          </a:xfrm>
-          <a:prstGeom prst="rect">
-            <a:avLst/>
-          </a:prstGeom>
-          <a:noFill/>
-        </p:spPr>
-        <p:txBody>
-          <a:bodyPr wrap="square">
-            <a:spAutoFit/>
-          </a:bodyPr>
-          <a:lstStyle/>
-          <a:p>
-            <a:pPr algn="l"/>
-            <a:r>
-              <a:rPr sz="900" b="0" i="0">
-                <a:solidFill>
-                  <a:srgbClr val="404040"/>
-                </a:solidFill>
-              </a:rPr>
-              <a:t>DB9 cables delivered to John Ng ✅. Awaiting test date from relay team.</a:t>
-            </a:r>
-          </a:p>
-        </p:txBody>
-      </p:sp>
-      <p:sp>
-        <p:nvSpPr>
-          <p:cNvPr id="78" name="Rectangle 77"/>
+              <a:t>Melville &amp; 6DL Pilgrim IFR/IFC — dates still TBD. Monitoring for schedule impact.</a:t>
+            </a:r>
+          </a:p>
+        </p:txBody>
+      </p:sp>
+      <p:sp>
+        <p:nvSpPr>
+          <p:cNvPr id="81" name="Rectangle 80"/>
           <p:cNvSpPr/>
           <p:nvPr/>
         </p:nvSpPr>
@@ -6065,7 +6168,7 @@
       </p:sp>
       <p:sp>
         <p:nvSpPr>
-          <p:cNvPr id="79" name="TextBox 78"/>
+          <p:cNvPr id="82" name="TextBox 81"/>
           <p:cNvSpPr txBox="1"/>
           <p:nvPr/>
         </p:nvSpPr>
